--- a/first-time-homebuyer/Homebuyers-Playbook.pptx
+++ b/first-time-homebuyer/Homebuyers-Playbook.pptx
@@ -52,6 +52,7 @@
     <p:sldId id="300" r:id="rId51"/>
     <p:sldId id="301" r:id="rId52"/>
     <p:sldId id="302" r:id="rId53"/>
+    <p:sldId id="303" r:id="rId54"/>
   </p:sldIdLst>
   <p:sldSz cx="12191695" cy="6858000" type="screen4x3"/>
   <p:notesSz cx="6858000" cy="9144000"/>
@@ -3399,7 +3400,7 @@
                 </a:solidFill>
                 <a:latin typeface="Open Sans"/>
               </a:rPr>
-              <a:t>[ PHONE ]</a:t>
+              <a:t>303-883-8519</a:t>
             </a:r>
           </a:p>
           <a:p>
@@ -3427,7 +3428,7 @@
                 </a:solidFill>
                 <a:latin typeface="Open Sans"/>
               </a:rPr>
-              <a:t>info@msfgmortgage.com</a:t>
+              <a:t>Seth.angell@msfg.us</a:t>
             </a:r>
           </a:p>
           <a:p>
@@ -8951,7 +8952,7 @@
         <p:spPr>
           <a:xfrm>
             <a:off x="609584" y="4762553"/>
-            <a:ext cx="9524761" cy="571485"/>
+            <a:ext cx="9524761" cy="533386"/>
           </a:xfrm>
           <a:prstGeom prst="rect">
             <a:avLst/>
@@ -10221,7 +10222,7 @@
         </p:nvSpPr>
         <p:spPr>
           <a:xfrm>
-            <a:off x="609584" y="939775"/>
+            <a:off x="609584" y="863577"/>
             <a:ext cx="10972527" cy="1269968"/>
           </a:xfrm>
           <a:prstGeom prst="rect">
@@ -10237,7 +10238,7 @@
           <a:p>
             <a:pPr algn="l"/>
             <a:r>
-              <a:rPr sz="3600" b="1">
+              <a:rPr sz="3000" b="1">
                 <a:solidFill>
                   <a:srgbClr val="FFFFFF"/>
                 </a:solidFill>
@@ -10256,7 +10257,7 @@
         </p:nvSpPr>
         <p:spPr>
           <a:xfrm>
-            <a:off x="609584" y="1638257"/>
+            <a:off x="609584" y="1574759"/>
             <a:ext cx="609584" cy="50798"/>
           </a:xfrm>
           <a:prstGeom prst="rect">
@@ -10300,8 +10301,8 @@
         </p:nvSpPr>
         <p:spPr>
           <a:xfrm>
-            <a:off x="609584" y="1917649"/>
-            <a:ext cx="355591" cy="355591"/>
+            <a:off x="609584" y="1892251"/>
+            <a:ext cx="317492" cy="317492"/>
           </a:xfrm>
           <a:prstGeom prst="rect">
             <a:avLst/>
@@ -10334,7 +10335,7 @@
           <a:p>
             <a:pPr algn="ctr"/>
             <a:r>
-              <a:rPr sz="1400" b="1">
+              <a:rPr sz="1300" b="1">
                 <a:solidFill>
                   <a:srgbClr val="0C3335"/>
                 </a:solidFill>
@@ -10353,8 +10354,8 @@
         </p:nvSpPr>
         <p:spPr>
           <a:xfrm>
-            <a:off x="1142970" y="1917649"/>
-            <a:ext cx="9207269" cy="952476"/>
+            <a:off x="1104871" y="1892251"/>
+            <a:ext cx="9651758" cy="761980"/>
           </a:xfrm>
           <a:prstGeom prst="rect">
             <a:avLst/>
@@ -10369,7 +10370,7 @@
           <a:p>
             <a:pPr algn="l"/>
             <a:r>
-              <a:rPr sz="1700" b="1">
+              <a:rPr sz="1500" b="1">
                 <a:solidFill>
                   <a:srgbClr val="FFFFFF"/>
                 </a:solidFill>
@@ -10381,14 +10382,14 @@
           <a:p>
             <a:pPr algn="l">
               <a:spcBef>
-                <a:spcPts val="400"/>
+                <a:spcPts val="300"/>
               </a:spcBef>
               <a:spcAft>
                 <a:spcPts val="0"/>
               </a:spcAft>
             </a:pPr>
             <a:r>
-              <a:rPr sz="1200" b="0">
+              <a:rPr sz="1100" b="0">
                 <a:solidFill>
                   <a:srgbClr val="D6DEDA"/>
                 </a:solidFill>
@@ -10407,8 +10408,8 @@
         </p:nvSpPr>
         <p:spPr>
           <a:xfrm>
-            <a:off x="609584" y="2870125"/>
-            <a:ext cx="355591" cy="355591"/>
+            <a:off x="609584" y="2628832"/>
+            <a:ext cx="317492" cy="317492"/>
           </a:xfrm>
           <a:prstGeom prst="rect">
             <a:avLst/>
@@ -10441,7 +10442,7 @@
           <a:p>
             <a:pPr algn="ctr"/>
             <a:r>
-              <a:rPr sz="1400" b="1">
+              <a:rPr sz="1300" b="1">
                 <a:solidFill>
                   <a:srgbClr val="0C3335"/>
                 </a:solidFill>
@@ -10460,8 +10461,8 @@
         </p:nvSpPr>
         <p:spPr>
           <a:xfrm>
-            <a:off x="1142970" y="2870125"/>
-            <a:ext cx="9207269" cy="952476"/>
+            <a:off x="1104871" y="2628832"/>
+            <a:ext cx="9651758" cy="761980"/>
           </a:xfrm>
           <a:prstGeom prst="rect">
             <a:avLst/>
@@ -10476,7 +10477,7 @@
           <a:p>
             <a:pPr algn="l"/>
             <a:r>
-              <a:rPr sz="1700" b="1">
+              <a:rPr sz="1500" b="1">
                 <a:solidFill>
                   <a:srgbClr val="FFFFFF"/>
                 </a:solidFill>
@@ -10488,14 +10489,14 @@
           <a:p>
             <a:pPr algn="l">
               <a:spcBef>
-                <a:spcPts val="400"/>
+                <a:spcPts val="300"/>
               </a:spcBef>
               <a:spcAft>
                 <a:spcPts val="0"/>
               </a:spcAft>
             </a:pPr>
             <a:r>
-              <a:rPr sz="1200" b="0">
+              <a:rPr sz="1100" b="0">
                 <a:solidFill>
                   <a:srgbClr val="D6DEDA"/>
                 </a:solidFill>
@@ -10514,8 +10515,8 @@
         </p:nvSpPr>
         <p:spPr>
           <a:xfrm>
-            <a:off x="609584" y="3822601"/>
-            <a:ext cx="355591" cy="355591"/>
+            <a:off x="609584" y="3365413"/>
+            <a:ext cx="317492" cy="317492"/>
           </a:xfrm>
           <a:prstGeom prst="rect">
             <a:avLst/>
@@ -10548,7 +10549,7 @@
           <a:p>
             <a:pPr algn="ctr"/>
             <a:r>
-              <a:rPr sz="1400" b="1">
+              <a:rPr sz="1300" b="1">
                 <a:solidFill>
                   <a:srgbClr val="0C3335"/>
                 </a:solidFill>
@@ -10567,8 +10568,8 @@
         </p:nvSpPr>
         <p:spPr>
           <a:xfrm>
-            <a:off x="1142970" y="3822601"/>
-            <a:ext cx="9207269" cy="952476"/>
+            <a:off x="1104871" y="3365413"/>
+            <a:ext cx="9651758" cy="761980"/>
           </a:xfrm>
           <a:prstGeom prst="rect">
             <a:avLst/>
@@ -10583,7 +10584,7 @@
           <a:p>
             <a:pPr algn="l"/>
             <a:r>
-              <a:rPr sz="1700" b="1">
+              <a:rPr sz="1500" b="1">
                 <a:solidFill>
                   <a:srgbClr val="FFFFFF"/>
                 </a:solidFill>
@@ -10595,14 +10596,14 @@
           <a:p>
             <a:pPr algn="l">
               <a:spcBef>
-                <a:spcPts val="400"/>
+                <a:spcPts val="300"/>
               </a:spcBef>
               <a:spcAft>
                 <a:spcPts val="0"/>
               </a:spcAft>
             </a:pPr>
             <a:r>
-              <a:rPr sz="1200" b="0">
+              <a:rPr sz="1100" b="0">
                 <a:solidFill>
                   <a:srgbClr val="D6DEDA"/>
                 </a:solidFill>
@@ -10621,8 +10622,8 @@
         </p:nvSpPr>
         <p:spPr>
           <a:xfrm>
-            <a:off x="609584" y="4775077"/>
-            <a:ext cx="355591" cy="355591"/>
+            <a:off x="609584" y="4101994"/>
+            <a:ext cx="317492" cy="317492"/>
           </a:xfrm>
           <a:prstGeom prst="rect">
             <a:avLst/>
@@ -10655,7 +10656,7 @@
           <a:p>
             <a:pPr algn="ctr"/>
             <a:r>
-              <a:rPr sz="1400" b="1">
+              <a:rPr sz="1300" b="1">
                 <a:solidFill>
                   <a:srgbClr val="0C3335"/>
                 </a:solidFill>
@@ -10674,8 +10675,8 @@
         </p:nvSpPr>
         <p:spPr>
           <a:xfrm>
-            <a:off x="1142970" y="4775077"/>
-            <a:ext cx="9207269" cy="952476"/>
+            <a:off x="1104871" y="4101994"/>
+            <a:ext cx="9651758" cy="761980"/>
           </a:xfrm>
           <a:prstGeom prst="rect">
             <a:avLst/>
@@ -10690,7 +10691,7 @@
           <a:p>
             <a:pPr algn="l"/>
             <a:r>
-              <a:rPr sz="1700" b="1">
+              <a:rPr sz="1500" b="1">
                 <a:solidFill>
                   <a:srgbClr val="FFFFFF"/>
                 </a:solidFill>
@@ -10702,14 +10703,14 @@
           <a:p>
             <a:pPr algn="l">
               <a:spcBef>
-                <a:spcPts val="400"/>
+                <a:spcPts val="300"/>
               </a:spcBef>
               <a:spcAft>
                 <a:spcPts val="0"/>
               </a:spcAft>
             </a:pPr>
             <a:r>
-              <a:rPr sz="1200" b="0">
+              <a:rPr sz="1100" b="0">
                 <a:solidFill>
                   <a:srgbClr val="D6DEDA"/>
                 </a:solidFill>
@@ -10728,8 +10729,8 @@
         </p:nvSpPr>
         <p:spPr>
           <a:xfrm>
-            <a:off x="609584" y="5727553"/>
-            <a:ext cx="355591" cy="355591"/>
+            <a:off x="609584" y="4838575"/>
+            <a:ext cx="317492" cy="317492"/>
           </a:xfrm>
           <a:prstGeom prst="rect">
             <a:avLst/>
@@ -10762,7 +10763,7 @@
           <a:p>
             <a:pPr algn="ctr"/>
             <a:r>
-              <a:rPr sz="1400" b="1">
+              <a:rPr sz="1300" b="1">
                 <a:solidFill>
                   <a:srgbClr val="0C3335"/>
                 </a:solidFill>
@@ -10781,8 +10782,8 @@
         </p:nvSpPr>
         <p:spPr>
           <a:xfrm>
-            <a:off x="1142970" y="5727553"/>
-            <a:ext cx="9207269" cy="952476"/>
+            <a:off x="1104871" y="4838575"/>
+            <a:ext cx="9651758" cy="761980"/>
           </a:xfrm>
           <a:prstGeom prst="rect">
             <a:avLst/>
@@ -10797,7 +10798,7 @@
           <a:p>
             <a:pPr algn="l"/>
             <a:r>
-              <a:rPr sz="1700" b="1">
+              <a:rPr sz="1500" b="1">
                 <a:solidFill>
                   <a:srgbClr val="FFFFFF"/>
                 </a:solidFill>
@@ -10809,14 +10810,14 @@
           <a:p>
             <a:pPr algn="l">
               <a:spcBef>
-                <a:spcPts val="400"/>
+                <a:spcPts val="300"/>
               </a:spcBef>
               <a:spcAft>
                 <a:spcPts val="0"/>
               </a:spcAft>
             </a:pPr>
             <a:r>
-              <a:rPr sz="1200" b="0">
+              <a:rPr sz="1100" b="0">
                 <a:solidFill>
                   <a:srgbClr val="D6DEDA"/>
                 </a:solidFill>
@@ -11175,7 +11176,7 @@
                 </a:solidFill>
                 <a:latin typeface="Open Sans"/>
               </a:rPr>
-              <a:t>[ PHONE ]</a:t>
+              <a:t>303-883-8519</a:t>
             </a:r>
           </a:p>
           <a:p>
@@ -11203,7 +11204,7 @@
                 </a:solidFill>
                 <a:latin typeface="Open Sans"/>
               </a:rPr>
-              <a:t>info@msfgmortgage.com</a:t>
+              <a:t>Seth.angell@msfg.us</a:t>
             </a:r>
           </a:p>
           <a:p>
@@ -11238,7 +11239,9 @@
       </p:sp>
       <p:sp>
         <p:nvSpPr>
-          <p:cNvPr id="5" name="Rectangle 4"/>
+          <p:cNvPr id="5" name="Rectangle 4">
+            <a:hlinkClick r:id="rId2"/>
+          </p:cNvPr>
           <p:cNvSpPr/>
           <p:nvPr/>
         </p:nvSpPr>
@@ -11284,74 +11287,21 @@
                 </a:solidFill>
                 <a:latin typeface="Montserrat"/>
               </a:rPr>
-              <a:t>APPLY NOW  [ LINK ]</a:t>
-            </a:r>
-          </a:p>
-        </p:txBody>
-      </p:sp>
-      <p:sp>
-        <p:nvSpPr>
-          <p:cNvPr id="6" name="Rectangle 5"/>
-          <p:cNvSpPr/>
-          <p:nvPr/>
-        </p:nvSpPr>
-        <p:spPr>
-          <a:xfrm>
-            <a:off x="609584" y="5016547"/>
-            <a:ext cx="3555911" cy="571485"/>
-          </a:xfrm>
-          <a:prstGeom prst="rect">
-            <a:avLst/>
-          </a:prstGeom>
-          <a:noFill/>
-          <a:ln w="12700">
-            <a:solidFill>
-              <a:srgbClr val="FFFFFF"/>
-            </a:solidFill>
-          </a:ln>
-          <a:effectLst/>
-        </p:spPr>
-        <p:style>
-          <a:lnRef idx="1">
-            <a:schemeClr val="accent1"/>
-          </a:lnRef>
-          <a:fillRef idx="3">
-            <a:schemeClr val="accent1"/>
-          </a:fillRef>
-          <a:effectRef idx="2">
-            <a:schemeClr val="accent1"/>
-          </a:effectRef>
-          <a:fontRef idx="minor">
-            <a:schemeClr val="lt1"/>
-          </a:fontRef>
-        </p:style>
-        <p:txBody>
-          <a:bodyPr rtlCol="0" anchor="ctr"/>
-          <a:lstStyle/>
-          <a:p>
-            <a:pPr algn="ctr"/>
-            <a:r>
-              <a:rPr sz="1000" b="1">
-                <a:solidFill>
-                  <a:srgbClr val="FFFFFF"/>
-                </a:solidFill>
-                <a:latin typeface="Montserrat"/>
-              </a:rPr>
-              <a:t>SCHEDULE A CONSULTATION  [ LINK ]</a:t>
+              <a:t>APPLY NOW</a:t>
             </a:r>
           </a:p>
         </p:txBody>
       </p:sp>
       <p:pic>
         <p:nvPicPr>
-          <p:cNvPr id="7" name="Picture 6" descr="qr-seth.png"/>
+          <p:cNvPr id="6" name="Picture 5" descr="qr-seth.png"/>
           <p:cNvPicPr>
             <a:picLocks noChangeAspect="1"/>
           </p:cNvPicPr>
           <p:nvPr/>
         </p:nvPicPr>
         <p:blipFill>
-          <a:blip r:embed="rId2"/>
+          <a:blip r:embed="rId3"/>
           <a:stretch>
             <a:fillRect/>
           </a:stretch>
@@ -11368,7 +11318,7 @@
       </p:pic>
       <p:sp>
         <p:nvSpPr>
-          <p:cNvPr id="8" name="Rectangle 7"/>
+          <p:cNvPr id="7" name="Rectangle 6"/>
           <p:cNvSpPr/>
           <p:nvPr/>
         </p:nvSpPr>
@@ -11412,7 +11362,7 @@
       </p:sp>
       <p:sp>
         <p:nvSpPr>
-          <p:cNvPr id="9" name="Rectangle 8"/>
+          <p:cNvPr id="8" name="Rectangle 7"/>
           <p:cNvSpPr/>
           <p:nvPr/>
         </p:nvSpPr>
@@ -11456,14 +11406,14 @@
       </p:sp>
       <p:pic>
         <p:nvPicPr>
-          <p:cNvPr id="10" name="Picture 9" descr="logo-horizontal.png"/>
+          <p:cNvPr id="9" name="Picture 8" descr="logo-horizontal.png"/>
           <p:cNvPicPr>
             <a:picLocks noChangeAspect="1"/>
           </p:cNvPicPr>
           <p:nvPr/>
         </p:nvPicPr>
         <p:blipFill>
-          <a:blip r:embed="rId3"/>
+          <a:blip r:embed="rId4"/>
           <a:stretch>
             <a:fillRect/>
           </a:stretch>
@@ -11480,7 +11430,7 @@
       </p:pic>
       <p:sp>
         <p:nvSpPr>
-          <p:cNvPr id="11" name="TextBox 10"/>
+          <p:cNvPr id="10" name="TextBox 9"/>
           <p:cNvSpPr txBox="1"/>
           <p:nvPr/>
         </p:nvSpPr>
@@ -11632,7 +11582,7 @@
                 </a:solidFill>
                 <a:latin typeface="Montserrat"/>
               </a:rPr>
-              <a:t>THE MYTH</a:t>
+              <a:t>COMPARE</a:t>
             </a:r>
           </a:p>
           <a:p>
@@ -11651,7 +11601,7 @@
                 </a:solidFill>
                 <a:latin typeface="Montserrat"/>
               </a:rPr>
-              <a:t>You need 20% down</a:t>
+              <a:t>Conventional vs FHA vs VA</a:t>
             </a:r>
           </a:p>
         </p:txBody>
@@ -11709,7 +11659,7 @@
         <p:spPr>
           <a:xfrm>
             <a:off x="609584" y="2285942"/>
-            <a:ext cx="10972527" cy="4444888"/>
+            <a:ext cx="10972527" cy="888977"/>
           </a:xfrm>
           <a:prstGeom prst="rect">
             <a:avLst/>
@@ -11724,13 +11674,640 @@
           <a:p>
             <a:pPr algn="l"/>
             <a:r>
+              <a:rPr sz="1250" b="0">
+                <a:solidFill>
+                  <a:srgbClr val="404041"/>
+                </a:solidFill>
+                <a:latin typeface="Open Sans"/>
+              </a:rPr>
+              <a:t>Same borrower, same price — the rate is only part of the story. APR folds in mortgage insurance and fees, so the lowest rate isn't always the lowest APR.</a:t>
+            </a:r>
+          </a:p>
+        </p:txBody>
+      </p:sp>
+      <p:graphicFrame>
+        <p:nvGraphicFramePr>
+          <p:cNvPr id="6" name="Table 5"/>
+          <p:cNvGraphicFramePr>
+            <a:graphicFrameLocks noGrp="1"/>
+          </p:cNvGraphicFramePr>
+          <p:nvPr/>
+        </p:nvGraphicFramePr>
+        <p:xfrm>
+          <a:off x="609584" y="3047923"/>
+          <a:ext cx="10972527" cy="1981150"/>
+        </p:xfrm>
+        <a:graphic>
+          <a:graphicData uri="http://schemas.openxmlformats.org/drawingml/2006/table">
+            <a:tbl>
+              <a:tblPr firstRow="1" bandRow="1">
+                <a:tableStyleId>{5C22544A-7EE6-4342-B048-85BDC9FD1C3A}</a:tableStyleId>
+              </a:tblPr>
+              <a:tblGrid>
+                <a:gridCol w="2743131"/>
+                <a:gridCol w="2743131"/>
+                <a:gridCol w="2743131"/>
+                <a:gridCol w="2743134"/>
+              </a:tblGrid>
+              <a:tr h="330191">
+                <a:tc>
+                  <a:txBody>
+                    <a:bodyPr/>
+                    <a:lstStyle/>
+                    <a:p>
+                      <a:pPr algn="l"/>
+                      <a:r>
+                        <a:rPr sz="1200" b="1">
+                          <a:solidFill>
+                            <a:srgbClr val="FFFFFF"/>
+                          </a:solidFill>
+                          <a:latin typeface="Montserrat"/>
+                        </a:rPr>
+                        <a:t/>
+                      </a:r>
+                    </a:p>
+                  </a:txBody>
+                  <a:tcPr>
+                    <a:solidFill>
+                      <a:srgbClr val="0C3335"/>
+                    </a:solidFill>
+                  </a:tcPr>
+                </a:tc>
+                <a:tc>
+                  <a:txBody>
+                    <a:bodyPr/>
+                    <a:lstStyle/>
+                    <a:p>
+                      <a:pPr algn="l"/>
+                      <a:r>
+                        <a:rPr sz="1200" b="1">
+                          <a:solidFill>
+                            <a:srgbClr val="FFFFFF"/>
+                          </a:solidFill>
+                          <a:latin typeface="Montserrat"/>
+                        </a:rPr>
+                        <a:t>Conventional</a:t>
+                      </a:r>
+                    </a:p>
+                  </a:txBody>
+                  <a:tcPr>
+                    <a:solidFill>
+                      <a:srgbClr val="0C3335"/>
+                    </a:solidFill>
+                  </a:tcPr>
+                </a:tc>
+                <a:tc>
+                  <a:txBody>
+                    <a:bodyPr/>
+                    <a:lstStyle/>
+                    <a:p>
+                      <a:pPr algn="l"/>
+                      <a:r>
+                        <a:rPr sz="1200" b="1">
+                          <a:solidFill>
+                            <a:srgbClr val="FFFFFF"/>
+                          </a:solidFill>
+                          <a:latin typeface="Montserrat"/>
+                        </a:rPr>
+                        <a:t>FHA</a:t>
+                      </a:r>
+                    </a:p>
+                  </a:txBody>
+                  <a:tcPr>
+                    <a:solidFill>
+                      <a:srgbClr val="0C3335"/>
+                    </a:solidFill>
+                  </a:tcPr>
+                </a:tc>
+                <a:tc>
+                  <a:txBody>
+                    <a:bodyPr/>
+                    <a:lstStyle/>
+                    <a:p>
+                      <a:pPr algn="l"/>
+                      <a:r>
+                        <a:rPr sz="1200" b="1">
+                          <a:solidFill>
+                            <a:srgbClr val="FFFFFF"/>
+                          </a:solidFill>
+                          <a:latin typeface="Montserrat"/>
+                        </a:rPr>
+                        <a:t>VA</a:t>
+                      </a:r>
+                    </a:p>
+                  </a:txBody>
+                  <a:tcPr>
+                    <a:solidFill>
+                      <a:srgbClr val="0C3335"/>
+                    </a:solidFill>
+                  </a:tcPr>
+                </a:tc>
+              </a:tr>
+              <a:tr h="330191">
+                <a:tc>
+                  <a:txBody>
+                    <a:bodyPr/>
+                    <a:lstStyle/>
+                    <a:p>
+                      <a:pPr algn="l"/>
+                      <a:r>
+                        <a:rPr sz="1000" b="1">
+                          <a:solidFill>
+                            <a:srgbClr val="0C3335"/>
+                          </a:solidFill>
+                          <a:latin typeface="Montserrat"/>
+                        </a:rPr>
+                        <a:t>Minimum down</a:t>
+                      </a:r>
+                    </a:p>
+                  </a:txBody>
+                  <a:tcPr>
+                    <a:solidFill>
+                      <a:srgbClr val="F5F7F4"/>
+                    </a:solidFill>
+                  </a:tcPr>
+                </a:tc>
+                <a:tc>
+                  <a:txBody>
+                    <a:bodyPr/>
+                    <a:lstStyle/>
+                    <a:p>
+                      <a:pPr algn="l"/>
+                      <a:r>
+                        <a:rPr sz="1000" b="0">
+                          <a:solidFill>
+                            <a:srgbClr val="404041"/>
+                          </a:solidFill>
+                          <a:latin typeface="Open Sans"/>
+                        </a:rPr>
+                        <a:t>3%</a:t>
+                      </a:r>
+                    </a:p>
+                  </a:txBody>
+                  <a:tcPr>
+                    <a:solidFill>
+                      <a:srgbClr val="FFFFFF"/>
+                    </a:solidFill>
+                  </a:tcPr>
+                </a:tc>
+                <a:tc>
+                  <a:txBody>
+                    <a:bodyPr/>
+                    <a:lstStyle/>
+                    <a:p>
+                      <a:pPr algn="l"/>
+                      <a:r>
+                        <a:rPr sz="1000" b="0">
+                          <a:solidFill>
+                            <a:srgbClr val="404041"/>
+                          </a:solidFill>
+                          <a:latin typeface="Open Sans"/>
+                        </a:rPr>
+                        <a:t>3.5%</a:t>
+                      </a:r>
+                    </a:p>
+                  </a:txBody>
+                  <a:tcPr>
+                    <a:solidFill>
+                      <a:srgbClr val="FFFFFF"/>
+                    </a:solidFill>
+                  </a:tcPr>
+                </a:tc>
+                <a:tc>
+                  <a:txBody>
+                    <a:bodyPr/>
+                    <a:lstStyle/>
+                    <a:p>
+                      <a:pPr algn="l"/>
+                      <a:r>
+                        <a:rPr sz="1000" b="0">
+                          <a:solidFill>
+                            <a:srgbClr val="404041"/>
+                          </a:solidFill>
+                          <a:latin typeface="Open Sans"/>
+                        </a:rPr>
+                        <a:t>0%</a:t>
+                      </a:r>
+                    </a:p>
+                  </a:txBody>
+                  <a:tcPr>
+                    <a:solidFill>
+                      <a:srgbClr val="FFFFFF"/>
+                    </a:solidFill>
+                  </a:tcPr>
+                </a:tc>
+              </a:tr>
+              <a:tr h="330191">
+                <a:tc>
+                  <a:txBody>
+                    <a:bodyPr/>
+                    <a:lstStyle/>
+                    <a:p>
+                      <a:pPr algn="l"/>
+                      <a:r>
+                        <a:rPr sz="1000" b="1">
+                          <a:solidFill>
+                            <a:srgbClr val="0C3335"/>
+                          </a:solidFill>
+                          <a:latin typeface="Montserrat"/>
+                        </a:rPr>
+                        <a:t>Mortgage insurance</a:t>
+                      </a:r>
+                    </a:p>
+                  </a:txBody>
+                  <a:tcPr>
+                    <a:solidFill>
+                      <a:srgbClr val="F5F7F4"/>
+                    </a:solidFill>
+                  </a:tcPr>
+                </a:tc>
+                <a:tc>
+                  <a:txBody>
+                    <a:bodyPr/>
+                    <a:lstStyle/>
+                    <a:p>
+                      <a:pPr algn="l"/>
+                      <a:r>
+                        <a:rPr sz="1000" b="0">
+                          <a:solidFill>
+                            <a:srgbClr val="404041"/>
+                          </a:solidFill>
+                          <a:latin typeface="Open Sans"/>
+                        </a:rPr>
+                        <a:t>Removable</a:t>
+                      </a:r>
+                    </a:p>
+                  </a:txBody>
+                  <a:tcPr>
+                    <a:solidFill>
+                      <a:srgbClr val="FFFFFF"/>
+                    </a:solidFill>
+                  </a:tcPr>
+                </a:tc>
+                <a:tc>
+                  <a:txBody>
+                    <a:bodyPr/>
+                    <a:lstStyle/>
+                    <a:p>
+                      <a:pPr algn="l"/>
+                      <a:r>
+                        <a:rPr sz="1000" b="0">
+                          <a:solidFill>
+                            <a:srgbClr val="404041"/>
+                          </a:solidFill>
+                          <a:latin typeface="Open Sans"/>
+                        </a:rPr>
+                        <a:t>Often life of loan</a:t>
+                      </a:r>
+                    </a:p>
+                  </a:txBody>
+                  <a:tcPr>
+                    <a:solidFill>
+                      <a:srgbClr val="FFFFFF"/>
+                    </a:solidFill>
+                  </a:tcPr>
+                </a:tc>
+                <a:tc>
+                  <a:txBody>
+                    <a:bodyPr/>
+                    <a:lstStyle/>
+                    <a:p>
+                      <a:pPr algn="l"/>
+                      <a:r>
+                        <a:rPr sz="1000" b="0">
+                          <a:solidFill>
+                            <a:srgbClr val="404041"/>
+                          </a:solidFill>
+                          <a:latin typeface="Open Sans"/>
+                        </a:rPr>
+                        <a:t>None</a:t>
+                      </a:r>
+                    </a:p>
+                  </a:txBody>
+                  <a:tcPr>
+                    <a:solidFill>
+                      <a:srgbClr val="FFFFFF"/>
+                    </a:solidFill>
+                  </a:tcPr>
+                </a:tc>
+              </a:tr>
+              <a:tr h="330191">
+                <a:tc>
+                  <a:txBody>
+                    <a:bodyPr/>
+                    <a:lstStyle/>
+                    <a:p>
+                      <a:pPr algn="l"/>
+                      <a:r>
+                        <a:rPr sz="1000" b="1">
+                          <a:solidFill>
+                            <a:srgbClr val="0C3335"/>
+                          </a:solidFill>
+                          <a:latin typeface="Montserrat"/>
+                        </a:rPr>
+                        <a:t>Illustrative rate</a:t>
+                      </a:r>
+                    </a:p>
+                  </a:txBody>
+                  <a:tcPr>
+                    <a:solidFill>
+                      <a:srgbClr val="F5F7F4"/>
+                    </a:solidFill>
+                  </a:tcPr>
+                </a:tc>
+                <a:tc>
+                  <a:txBody>
+                    <a:bodyPr/>
+                    <a:lstStyle/>
+                    <a:p>
+                      <a:pPr algn="l"/>
+                      <a:r>
+                        <a:rPr sz="1000" b="0">
+                          <a:solidFill>
+                            <a:srgbClr val="404041"/>
+                          </a:solidFill>
+                          <a:latin typeface="Open Sans"/>
+                        </a:rPr>
+                        <a:t>6.75%</a:t>
+                      </a:r>
+                    </a:p>
+                  </a:txBody>
+                  <a:tcPr>
+                    <a:solidFill>
+                      <a:srgbClr val="FFFFFF"/>
+                    </a:solidFill>
+                  </a:tcPr>
+                </a:tc>
+                <a:tc>
+                  <a:txBody>
+                    <a:bodyPr/>
+                    <a:lstStyle/>
+                    <a:p>
+                      <a:pPr algn="l"/>
+                      <a:r>
+                        <a:rPr sz="1000" b="0">
+                          <a:solidFill>
+                            <a:srgbClr val="404041"/>
+                          </a:solidFill>
+                          <a:latin typeface="Open Sans"/>
+                        </a:rPr>
+                        <a:t>6.50%</a:t>
+                      </a:r>
+                    </a:p>
+                  </a:txBody>
+                  <a:tcPr>
+                    <a:solidFill>
+                      <a:srgbClr val="FFFFFF"/>
+                    </a:solidFill>
+                  </a:tcPr>
+                </a:tc>
+                <a:tc>
+                  <a:txBody>
+                    <a:bodyPr/>
+                    <a:lstStyle/>
+                    <a:p>
+                      <a:pPr algn="l"/>
+                      <a:r>
+                        <a:rPr sz="1000" b="0">
+                          <a:solidFill>
+                            <a:srgbClr val="404041"/>
+                          </a:solidFill>
+                          <a:latin typeface="Open Sans"/>
+                        </a:rPr>
+                        <a:t>6.25%</a:t>
+                      </a:r>
+                    </a:p>
+                  </a:txBody>
+                  <a:tcPr>
+                    <a:solidFill>
+                      <a:srgbClr val="FFFFFF"/>
+                    </a:solidFill>
+                  </a:tcPr>
+                </a:tc>
+              </a:tr>
+              <a:tr h="330191">
+                <a:tc>
+                  <a:txBody>
+                    <a:bodyPr/>
+                    <a:lstStyle/>
+                    <a:p>
+                      <a:pPr algn="l"/>
+                      <a:r>
+                        <a:rPr sz="1000" b="1">
+                          <a:solidFill>
+                            <a:srgbClr val="0C3335"/>
+                          </a:solidFill>
+                          <a:latin typeface="Montserrat"/>
+                        </a:rPr>
+                        <a:t>Illustrative APR</a:t>
+                      </a:r>
+                    </a:p>
+                  </a:txBody>
+                  <a:tcPr>
+                    <a:solidFill>
+                      <a:srgbClr val="F5F7F4"/>
+                    </a:solidFill>
+                  </a:tcPr>
+                </a:tc>
+                <a:tc>
+                  <a:txBody>
+                    <a:bodyPr/>
+                    <a:lstStyle/>
+                    <a:p>
+                      <a:pPr algn="l"/>
+                      <a:r>
+                        <a:rPr sz="1000" b="0">
+                          <a:solidFill>
+                            <a:srgbClr val="404041"/>
+                          </a:solidFill>
+                          <a:latin typeface="Open Sans"/>
+                        </a:rPr>
+                        <a:t>6.90%</a:t>
+                      </a:r>
+                    </a:p>
+                  </a:txBody>
+                  <a:tcPr>
+                    <a:solidFill>
+                      <a:srgbClr val="FFFFFF"/>
+                    </a:solidFill>
+                  </a:tcPr>
+                </a:tc>
+                <a:tc>
+                  <a:txBody>
+                    <a:bodyPr/>
+                    <a:lstStyle/>
+                    <a:p>
+                      <a:pPr algn="l"/>
+                      <a:r>
+                        <a:rPr sz="1000" b="0">
+                          <a:solidFill>
+                            <a:srgbClr val="404041"/>
+                          </a:solidFill>
+                          <a:latin typeface="Open Sans"/>
+                        </a:rPr>
+                        <a:t>7.40%</a:t>
+                      </a:r>
+                    </a:p>
+                  </a:txBody>
+                  <a:tcPr>
+                    <a:solidFill>
+                      <a:srgbClr val="FFFFFF"/>
+                    </a:solidFill>
+                  </a:tcPr>
+                </a:tc>
+                <a:tc>
+                  <a:txBody>
+                    <a:bodyPr/>
+                    <a:lstStyle/>
+                    <a:p>
+                      <a:pPr algn="l"/>
+                      <a:r>
+                        <a:rPr sz="1000" b="0">
+                          <a:solidFill>
+                            <a:srgbClr val="404041"/>
+                          </a:solidFill>
+                          <a:latin typeface="Open Sans"/>
+                        </a:rPr>
+                        <a:t>6.45%</a:t>
+                      </a:r>
+                    </a:p>
+                  </a:txBody>
+                  <a:tcPr>
+                    <a:solidFill>
+                      <a:srgbClr val="FFFFFF"/>
+                    </a:solidFill>
+                  </a:tcPr>
+                </a:tc>
+              </a:tr>
+              <a:tr h="330195">
+                <a:tc>
+                  <a:txBody>
+                    <a:bodyPr/>
+                    <a:lstStyle/>
+                    <a:p>
+                      <a:pPr algn="l"/>
+                      <a:r>
+                        <a:rPr sz="1000" b="1">
+                          <a:solidFill>
+                            <a:srgbClr val="0C3335"/>
+                          </a:solidFill>
+                          <a:latin typeface="Montserrat"/>
+                        </a:rPr>
+                        <a:t>Best for</a:t>
+                      </a:r>
+                    </a:p>
+                  </a:txBody>
+                  <a:tcPr>
+                    <a:solidFill>
+                      <a:srgbClr val="F5F7F4"/>
+                    </a:solidFill>
+                  </a:tcPr>
+                </a:tc>
+                <a:tc>
+                  <a:txBody>
+                    <a:bodyPr/>
+                    <a:lstStyle/>
+                    <a:p>
+                      <a:pPr algn="l"/>
+                      <a:r>
+                        <a:rPr sz="1000" b="0">
+                          <a:solidFill>
+                            <a:srgbClr val="404041"/>
+                          </a:solidFill>
+                          <a:latin typeface="Open Sans"/>
+                        </a:rPr>
+                        <a:t>Strong credit</a:t>
+                      </a:r>
+                    </a:p>
+                  </a:txBody>
+                  <a:tcPr>
+                    <a:solidFill>
+                      <a:srgbClr val="FFFFFF"/>
+                    </a:solidFill>
+                  </a:tcPr>
+                </a:tc>
+                <a:tc>
+                  <a:txBody>
+                    <a:bodyPr/>
+                    <a:lstStyle/>
+                    <a:p>
+                      <a:pPr algn="l"/>
+                      <a:r>
+                        <a:rPr sz="1000" b="0">
+                          <a:solidFill>
+                            <a:srgbClr val="404041"/>
+                          </a:solidFill>
+                          <a:latin typeface="Open Sans"/>
+                        </a:rPr>
+                        <a:t>Credit flexibility</a:t>
+                      </a:r>
+                    </a:p>
+                  </a:txBody>
+                  <a:tcPr>
+                    <a:solidFill>
+                      <a:srgbClr val="FFFFFF"/>
+                    </a:solidFill>
+                  </a:tcPr>
+                </a:tc>
+                <a:tc>
+                  <a:txBody>
+                    <a:bodyPr/>
+                    <a:lstStyle/>
+                    <a:p>
+                      <a:pPr algn="l"/>
+                      <a:r>
+                        <a:rPr sz="1000" b="0">
+                          <a:solidFill>
+                            <a:srgbClr val="404041"/>
+                          </a:solidFill>
+                          <a:latin typeface="Open Sans"/>
+                        </a:rPr>
+                        <a:t>Eligible veterans</a:t>
+                      </a:r>
+                    </a:p>
+                  </a:txBody>
+                  <a:tcPr>
+                    <a:solidFill>
+                      <a:srgbClr val="FFFFFF"/>
+                    </a:solidFill>
+                  </a:tcPr>
+                </a:tc>
+              </a:tr>
+            </a:tbl>
+          </a:graphicData>
+        </a:graphic>
+      </p:graphicFrame>
+      <p:sp>
+        <p:nvSpPr>
+          <p:cNvPr id="7" name="TextBox 6"/>
+          <p:cNvSpPr txBox="1"/>
+          <p:nvPr/>
+        </p:nvSpPr>
+        <p:spPr>
+          <a:xfrm>
+            <a:off x="609584" y="5232267"/>
+            <a:ext cx="10972527" cy="1498563"/>
+          </a:xfrm>
+          <a:prstGeom prst="rect">
+            <a:avLst/>
+          </a:prstGeom>
+          <a:noFill/>
+        </p:spPr>
+        <p:txBody>
+          <a:bodyPr wrap="square" anchor="t" lIns="0" rIns="0" tIns="0" bIns="0">
+            <a:spAutoFit/>
+          </a:bodyPr>
+          <a:lstStyle/>
+          <a:p>
+            <a:pPr algn="l"/>
+            <a:r>
               <a:rPr sz="1100" b="1">
                 <a:solidFill>
                   <a:srgbClr val="0C3335"/>
                 </a:solidFill>
                 <a:latin typeface="Montserrat"/>
               </a:rPr>
-              <a:t>The reality</a:t>
+              <a:t>The takeaway</a:t>
             </a:r>
           </a:p>
           <a:p>
@@ -11758,7 +12335,7 @@
                 </a:solidFill>
                 <a:latin typeface="Open Sans"/>
               </a:rPr>
-              <a:t>Conventional goes as low as </a:t>
+              <a:t>FHA's lower rate can carry a </a:t>
             </a:r>
             <a:r>
               <a:rPr sz="1300" b="1">
@@ -11767,7 +12344,7 @@
                 </a:solidFill>
                 <a:latin typeface="Open Sans"/>
               </a:rPr>
-              <a:t>3%</a:t>
+              <a:t>higher APR</a:t>
             </a:r>
             <a:r>
               <a:rPr sz="1300" b="0">
@@ -11776,34 +12353,7 @@
                 </a:solidFill>
                 <a:latin typeface="Open Sans"/>
               </a:rPr>
-              <a:t>, FHA </a:t>
-            </a:r>
-            <a:r>
-              <a:rPr sz="1300" b="1">
-                <a:solidFill>
-                  <a:srgbClr val="404041"/>
-                </a:solidFill>
-                <a:latin typeface="Open Sans"/>
-              </a:rPr>
-              <a:t>3.5%</a:t>
-            </a:r>
-            <a:r>
-              <a:rPr sz="1300" b="0">
-                <a:solidFill>
-                  <a:srgbClr val="404041"/>
-                </a:solidFill>
-                <a:latin typeface="Open Sans"/>
-              </a:rPr>
-              <a:t>, VA and USDA </a:t>
-            </a:r>
-            <a:r>
-              <a:rPr sz="1300" b="1">
-                <a:solidFill>
-                  <a:srgbClr val="404041"/>
-                </a:solidFill>
-                <a:latin typeface="Open Sans"/>
-              </a:rPr>
-              <a:t>0%</a:t>
+              <a:t> — upfront and monthly MI</a:t>
             </a:r>
           </a:p>
           <a:p>
@@ -11831,26 +12381,7 @@
                 </a:solidFill>
                 <a:latin typeface="Open Sans"/>
               </a:rPr>
-              <a:t>The median first-time buyer puts down far less than 20%</a:t>
-            </a:r>
-          </a:p>
-          <a:p>
-            <a:pPr algn="l">
-              <a:spcBef>
-                <a:spcPts val="1800"/>
-              </a:spcBef>
-              <a:spcAft>
-                <a:spcPts val="1000"/>
-              </a:spcAft>
-            </a:pPr>
-            <a:r>
-              <a:rPr sz="1100" b="1">
-                <a:solidFill>
-                  <a:srgbClr val="4B7B4D"/>
-                </a:solidFill>
-                <a:latin typeface="Montserrat"/>
-              </a:rPr>
-              <a:t>+  Pros of 20% down</a:t>
+              <a:t>VA often wins on APR — no monthly MI</a:t>
             </a:r>
           </a:p>
           <a:p>
@@ -11865,7 +12396,7 @@
             <a:r>
               <a:rPr sz="1300">
                 <a:solidFill>
-                  <a:srgbClr val="4B7B4D"/>
+                  <a:srgbClr val="8CC63E"/>
                 </a:solidFill>
                 <a:latin typeface="Open Sans"/>
               </a:rPr>
@@ -11878,26 +12409,16 @@
                 </a:solidFill>
                 <a:latin typeface="Open Sans"/>
               </a:rPr>
-              <a:t>No monthly mortgage insurance</a:t>
-            </a:r>
-          </a:p>
-          <a:p>
-            <a:pPr algn="l">
-              <a:spcBef>
-                <a:spcPts val="0"/>
-              </a:spcBef>
-              <a:spcAft>
-                <a:spcPts val="800"/>
-              </a:spcAft>
-            </a:pPr>
-            <a:r>
-              <a:rPr sz="1300">
-                <a:solidFill>
-                  <a:srgbClr val="4B7B4D"/>
-                </a:solidFill>
-                <a:latin typeface="Open Sans"/>
-              </a:rPr>
-              <a:t>■  </a:t>
+              <a:t>Ask for </a:t>
+            </a:r>
+            <a:r>
+              <a:rPr sz="1300" b="1">
+                <a:solidFill>
+                  <a:srgbClr val="404041"/>
+                </a:solidFill>
+                <a:latin typeface="Open Sans"/>
+              </a:rPr>
+              <a:t>rate AND APR</a:t>
             </a:r>
             <a:r>
               <a:rPr sz="1300" b="0">
@@ -11906,129 +12427,49 @@
                 </a:solidFill>
                 <a:latin typeface="Open Sans"/>
               </a:rPr>
-              <a:t>Lower payment and more instant equity</a:t>
-            </a:r>
-          </a:p>
-          <a:p>
-            <a:pPr algn="l">
-              <a:spcBef>
-                <a:spcPts val="1800"/>
-              </a:spcBef>
-              <a:spcAft>
-                <a:spcPts val="1000"/>
-              </a:spcAft>
-            </a:pPr>
-            <a:r>
-              <a:rPr sz="1100" b="1">
-                <a:solidFill>
-                  <a:srgbClr val="404041"/>
-                </a:solidFill>
-                <a:latin typeface="Montserrat"/>
-              </a:rPr>
-              <a:t>–  Cons</a:t>
-            </a:r>
-          </a:p>
-          <a:p>
-            <a:pPr algn="l">
-              <a:spcBef>
-                <a:spcPts val="0"/>
-              </a:spcBef>
-              <a:spcAft>
-                <a:spcPts val="800"/>
-              </a:spcAft>
-            </a:pPr>
-            <a:r>
-              <a:rPr sz="1300">
-                <a:solidFill>
-                  <a:srgbClr val="404041"/>
-                </a:solidFill>
-                <a:latin typeface="Open Sans"/>
-              </a:rPr>
-              <a:t>■  </a:t>
-            </a:r>
-            <a:r>
-              <a:rPr sz="1300" b="0">
-                <a:solidFill>
-                  <a:srgbClr val="404041"/>
-                </a:solidFill>
-                <a:latin typeface="Open Sans"/>
-              </a:rPr>
-              <a:t>Years of saving while rent builds no equity</a:t>
-            </a:r>
-          </a:p>
-          <a:p>
-            <a:pPr algn="l">
-              <a:spcBef>
-                <a:spcPts val="0"/>
-              </a:spcBef>
-              <a:spcAft>
-                <a:spcPts val="800"/>
-              </a:spcAft>
-            </a:pPr>
-            <a:r>
-              <a:rPr sz="1300">
-                <a:solidFill>
-                  <a:srgbClr val="404041"/>
-                </a:solidFill>
-                <a:latin typeface="Open Sans"/>
-              </a:rPr>
-              <a:t>■  </a:t>
-            </a:r>
-            <a:r>
-              <a:rPr sz="1300" b="0">
-                <a:solidFill>
-                  <a:srgbClr val="404041"/>
-                </a:solidFill>
-                <a:latin typeface="Open Sans"/>
-              </a:rPr>
-              <a:t>Drains the cash reserve you want after closing</a:t>
-            </a:r>
-          </a:p>
-          <a:p>
-            <a:pPr algn="l">
-              <a:spcBef>
-                <a:spcPts val="1400"/>
-              </a:spcBef>
-              <a:spcAft>
-                <a:spcPts val="800"/>
-              </a:spcAft>
-            </a:pPr>
-            <a:r>
-              <a:t>  </a:t>
-            </a:r>
-            <a:r>
-              <a:rPr sz="1300" b="0">
-                <a:solidFill>
-                  <a:srgbClr val="0C3335"/>
-                </a:solidFill>
-                <a:latin typeface="Open Sans"/>
-              </a:rPr>
-              <a:t>Mortgage insurance on a conventional loan is </a:t>
-            </a:r>
-            <a:r>
-              <a:rPr sz="1300" b="1">
-                <a:solidFill>
-                  <a:srgbClr val="0C3335"/>
-                </a:solidFill>
-                <a:latin typeface="Open Sans"/>
-              </a:rPr>
-              <a:t>removable</a:t>
-            </a:r>
-            <a:r>
-              <a:rPr sz="1300" b="0">
-                <a:solidFill>
-                  <a:srgbClr val="0C3335"/>
-                </a:solidFill>
-                <a:latin typeface="Open Sans"/>
-              </a:rPr>
-              <a:t> — a phase, not a sentence.</a:t>
-            </a:r>
-          </a:p>
-        </p:txBody>
-      </p:sp>
-      <p:sp>
-        <p:nvSpPr>
-          <p:cNvPr id="6" name="Rectangle 5">
+              <a:t> on every quote</a:t>
+            </a:r>
+          </a:p>
+        </p:txBody>
+      </p:sp>
+      <p:sp>
+        <p:nvSpPr>
+          <p:cNvPr id="8" name="TextBox 7"/>
+          <p:cNvSpPr txBox="1"/>
+          <p:nvPr/>
+        </p:nvSpPr>
+        <p:spPr>
+          <a:xfrm>
+            <a:off x="609584" y="5524534"/>
+            <a:ext cx="10972527" cy="507987"/>
+          </a:xfrm>
+          <a:prstGeom prst="rect">
+            <a:avLst/>
+          </a:prstGeom>
+          <a:noFill/>
+        </p:spPr>
+        <p:txBody>
+          <a:bodyPr wrap="square" anchor="t" lIns="0" rIns="0" tIns="0" bIns="0">
+            <a:spAutoFit/>
+          </a:bodyPr>
+          <a:lstStyle/>
+          <a:p>
+            <a:pPr algn="l"/>
+            <a:r>
+              <a:rPr sz="1050" b="0" i="1">
+                <a:solidFill>
+                  <a:srgbClr val="6A7370"/>
+                </a:solidFill>
+                <a:latin typeface="Open Sans"/>
+              </a:rPr>
+              <a:t>Hypothetical illustration for education only. Not a quote, offer, or commitment to lend.</a:t>
+            </a:r>
+          </a:p>
+        </p:txBody>
+      </p:sp>
+      <p:sp>
+        <p:nvSpPr>
+          <p:cNvPr id="9" name="Rectangle 8">
             <a:hlinkClick action="ppaction://hlinksldjump" r:id="rId2"/>
           </p:cNvPr>
           <p:cNvSpPr/>
@@ -12200,7 +12641,7 @@
                 </a:solidFill>
                 <a:latin typeface="Montserrat"/>
               </a:rPr>
-              <a:t>FHA is only for first-time buyers</a:t>
+              <a:t>You need 20% down</a:t>
             </a:r>
           </a:p>
         </p:txBody>
@@ -12301,13 +12742,22 @@
               <a:t>■  </a:t>
             </a:r>
             <a:r>
+              <a:rPr sz="1300" b="0">
+                <a:solidFill>
+                  <a:srgbClr val="404041"/>
+                </a:solidFill>
+                <a:latin typeface="Open Sans"/>
+              </a:rPr>
+              <a:t>Conventional goes as low as </a:t>
+            </a:r>
+            <a:r>
               <a:rPr sz="1300" b="1">
                 <a:solidFill>
                   <a:srgbClr val="404041"/>
                 </a:solidFill>
                 <a:latin typeface="Open Sans"/>
               </a:rPr>
-              <a:t>FHA has no first-time buyer requirement</a:t>
+              <a:t>3%</a:t>
             </a:r>
             <a:r>
               <a:rPr sz="1300" b="0">
@@ -12316,7 +12766,34 @@
                 </a:solidFill>
                 <a:latin typeface="Open Sans"/>
               </a:rPr>
-              <a:t> — anyone eligible can use it</a:t>
+              <a:t>, FHA </a:t>
+            </a:r>
+            <a:r>
+              <a:rPr sz="1300" b="1">
+                <a:solidFill>
+                  <a:srgbClr val="404041"/>
+                </a:solidFill>
+                <a:latin typeface="Open Sans"/>
+              </a:rPr>
+              <a:t>3.5%</a:t>
+            </a:r>
+            <a:r>
+              <a:rPr sz="1300" b="0">
+                <a:solidFill>
+                  <a:srgbClr val="404041"/>
+                </a:solidFill>
+                <a:latin typeface="Open Sans"/>
+              </a:rPr>
+              <a:t>, VA and USDA </a:t>
+            </a:r>
+            <a:r>
+              <a:rPr sz="1300" b="1">
+                <a:solidFill>
+                  <a:srgbClr val="404041"/>
+                </a:solidFill>
+                <a:latin typeface="Open Sans"/>
+              </a:rPr>
+              <a:t>0%</a:t>
             </a:r>
           </a:p>
           <a:p>
@@ -12344,7 +12821,7 @@
                 </a:solidFill>
                 <a:latin typeface="Open Sans"/>
               </a:rPr>
-              <a:t>It’s a primary-residence program, not a first-timer program</a:t>
+              <a:t>The median first-time buyer puts down far less than 20%</a:t>
             </a:r>
           </a:p>
           <a:p>
@@ -12363,7 +12840,7 @@
                 </a:solidFill>
                 <a:latin typeface="Montserrat"/>
               </a:rPr>
-              <a:t>+  Pros</a:t>
+              <a:t>+  Pros of 20% down</a:t>
             </a:r>
           </a:p>
           <a:p>
@@ -12391,7 +12868,7 @@
                 </a:solidFill>
                 <a:latin typeface="Open Sans"/>
               </a:rPr>
-              <a:t>More forgiving on credit and past events</a:t>
+              <a:t>No monthly mortgage insurance</a:t>
             </a:r>
           </a:p>
           <a:p>
@@ -12419,7 +12896,7 @@
                 </a:solidFill>
                 <a:latin typeface="Open Sans"/>
               </a:rPr>
-              <a:t>Higher DTI tolerance · assumable</a:t>
+              <a:t>Lower payment and more instant equity</a:t>
             </a:r>
           </a:p>
           <a:p>
@@ -12466,7 +12943,7 @@
                 </a:solidFill>
                 <a:latin typeface="Open Sans"/>
               </a:rPr>
-              <a:t>MI often lasts the life of the loan under 10% down</a:t>
+              <a:t>Years of saving while rent builds no equity</a:t>
             </a:r>
           </a:p>
           <a:p>
@@ -12494,7 +12971,47 @@
                 </a:solidFill>
                 <a:latin typeface="Open Sans"/>
               </a:rPr>
-              <a:t>Upfront premium added to the balance</a:t>
+              <a:t>Drains the cash reserve you want after closing</a:t>
+            </a:r>
+          </a:p>
+          <a:p>
+            <a:pPr algn="l">
+              <a:spcBef>
+                <a:spcPts val="1400"/>
+              </a:spcBef>
+              <a:spcAft>
+                <a:spcPts val="800"/>
+              </a:spcAft>
+            </a:pPr>
+            <a:r>
+              <a:t>  </a:t>
+            </a:r>
+            <a:r>
+              <a:rPr sz="1300" b="0">
+                <a:solidFill>
+                  <a:srgbClr val="0C3335"/>
+                </a:solidFill>
+                <a:latin typeface="Open Sans"/>
+              </a:rPr>
+              <a:t>Mortgage insurance on a conventional loan is </a:t>
+            </a:r>
+            <a:r>
+              <a:rPr sz="1300" b="1">
+                <a:solidFill>
+                  <a:srgbClr val="0C3335"/>
+                </a:solidFill>
+                <a:latin typeface="Open Sans"/>
+              </a:rPr>
+              <a:t>removable</a:t>
+            </a:r>
+            <a:r>
+              <a:rPr sz="1300" b="0">
+                <a:solidFill>
+                  <a:srgbClr val="0C3335"/>
+                </a:solidFill>
+                <a:latin typeface="Open Sans"/>
+              </a:rPr>
+              <a:t> — a phase, not a sentence.</a:t>
             </a:r>
           </a:p>
         </p:txBody>
@@ -13659,7 +14176,7 @@
                 </a:solidFill>
                 <a:latin typeface="Montserrat"/>
               </a:rPr>
-              <a:t>You need perfect credit</a:t>
+              <a:t>FHA is only for first-time buyers</a:t>
             </a:r>
           </a:p>
         </p:txBody>
@@ -13760,31 +14277,22 @@
               <a:t>■  </a:t>
             </a:r>
             <a:r>
+              <a:rPr sz="1300" b="1">
+                <a:solidFill>
+                  <a:srgbClr val="404041"/>
+                </a:solidFill>
+                <a:latin typeface="Open Sans"/>
+              </a:rPr>
+              <a:t>FHA has no first-time buyer requirement</a:t>
+            </a:r>
+            <a:r>
               <a:rPr sz="1300" b="0">
                 <a:solidFill>
                   <a:srgbClr val="404041"/>
                 </a:solidFill>
                 <a:latin typeface="Open Sans"/>
               </a:rPr>
-              <a:t>Pricing moves in </a:t>
-            </a:r>
-            <a:r>
-              <a:rPr sz="1300" b="1">
-                <a:solidFill>
-                  <a:srgbClr val="404041"/>
-                </a:solidFill>
-                <a:latin typeface="Open Sans"/>
-              </a:rPr>
-              <a:t>tiers</a:t>
-            </a:r>
-            <a:r>
-              <a:rPr sz="1300" b="0">
-                <a:solidFill>
-                  <a:srgbClr val="404041"/>
-                </a:solidFill>
-                <a:latin typeface="Open Sans"/>
-              </a:rPr>
-              <a:t> — near an edge matters, mid-tier often doesn’t</a:t>
+              <a:t> — anyone eligible can use it</a:t>
             </a:r>
           </a:p>
           <a:p>
@@ -13812,7 +14320,7 @@
                 </a:solidFill>
                 <a:latin typeface="Open Sans"/>
               </a:rPr>
-              <a:t>FHA and VA reach meaningfully lower than conventional</a:t>
+              <a:t>It’s a primary-residence program, not a first-timer program</a:t>
             </a:r>
           </a:p>
           <a:p>
@@ -13831,7 +14339,7 @@
                 </a:solidFill>
                 <a:latin typeface="Montserrat"/>
               </a:rPr>
-              <a:t>+  Pros of a higher score</a:t>
+              <a:t>+  Pros</a:t>
             </a:r>
           </a:p>
           <a:p>
@@ -13859,7 +14367,35 @@
                 </a:solidFill>
                 <a:latin typeface="Open Sans"/>
               </a:rPr>
-              <a:t>Better pricing, lower MI, more program options</a:t>
+              <a:t>More forgiving on credit and past events</a:t>
+            </a:r>
+          </a:p>
+          <a:p>
+            <a:pPr algn="l">
+              <a:spcBef>
+                <a:spcPts val="0"/>
+              </a:spcBef>
+              <a:spcAft>
+                <a:spcPts val="800"/>
+              </a:spcAft>
+            </a:pPr>
+            <a:r>
+              <a:rPr sz="1300">
+                <a:solidFill>
+                  <a:srgbClr val="4B7B4D"/>
+                </a:solidFill>
+                <a:latin typeface="Open Sans"/>
+              </a:rPr>
+              <a:t>■  </a:t>
+            </a:r>
+            <a:r>
+              <a:rPr sz="1300" b="0">
+                <a:solidFill>
+                  <a:srgbClr val="404041"/>
+                </a:solidFill>
+                <a:latin typeface="Open Sans"/>
+              </a:rPr>
+              <a:t>Higher DTI tolerance · assumable</a:t>
             </a:r>
           </a:p>
           <a:p>
@@ -13878,7 +14414,7 @@
                 </a:solidFill>
                 <a:latin typeface="Montserrat"/>
               </a:rPr>
-              <a:t>–  Cons of waiting for "perfect"</a:t>
+              <a:t>–  Cons</a:t>
             </a:r>
           </a:p>
           <a:p>
@@ -13906,38 +14442,35 @@
                 </a:solidFill>
                 <a:latin typeface="Open Sans"/>
               </a:rPr>
-              <a:t>Prices and rents keep moving while you chase a number</a:t>
+              <a:t>MI often lasts the life of the loan under 10% down</a:t>
             </a:r>
           </a:p>
           <a:p>
             <a:pPr algn="l">
               <a:spcBef>
-                <a:spcPts val="1400"/>
+                <a:spcPts val="0"/>
               </a:spcBef>
               <a:spcAft>
                 <a:spcPts val="800"/>
               </a:spcAft>
             </a:pPr>
             <a:r>
-              <a:t>  </a:t>
-            </a:r>
-            <a:r>
-              <a:rPr sz="1300" b="1">
-                <a:solidFill>
-                  <a:srgbClr val="0C3335"/>
-                </a:solidFill>
-                <a:latin typeface="Open Sans"/>
-              </a:rPr>
-              <a:t>Utilization</a:t>
+              <a:rPr sz="1300">
+                <a:solidFill>
+                  <a:srgbClr val="404041"/>
+                </a:solidFill>
+                <a:latin typeface="Open Sans"/>
+              </a:rPr>
+              <a:t>■  </a:t>
             </a:r>
             <a:r>
               <a:rPr sz="1300" b="0">
                 <a:solidFill>
-                  <a:srgbClr val="0C3335"/>
-                </a:solidFill>
-                <a:latin typeface="Open Sans"/>
-              </a:rPr>
-              <a:t> is ~30% of the score and can move in one cycle. Don’t close old cards.</a:t>
+                  <a:srgbClr val="404041"/>
+                </a:solidFill>
+                <a:latin typeface="Open Sans"/>
+              </a:rPr>
+              <a:t>Upfront premium added to the balance</a:t>
             </a:r>
           </a:p>
         </p:txBody>
@@ -14116,7 +14649,7 @@
                 </a:solidFill>
                 <a:latin typeface="Montserrat"/>
               </a:rPr>
-              <a:t>Renting is always cheaper</a:t>
+              <a:t>You need perfect credit</a:t>
             </a:r>
           </a:p>
         </p:txBody>
@@ -14223,7 +14756,25 @@
                 </a:solidFill>
                 <a:latin typeface="Open Sans"/>
               </a:rPr>
-              <a:t>Rent generally rises; a fixed principal &amp; interest payment doesn’t</a:t>
+              <a:t>Pricing moves in </a:t>
+            </a:r>
+            <a:r>
+              <a:rPr sz="1300" b="1">
+                <a:solidFill>
+                  <a:srgbClr val="404041"/>
+                </a:solidFill>
+                <a:latin typeface="Open Sans"/>
+              </a:rPr>
+              <a:t>tiers</a:t>
+            </a:r>
+            <a:r>
+              <a:rPr sz="1300" b="0">
+                <a:solidFill>
+                  <a:srgbClr val="404041"/>
+                </a:solidFill>
+                <a:latin typeface="Open Sans"/>
+              </a:rPr>
+              <a:t> — near an edge matters, mid-tier often doesn’t</a:t>
             </a:r>
           </a:p>
           <a:p>
@@ -14251,7 +14802,7 @@
                 </a:solidFill>
                 <a:latin typeface="Open Sans"/>
               </a:rPr>
-              <a:t>Ownership builds equity — rent doesn’t</a:t>
+              <a:t>FHA and VA reach meaningfully lower than conventional</a:t>
             </a:r>
           </a:p>
           <a:p>
@@ -14270,7 +14821,7 @@
                 </a:solidFill>
                 <a:latin typeface="Montserrat"/>
               </a:rPr>
-              <a:t>+  Pros of renting</a:t>
+              <a:t>+  Pros of a higher score</a:t>
             </a:r>
           </a:p>
           <a:p>
@@ -14298,7 +14849,7 @@
                 </a:solidFill>
                 <a:latin typeface="Open Sans"/>
               </a:rPr>
-              <a:t>Flexibility, no maintenance, no transaction costs</a:t>
+              <a:t>Better pricing, lower MI, more program options</a:t>
             </a:r>
           </a:p>
           <a:p>
@@ -14317,7 +14868,7 @@
                 </a:solidFill>
                 <a:latin typeface="Montserrat"/>
               </a:rPr>
-              <a:t>–  Cons of renting</a:t>
+              <a:t>–  Cons of waiting for "perfect"</a:t>
             </a:r>
           </a:p>
           <a:p>
@@ -14345,7 +14896,7 @@
                 </a:solidFill>
                 <a:latin typeface="Open Sans"/>
               </a:rPr>
-              <a:t>No equity, no fixed housing cost, no control over increases</a:t>
+              <a:t>Prices and rents keep moving while you chase a number</a:t>
             </a:r>
           </a:p>
           <a:p>
@@ -14361,13 +14912,22 @@
               <a:t>  </a:t>
             </a:r>
             <a:r>
+              <a:rPr sz="1300" b="1">
+                <a:solidFill>
+                  <a:srgbClr val="0C3335"/>
+                </a:solidFill>
+                <a:latin typeface="Open Sans"/>
+              </a:rPr>
+              <a:t>Utilization</a:t>
+            </a:r>
+            <a:r>
               <a:rPr sz="1300" b="0">
                 <a:solidFill>
                   <a:srgbClr val="0C3335"/>
                 </a:solidFill>
                 <a:latin typeface="Open Sans"/>
               </a:rPr>
-              <a:t>Short horizon, renting can win; long horizon, ownership usually does.</a:t>
+              <a:t> is ~30% of the score and can move in one cycle. Don’t close old cards.</a:t>
             </a:r>
           </a:p>
         </p:txBody>
@@ -14546,7 +15106,7 @@
                 </a:solidFill>
                 <a:latin typeface="Montserrat"/>
               </a:rPr>
-              <a:t>The lowest rate is the best deal</a:t>
+              <a:t>Renting is always cheaper</a:t>
             </a:r>
           </a:p>
         </p:txBody>
@@ -14653,25 +15213,7 @@
                 </a:solidFill>
                 <a:latin typeface="Open Sans"/>
               </a:rPr>
-              <a:t>A lower rate is often </a:t>
-            </a:r>
-            <a:r>
-              <a:rPr sz="1300" b="1">
-                <a:solidFill>
-                  <a:srgbClr val="404041"/>
-                </a:solidFill>
-                <a:latin typeface="Open Sans"/>
-              </a:rPr>
-              <a:t>bought</a:t>
-            </a:r>
-            <a:r>
-              <a:rPr sz="1300" b="0">
-                <a:solidFill>
-                  <a:srgbClr val="404041"/>
-                </a:solidFill>
-                <a:latin typeface="Open Sans"/>
-              </a:rPr>
-              <a:t> with points paid at closing</a:t>
+              <a:t>Rent generally rises; a fixed principal &amp; interest payment doesn’t</a:t>
             </a:r>
           </a:p>
           <a:p>
@@ -14699,7 +15241,7 @@
                 </a:solidFill>
                 <a:latin typeface="Open Sans"/>
               </a:rPr>
-              <a:t>The lowest rate and the lowest cost are frequently not the same loan</a:t>
+              <a:t>Ownership builds equity — rent doesn’t</a:t>
             </a:r>
           </a:p>
           <a:p>
@@ -14718,7 +15260,7 @@
                 </a:solidFill>
                 <a:latin typeface="Montserrat"/>
               </a:rPr>
-              <a:t>+  Pros of a lower rate</a:t>
+              <a:t>+  Pros of renting</a:t>
             </a:r>
           </a:p>
           <a:p>
@@ -14746,7 +15288,7 @@
                 </a:solidFill>
                 <a:latin typeface="Open Sans"/>
               </a:rPr>
-              <a:t>Lower payment and less interest over a long hold</a:t>
+              <a:t>Flexibility, no maintenance, no transaction costs</a:t>
             </a:r>
           </a:p>
           <a:p>
@@ -14765,7 +15307,7 @@
                 </a:solidFill>
                 <a:latin typeface="Montserrat"/>
               </a:rPr>
-              <a:t>–  Cons</a:t>
+              <a:t>–  Cons of renting</a:t>
             </a:r>
           </a:p>
           <a:p>
@@ -14793,35 +15335,7 @@
                 </a:solidFill>
                 <a:latin typeface="Open Sans"/>
               </a:rPr>
-              <a:t>Points are cash today — gone if you sell or refinance early</a:t>
-            </a:r>
-          </a:p>
-          <a:p>
-            <a:pPr algn="l">
-              <a:spcBef>
-                <a:spcPts val="0"/>
-              </a:spcBef>
-              <a:spcAft>
-                <a:spcPts val="800"/>
-              </a:spcAft>
-            </a:pPr>
-            <a:r>
-              <a:rPr sz="1300">
-                <a:solidFill>
-                  <a:srgbClr val="404041"/>
-                </a:solidFill>
-                <a:latin typeface="Open Sans"/>
-              </a:rPr>
-              <a:t>■  </a:t>
-            </a:r>
-            <a:r>
-              <a:rPr sz="1300" b="0">
-                <a:solidFill>
-                  <a:srgbClr val="404041"/>
-                </a:solidFill>
-                <a:latin typeface="Open Sans"/>
-              </a:rPr>
-              <a:t>Chasing rate can hide high lender fees</a:t>
+              <a:t>No equity, no fixed housing cost, no control over increases</a:t>
             </a:r>
           </a:p>
           <a:p>
@@ -14843,25 +15357,7 @@
                 </a:solidFill>
                 <a:latin typeface="Open Sans"/>
               </a:rPr>
-              <a:t>Ask for </a:t>
-            </a:r>
-            <a:r>
-              <a:rPr sz="1300" b="1">
-                <a:solidFill>
-                  <a:srgbClr val="0C3335"/>
-                </a:solidFill>
-                <a:latin typeface="Open Sans"/>
-              </a:rPr>
-              <a:t>rate AND total cost</a:t>
-            </a:r>
-            <a:r>
-              <a:rPr sz="1300" b="0">
-                <a:solidFill>
-                  <a:srgbClr val="0C3335"/>
-                </a:solidFill>
-                <a:latin typeface="Open Sans"/>
-              </a:rPr>
-              <a:t>, and compare Loan Estimates from the same day.</a:t>
+              <a:t>Short horizon, renting can win; long horizon, ownership usually does.</a:t>
             </a:r>
           </a:p>
         </p:txBody>
@@ -15021,7 +15517,7 @@
                 </a:solidFill>
                 <a:latin typeface="Montserrat"/>
               </a:rPr>
-              <a:t>LOAN PROGRAM</a:t>
+              <a:t>THE MYTH</a:t>
             </a:r>
           </a:p>
           <a:p>
@@ -15040,7 +15536,7 @@
                 </a:solidFill>
                 <a:latin typeface="Montserrat"/>
               </a:rPr>
-              <a:t>Conventional</a:t>
+              <a:t>The lowest rate is the best deal</a:t>
             </a:r>
           </a:p>
         </p:txBody>
@@ -15119,7 +15615,7 @@
                 </a:solidFill>
                 <a:latin typeface="Montserrat"/>
               </a:rPr>
-              <a:t>Who it fits</a:t>
+              <a:t>The reality</a:t>
             </a:r>
           </a:p>
           <a:p>
@@ -15147,7 +15643,53 @@
                 </a:solidFill>
                 <a:latin typeface="Open Sans"/>
               </a:rPr>
-              <a:t>Solid credit, steady documented income · as low as 3% down</a:t>
+              <a:t>A lower rate is often </a:t>
+            </a:r>
+            <a:r>
+              <a:rPr sz="1300" b="1">
+                <a:solidFill>
+                  <a:srgbClr val="404041"/>
+                </a:solidFill>
+                <a:latin typeface="Open Sans"/>
+              </a:rPr>
+              <a:t>bought</a:t>
+            </a:r>
+            <a:r>
+              <a:rPr sz="1300" b="0">
+                <a:solidFill>
+                  <a:srgbClr val="404041"/>
+                </a:solidFill>
+                <a:latin typeface="Open Sans"/>
+              </a:rPr>
+              <a:t> with points paid at closing</a:t>
+            </a:r>
+          </a:p>
+          <a:p>
+            <a:pPr algn="l">
+              <a:spcBef>
+                <a:spcPts val="0"/>
+              </a:spcBef>
+              <a:spcAft>
+                <a:spcPts val="800"/>
+              </a:spcAft>
+            </a:pPr>
+            <a:r>
+              <a:rPr sz="1300">
+                <a:solidFill>
+                  <a:srgbClr val="8CC63E"/>
+                </a:solidFill>
+                <a:latin typeface="Open Sans"/>
+              </a:rPr>
+              <a:t>■  </a:t>
+            </a:r>
+            <a:r>
+              <a:rPr sz="1300" b="0">
+                <a:solidFill>
+                  <a:srgbClr val="404041"/>
+                </a:solidFill>
+                <a:latin typeface="Open Sans"/>
+              </a:rPr>
+              <a:t>The lowest rate and the lowest cost are frequently not the same loan</a:t>
             </a:r>
           </a:p>
           <a:p>
@@ -15166,7 +15708,7 @@
                 </a:solidFill>
                 <a:latin typeface="Montserrat"/>
               </a:rPr>
-              <a:t>+  Pros</a:t>
+              <a:t>+  Pros of a lower rate</a:t>
             </a:r>
           </a:p>
           <a:p>
@@ -15194,7 +15736,26 @@
                 </a:solidFill>
                 <a:latin typeface="Open Sans"/>
               </a:rPr>
-              <a:t>MI comes off</a:t>
+              <a:t>Lower payment and less interest over a long hold</a:t>
+            </a:r>
+          </a:p>
+          <a:p>
+            <a:pPr algn="l">
+              <a:spcBef>
+                <a:spcPts val="1800"/>
+              </a:spcBef>
+              <a:spcAft>
+                <a:spcPts val="1000"/>
+              </a:spcAft>
+            </a:pPr>
+            <a:r>
+              <a:rPr sz="1100" b="1">
+                <a:solidFill>
+                  <a:srgbClr val="404041"/>
+                </a:solidFill>
+                <a:latin typeface="Montserrat"/>
+              </a:rPr>
+              <a:t>–  Cons</a:t>
             </a:r>
           </a:p>
           <a:p>
@@ -15209,7 +15770,7 @@
             <a:r>
               <a:rPr sz="1300">
                 <a:solidFill>
-                  <a:srgbClr val="4B7B4D"/>
+                  <a:srgbClr val="404041"/>
                 </a:solidFill>
                 <a:latin typeface="Open Sans"/>
               </a:rPr>
@@ -15222,7 +15783,7 @@
                 </a:solidFill>
                 <a:latin typeface="Open Sans"/>
               </a:rPr>
-              <a:t>Best pricing at strong credit</a:t>
+              <a:t>Points are cash today — gone if you sell or refinance early</a:t>
             </a:r>
           </a:p>
           <a:p>
@@ -15237,7 +15798,7 @@
             <a:r>
               <a:rPr sz="1300">
                 <a:solidFill>
-                  <a:srgbClr val="4B7B4D"/>
+                  <a:srgbClr val="404041"/>
                 </a:solidFill>
                 <a:latin typeface="Open Sans"/>
               </a:rPr>
@@ -15250,124 +15811,54 @@
                 </a:solidFill>
                 <a:latin typeface="Open Sans"/>
               </a:rPr>
-              <a:t>Widest property flexibility</a:t>
+              <a:t>Chasing rate can hide high lender fees</a:t>
             </a:r>
           </a:p>
           <a:p>
             <a:pPr algn="l">
               <a:spcBef>
-                <a:spcPts val="1800"/>
-              </a:spcBef>
-              <a:spcAft>
-                <a:spcPts val="1000"/>
-              </a:spcAft>
-            </a:pPr>
-            <a:r>
-              <a:rPr sz="1100" b="1">
-                <a:solidFill>
-                  <a:srgbClr val="404041"/>
-                </a:solidFill>
-                <a:latin typeface="Montserrat"/>
-              </a:rPr>
-              <a:t>–  Cons</a:t>
-            </a:r>
-          </a:p>
-          <a:p>
-            <a:pPr algn="l">
-              <a:spcBef>
-                <a:spcPts val="0"/>
+                <a:spcPts val="1400"/>
               </a:spcBef>
               <a:spcAft>
                 <a:spcPts val="800"/>
               </a:spcAft>
             </a:pPr>
             <a:r>
-              <a:rPr sz="1300">
-                <a:solidFill>
-                  <a:srgbClr val="404041"/>
-                </a:solidFill>
-                <a:latin typeface="Open Sans"/>
-              </a:rPr>
-              <a:t>■  </a:t>
+              <a:t>  </a:t>
             </a:r>
             <a:r>
               <a:rPr sz="1300" b="0">
                 <a:solidFill>
-                  <a:srgbClr val="404041"/>
-                </a:solidFill>
-                <a:latin typeface="Open Sans"/>
-              </a:rPr>
-              <a:t>Least forgiving on credit</a:t>
-            </a:r>
-          </a:p>
-          <a:p>
-            <a:pPr algn="l">
-              <a:spcBef>
-                <a:spcPts val="0"/>
-              </a:spcBef>
-              <a:spcAft>
-                <a:spcPts val="800"/>
-              </a:spcAft>
-            </a:pPr>
-            <a:r>
-              <a:rPr sz="1300">
-                <a:solidFill>
-                  <a:srgbClr val="404041"/>
-                </a:solidFill>
-                <a:latin typeface="Open Sans"/>
-              </a:rPr>
-              <a:t>■  </a:t>
+                  <a:srgbClr val="0C3335"/>
+                </a:solidFill>
+                <a:latin typeface="Open Sans"/>
+              </a:rPr>
+              <a:t>Ask for </a:t>
+            </a:r>
+            <a:r>
+              <a:rPr sz="1300" b="1">
+                <a:solidFill>
+                  <a:srgbClr val="0C3335"/>
+                </a:solidFill>
+                <a:latin typeface="Open Sans"/>
+              </a:rPr>
+              <a:t>rate AND total cost</a:t>
             </a:r>
             <a:r>
               <a:rPr sz="1300" b="0">
                 <a:solidFill>
-                  <a:srgbClr val="404041"/>
-                </a:solidFill>
-                <a:latin typeface="Open Sans"/>
-              </a:rPr>
-              <a:t>Less tolerant of recent derogatory history</a:t>
-            </a:r>
-          </a:p>
-        </p:txBody>
-      </p:sp>
-      <p:sp>
-        <p:nvSpPr>
-          <p:cNvPr id="6" name="TextBox 5"/>
-          <p:cNvSpPr txBox="1"/>
-          <p:nvPr/>
-        </p:nvSpPr>
-        <p:spPr>
-          <a:xfrm>
-            <a:off x="609584" y="5524534"/>
-            <a:ext cx="10972527" cy="507987"/>
-          </a:xfrm>
-          <a:prstGeom prst="rect">
-            <a:avLst/>
-          </a:prstGeom>
-          <a:noFill/>
-        </p:spPr>
-        <p:txBody>
-          <a:bodyPr wrap="square" anchor="t" lIns="0" rIns="0" tIns="0" bIns="0">
-            <a:spAutoFit/>
-          </a:bodyPr>
-          <a:lstStyle/>
-          <a:p>
-            <a:pPr algn="l"/>
-            <a:r>
-              <a:rPr sz="1050" b="0" i="1">
-                <a:solidFill>
-                  <a:srgbClr val="6A7370"/>
-                </a:solidFill>
-                <a:latin typeface="Open Sans"/>
-              </a:rPr>
-              <a:t>General guidelines only. Actual eligibility depends on full underwriting, credit, property, and lender overlays.</a:t>
-            </a:r>
-          </a:p>
-        </p:txBody>
-      </p:sp>
-      <p:sp>
-        <p:nvSpPr>
-          <p:cNvPr id="7" name="Rectangle 6">
+                  <a:srgbClr val="0C3335"/>
+                </a:solidFill>
+                <a:latin typeface="Open Sans"/>
+              </a:rPr>
+              <a:t>, and compare Loan Estimates from the same day.</a:t>
+            </a:r>
+          </a:p>
+        </p:txBody>
+      </p:sp>
+      <p:sp>
+        <p:nvSpPr>
+          <p:cNvPr id="6" name="Rectangle 5">
             <a:hlinkClick action="ppaction://hlinksldjump" r:id="rId2"/>
           </p:cNvPr>
           <p:cNvSpPr/>
@@ -15539,7 +16030,7 @@
                 </a:solidFill>
                 <a:latin typeface="Montserrat"/>
               </a:rPr>
-              <a:t>FHA</a:t>
+              <a:t>Conventional</a:t>
             </a:r>
           </a:p>
         </p:txBody>
@@ -15646,7 +16137,7 @@
                 </a:solidFill>
                 <a:latin typeface="Open Sans"/>
               </a:rPr>
-              <a:t>Rebuilding credit or a higher debt load · 3.5% down</a:t>
+              <a:t>Solid credit, steady documented income · as low as 3% down</a:t>
             </a:r>
           </a:p>
           <a:p>
@@ -15693,7 +16184,7 @@
                 </a:solidFill>
                 <a:latin typeface="Open Sans"/>
               </a:rPr>
-              <a:t>Lower credit thresholds</a:t>
+              <a:t>MI comes off</a:t>
             </a:r>
           </a:p>
           <a:p>
@@ -15721,7 +16212,7 @@
                 </a:solidFill>
                 <a:latin typeface="Open Sans"/>
               </a:rPr>
-              <a:t>Higher DTI tolerance</a:t>
+              <a:t>Best pricing at strong credit</a:t>
             </a:r>
           </a:p>
           <a:p>
@@ -15749,7 +16240,7 @@
                 </a:solidFill>
                 <a:latin typeface="Open Sans"/>
               </a:rPr>
-              <a:t>Assumable</a:t>
+              <a:t>Widest property flexibility</a:t>
             </a:r>
           </a:p>
           <a:p>
@@ -15796,7 +16287,7 @@
                 </a:solidFill>
                 <a:latin typeface="Open Sans"/>
               </a:rPr>
-              <a:t>MI usually lasts the life of the loan</a:t>
+              <a:t>Least forgiving on credit</a:t>
             </a:r>
           </a:p>
           <a:p>
@@ -15824,7 +16315,7 @@
                 </a:solidFill>
                 <a:latin typeface="Open Sans"/>
               </a:rPr>
-              <a:t>Upfront premium added to the balance</a:t>
+              <a:t>Less tolerant of recent derogatory history</a:t>
             </a:r>
           </a:p>
         </p:txBody>
@@ -16038,7 +16529,7 @@
                 </a:solidFill>
                 <a:latin typeface="Montserrat"/>
               </a:rPr>
-              <a:t>VA</a:t>
+              <a:t>FHA</a:t>
             </a:r>
           </a:p>
         </p:txBody>
@@ -16145,7 +16636,7 @@
                 </a:solidFill>
                 <a:latin typeface="Open Sans"/>
               </a:rPr>
-              <a:t>Eligible service members, veterans, and certain spouses · 0% down</a:t>
+              <a:t>Rebuilding credit or a higher debt load · 3.5% down</a:t>
             </a:r>
           </a:p>
           <a:p>
@@ -16192,7 +16683,7 @@
                 </a:solidFill>
                 <a:latin typeface="Open Sans"/>
               </a:rPr>
-              <a:t>No down payment</a:t>
+              <a:t>Lower credit thresholds</a:t>
             </a:r>
           </a:p>
           <a:p>
@@ -16220,7 +16711,7 @@
                 </a:solidFill>
                 <a:latin typeface="Open Sans"/>
               </a:rPr>
-              <a:t>No monthly MI</a:t>
+              <a:t>Higher DTI tolerance</a:t>
             </a:r>
           </a:p>
           <a:p>
@@ -16248,7 +16739,7 @@
                 </a:solidFill>
                 <a:latin typeface="Open Sans"/>
               </a:rPr>
-              <a:t>Reusable — not once per lifetime</a:t>
+              <a:t>Assumable</a:t>
             </a:r>
           </a:p>
           <a:p>
@@ -16295,7 +16786,7 @@
                 </a:solidFill>
                 <a:latin typeface="Open Sans"/>
               </a:rPr>
-              <a:t>A funding fee applies (financeable; waived for some)</a:t>
+              <a:t>MI usually lasts the life of the loan</a:t>
             </a:r>
           </a:p>
           <a:p>
@@ -16323,47 +16814,7 @@
                 </a:solidFill>
                 <a:latin typeface="Open Sans"/>
               </a:rPr>
-              <a:t>Stricter property standards</a:t>
-            </a:r>
-          </a:p>
-          <a:p>
-            <a:pPr algn="l">
-              <a:spcBef>
-                <a:spcPts val="1400"/>
-              </a:spcBef>
-              <a:spcAft>
-                <a:spcPts val="800"/>
-              </a:spcAft>
-            </a:pPr>
-            <a:r>
-              <a:t>  </a:t>
-            </a:r>
-            <a:r>
-              <a:rPr sz="1300" b="0">
-                <a:solidFill>
-                  <a:srgbClr val="0C3335"/>
-                </a:solidFill>
-                <a:latin typeface="Open Sans"/>
-              </a:rPr>
-              <a:t>If anyone in the household served — including a spouse — </a:t>
-            </a:r>
-            <a:r>
-              <a:rPr sz="1300" b="1">
-                <a:solidFill>
-                  <a:srgbClr val="0C3335"/>
-                </a:solidFill>
-                <a:latin typeface="Open Sans"/>
-              </a:rPr>
-              <a:t>ask.</a:t>
-            </a:r>
-            <a:r>
-              <a:rPr sz="1300" b="0">
-                <a:solidFill>
-                  <a:srgbClr val="0C3335"/>
-                </a:solidFill>
-                <a:latin typeface="Open Sans"/>
-              </a:rPr>
-              <a:t> It usually counts.</a:t>
+              <a:t>Upfront premium added to the balance</a:t>
             </a:r>
           </a:p>
         </p:txBody>
@@ -16577,7 +17028,7 @@
                 </a:solidFill>
                 <a:latin typeface="Montserrat"/>
               </a:rPr>
-              <a:t>USDA</a:t>
+              <a:t>VA</a:t>
             </a:r>
           </a:p>
         </p:txBody>
@@ -16684,7 +17135,7 @@
                 </a:solidFill>
                 <a:latin typeface="Open Sans"/>
               </a:rPr>
-              <a:t>Eligible area, under the household income limit · 0% down</a:t>
+              <a:t>Eligible service members, veterans, and certain spouses · 0% down</a:t>
             </a:r>
           </a:p>
           <a:p>
@@ -16759,7 +17210,35 @@
                 </a:solidFill>
                 <a:latin typeface="Open Sans"/>
               </a:rPr>
-              <a:t>Annual fee often lower than FHA</a:t>
+              <a:t>No monthly MI</a:t>
+            </a:r>
+          </a:p>
+          <a:p>
+            <a:pPr algn="l">
+              <a:spcBef>
+                <a:spcPts val="0"/>
+              </a:spcBef>
+              <a:spcAft>
+                <a:spcPts val="800"/>
+              </a:spcAft>
+            </a:pPr>
+            <a:r>
+              <a:rPr sz="1300">
+                <a:solidFill>
+                  <a:srgbClr val="4B7B4D"/>
+                </a:solidFill>
+                <a:latin typeface="Open Sans"/>
+              </a:rPr>
+              <a:t>■  </a:t>
+            </a:r>
+            <a:r>
+              <a:rPr sz="1300" b="0">
+                <a:solidFill>
+                  <a:srgbClr val="404041"/>
+                </a:solidFill>
+                <a:latin typeface="Open Sans"/>
+              </a:rPr>
+              <a:t>Reusable — not once per lifetime</a:t>
             </a:r>
           </a:p>
           <a:p>
@@ -16806,7 +17285,7 @@
                 </a:solidFill>
                 <a:latin typeface="Open Sans"/>
               </a:rPr>
-              <a:t>Geography decides — check the map</a:t>
+              <a:t>A funding fee applies (financeable; waived for some)</a:t>
             </a:r>
           </a:p>
           <a:p>
@@ -16834,7 +17313,47 @@
                 </a:solidFill>
                 <a:latin typeface="Open Sans"/>
               </a:rPr>
-              <a:t>Income limits count everyone in the home</a:t>
+              <a:t>Stricter property standards</a:t>
+            </a:r>
+          </a:p>
+          <a:p>
+            <a:pPr algn="l">
+              <a:spcBef>
+                <a:spcPts val="1400"/>
+              </a:spcBef>
+              <a:spcAft>
+                <a:spcPts val="800"/>
+              </a:spcAft>
+            </a:pPr>
+            <a:r>
+              <a:t>  </a:t>
+            </a:r>
+            <a:r>
+              <a:rPr sz="1300" b="0">
+                <a:solidFill>
+                  <a:srgbClr val="0C3335"/>
+                </a:solidFill>
+                <a:latin typeface="Open Sans"/>
+              </a:rPr>
+              <a:t>If anyone in the household served — including a spouse — </a:t>
+            </a:r>
+            <a:r>
+              <a:rPr sz="1300" b="1">
+                <a:solidFill>
+                  <a:srgbClr val="0C3335"/>
+                </a:solidFill>
+                <a:latin typeface="Open Sans"/>
+              </a:rPr>
+              <a:t>ask.</a:t>
+            </a:r>
+            <a:r>
+              <a:rPr sz="1300" b="0">
+                <a:solidFill>
+                  <a:srgbClr val="0C3335"/>
+                </a:solidFill>
+                <a:latin typeface="Open Sans"/>
+              </a:rPr>
+              <a:t> It usually counts.</a:t>
             </a:r>
           </a:p>
         </p:txBody>
@@ -17048,7 +17567,7 @@
                 </a:solidFill>
                 <a:latin typeface="Montserrat"/>
               </a:rPr>
-              <a:t>Jumbo</a:t>
+              <a:t>USDA</a:t>
             </a:r>
           </a:p>
         </p:txBody>
@@ -17155,7 +17674,7 @@
                 </a:solidFill>
                 <a:latin typeface="Open Sans"/>
               </a:rPr>
-              <a:t>Loan amount above the conforming limit for the county</a:t>
+              <a:t>Eligible area, under the household income limit · 0% down</a:t>
             </a:r>
           </a:p>
           <a:p>
@@ -17202,7 +17721,7 @@
                 </a:solidFill>
                 <a:latin typeface="Open Sans"/>
               </a:rPr>
-              <a:t>Finances higher-priced homes</a:t>
+              <a:t>No down payment</a:t>
             </a:r>
           </a:p>
           <a:p>
@@ -17230,7 +17749,7 @@
                 </a:solidFill>
                 <a:latin typeface="Open Sans"/>
               </a:rPr>
-              <a:t>Flexible structures available</a:t>
+              <a:t>Annual fee often lower than FHA</a:t>
             </a:r>
           </a:p>
           <a:p>
@@ -17277,7 +17796,7 @@
                 </a:solidFill>
                 <a:latin typeface="Open Sans"/>
               </a:rPr>
-              <a:t>Strongest credit and reserves expected</a:t>
+              <a:t>Geography decides — check the map</a:t>
             </a:r>
           </a:p>
           <a:p>
@@ -17305,7 +17824,7 @@
                 </a:solidFill>
                 <a:latin typeface="Open Sans"/>
               </a:rPr>
-              <a:t>Rules vary a lot by investor — shop it</a:t>
+              <a:t>Income limits count everyone in the home</a:t>
             </a:r>
           </a:p>
         </p:txBody>
@@ -17500,7 +18019,7 @@
                 </a:solidFill>
                 <a:latin typeface="Montserrat"/>
               </a:rPr>
-              <a:t>WHERE IT COMES FROM</a:t>
+              <a:t>LOAN PROGRAM</a:t>
             </a:r>
           </a:p>
           <a:p>
@@ -17519,7 +18038,7 @@
                 </a:solidFill>
                 <a:latin typeface="Montserrat"/>
               </a:rPr>
-              <a:t>Savings</a:t>
+              <a:t>Jumbo</a:t>
             </a:r>
           </a:p>
         </p:txBody>
@@ -17598,7 +18117,7 @@
                 </a:solidFill>
                 <a:latin typeface="Montserrat"/>
               </a:rPr>
-              <a:t>The rules</a:t>
+              <a:t>Who it fits</a:t>
             </a:r>
           </a:p>
           <a:p>
@@ -17626,25 +18145,26 @@
                 </a:solidFill>
                 <a:latin typeface="Open Sans"/>
               </a:rPr>
-              <a:t>Must be </a:t>
-            </a:r>
-            <a:r>
-              <a:rPr sz="1300" b="1">
-                <a:solidFill>
-                  <a:srgbClr val="404041"/>
-                </a:solidFill>
-                <a:latin typeface="Open Sans"/>
-              </a:rPr>
-              <a:t>seasoned</a:t>
-            </a:r>
-            <a:r>
-              <a:rPr sz="1300" b="0">
-                <a:solidFill>
-                  <a:srgbClr val="404041"/>
-                </a:solidFill>
-                <a:latin typeface="Open Sans"/>
-              </a:rPr>
-              <a:t> — sitting in your account, documented</a:t>
+              <a:t>Loan amount above the conforming limit for the county</a:t>
+            </a:r>
+          </a:p>
+          <a:p>
+            <a:pPr algn="l">
+              <a:spcBef>
+                <a:spcPts val="1800"/>
+              </a:spcBef>
+              <a:spcAft>
+                <a:spcPts val="1000"/>
+              </a:spcAft>
+            </a:pPr>
+            <a:r>
+              <a:rPr sz="1100" b="1">
+                <a:solidFill>
+                  <a:srgbClr val="4B7B4D"/>
+                </a:solidFill>
+                <a:latin typeface="Montserrat"/>
+              </a:rPr>
+              <a:t>+  Pros</a:t>
             </a:r>
           </a:p>
           <a:p>
@@ -17659,29 +18179,20 @@
             <a:r>
               <a:rPr sz="1300">
                 <a:solidFill>
-                  <a:srgbClr val="8CC63E"/>
+                  <a:srgbClr val="4B7B4D"/>
                 </a:solidFill>
                 <a:latin typeface="Open Sans"/>
               </a:rPr>
               <a:t>■  </a:t>
             </a:r>
             <a:r>
-              <a:rPr sz="1300" b="1">
+              <a:rPr sz="1300" b="0">
                 <a:solidFill>
                   <a:srgbClr val="404041"/>
                 </a:solidFill>
                 <a:latin typeface="Open Sans"/>
               </a:rPr>
-              <a:t>No undocumented cash.</a:t>
-            </a:r>
-            <a:r>
-              <a:rPr sz="1300" b="0">
-                <a:solidFill>
-                  <a:srgbClr val="404041"/>
-                </a:solidFill>
-                <a:latin typeface="Open Sans"/>
-              </a:rPr>
-              <a:t> Cash deposits without a trail can’t be used</a:t>
+              <a:t>Finances higher-priced homes</a:t>
             </a:r>
           </a:p>
           <a:p>
@@ -17696,7 +18207,7 @@
             <a:r>
               <a:rPr sz="1300">
                 <a:solidFill>
-                  <a:srgbClr val="8CC63E"/>
+                  <a:srgbClr val="4B7B4D"/>
                 </a:solidFill>
                 <a:latin typeface="Open Sans"/>
               </a:rPr>
@@ -17709,54 +18220,124 @@
                 </a:solidFill>
                 <a:latin typeface="Open Sans"/>
               </a:rPr>
-              <a:t>Large non-payroll deposits must be sourced and explained</a:t>
+              <a:t>Flexible structures available</a:t>
             </a:r>
           </a:p>
           <a:p>
             <a:pPr algn="l">
               <a:spcBef>
-                <a:spcPts val="1400"/>
+                <a:spcPts val="1800"/>
+              </a:spcBef>
+              <a:spcAft>
+                <a:spcPts val="1000"/>
+              </a:spcAft>
+            </a:pPr>
+            <a:r>
+              <a:rPr sz="1100" b="1">
+                <a:solidFill>
+                  <a:srgbClr val="404041"/>
+                </a:solidFill>
+                <a:latin typeface="Montserrat"/>
+              </a:rPr>
+              <a:t>–  Cons</a:t>
+            </a:r>
+          </a:p>
+          <a:p>
+            <a:pPr algn="l">
+              <a:spcBef>
+                <a:spcPts val="0"/>
               </a:spcBef>
               <a:spcAft>
                 <a:spcPts val="800"/>
               </a:spcAft>
             </a:pPr>
             <a:r>
-              <a:t>  </a:t>
+              <a:rPr sz="1300">
+                <a:solidFill>
+                  <a:srgbClr val="404041"/>
+                </a:solidFill>
+                <a:latin typeface="Open Sans"/>
+              </a:rPr>
+              <a:t>■  </a:t>
             </a:r>
             <a:r>
               <a:rPr sz="1300" b="0">
                 <a:solidFill>
-                  <a:srgbClr val="0C3335"/>
-                </a:solidFill>
-                <a:latin typeface="Open Sans"/>
-              </a:rPr>
-              <a:t>Move money </a:t>
-            </a:r>
-            <a:r>
-              <a:rPr sz="1300" b="1">
-                <a:solidFill>
-                  <a:srgbClr val="0C3335"/>
-                </a:solidFill>
-                <a:latin typeface="Open Sans"/>
-              </a:rPr>
-              <a:t>before</a:t>
+                  <a:srgbClr val="404041"/>
+                </a:solidFill>
+                <a:latin typeface="Open Sans"/>
+              </a:rPr>
+              <a:t>Strongest credit and reserves expected</a:t>
+            </a:r>
+          </a:p>
+          <a:p>
+            <a:pPr algn="l">
+              <a:spcBef>
+                <a:spcPts val="0"/>
+              </a:spcBef>
+              <a:spcAft>
+                <a:spcPts val="800"/>
+              </a:spcAft>
+            </a:pPr>
+            <a:r>
+              <a:rPr sz="1300">
+                <a:solidFill>
+                  <a:srgbClr val="404041"/>
+                </a:solidFill>
+                <a:latin typeface="Open Sans"/>
+              </a:rPr>
+              <a:t>■  </a:t>
             </a:r>
             <a:r>
               <a:rPr sz="1300" b="0">
                 <a:solidFill>
-                  <a:srgbClr val="0C3335"/>
-                </a:solidFill>
-                <a:latin typeface="Open Sans"/>
-              </a:rPr>
-              <a:t> you apply, not during.</a:t>
-            </a:r>
-          </a:p>
-        </p:txBody>
-      </p:sp>
-      <p:sp>
-        <p:nvSpPr>
-          <p:cNvPr id="6" name="Rectangle 5">
+                  <a:srgbClr val="404041"/>
+                </a:solidFill>
+                <a:latin typeface="Open Sans"/>
+              </a:rPr>
+              <a:t>Rules vary a lot by investor — shop it</a:t>
+            </a:r>
+          </a:p>
+        </p:txBody>
+      </p:sp>
+      <p:sp>
+        <p:nvSpPr>
+          <p:cNvPr id="6" name="TextBox 5"/>
+          <p:cNvSpPr txBox="1"/>
+          <p:nvPr/>
+        </p:nvSpPr>
+        <p:spPr>
+          <a:xfrm>
+            <a:off x="609584" y="5524534"/>
+            <a:ext cx="10972527" cy="507987"/>
+          </a:xfrm>
+          <a:prstGeom prst="rect">
+            <a:avLst/>
+          </a:prstGeom>
+          <a:noFill/>
+        </p:spPr>
+        <p:txBody>
+          <a:bodyPr wrap="square" anchor="t" lIns="0" rIns="0" tIns="0" bIns="0">
+            <a:spAutoFit/>
+          </a:bodyPr>
+          <a:lstStyle/>
+          <a:p>
+            <a:pPr algn="l"/>
+            <a:r>
+              <a:rPr sz="1050" b="0" i="1">
+                <a:solidFill>
+                  <a:srgbClr val="6A7370"/>
+                </a:solidFill>
+                <a:latin typeface="Open Sans"/>
+              </a:rPr>
+              <a:t>General guidelines only. Actual eligibility depends on full underwriting, credit, property, and lender overlays.</a:t>
+            </a:r>
+          </a:p>
+        </p:txBody>
+      </p:sp>
+      <p:sp>
+        <p:nvSpPr>
+          <p:cNvPr id="7" name="Rectangle 6">
             <a:hlinkClick action="ppaction://hlinksldjump" r:id="rId2"/>
           </p:cNvPr>
           <p:cNvSpPr/>
@@ -17928,7 +18509,7 @@
                 </a:solidFill>
                 <a:latin typeface="Montserrat"/>
               </a:rPr>
-              <a:t>Gift Funds</a:t>
+              <a:t>Savings</a:t>
             </a:r>
           </a:p>
         </p:txBody>
@@ -18029,13 +18610,22 @@
               <a:t>■  </a:t>
             </a:r>
             <a:r>
+              <a:rPr sz="1300" b="0">
+                <a:solidFill>
+                  <a:srgbClr val="404041"/>
+                </a:solidFill>
+                <a:latin typeface="Open Sans"/>
+              </a:rPr>
+              <a:t>Must be </a:t>
+            </a:r>
+            <a:r>
               <a:rPr sz="1300" b="1">
                 <a:solidFill>
                   <a:srgbClr val="404041"/>
                 </a:solidFill>
                 <a:latin typeface="Open Sans"/>
               </a:rPr>
-              <a:t>Gift letter required</a:t>
+              <a:t>seasoned</a:t>
             </a:r>
             <a:r>
               <a:rPr sz="1300" b="0">
@@ -18044,7 +18634,7 @@
                 </a:solidFill>
                 <a:latin typeface="Open Sans"/>
               </a:rPr>
-              <a:t> — stating it is not a loan</a:t>
+              <a:t> — sitting in your account, documented</a:t>
             </a:r>
           </a:p>
           <a:p>
@@ -18066,22 +18656,22 @@
               <a:t>■  </a:t>
             </a:r>
             <a:r>
+              <a:rPr sz="1300" b="1">
+                <a:solidFill>
+                  <a:srgbClr val="404041"/>
+                </a:solidFill>
+                <a:latin typeface="Open Sans"/>
+              </a:rPr>
+              <a:t>No undocumented cash.</a:t>
+            </a:r>
+            <a:r>
               <a:rPr sz="1300" b="0">
                 <a:solidFill>
                   <a:srgbClr val="404041"/>
                 </a:solidFill>
                 <a:latin typeface="Open Sans"/>
               </a:rPr>
-              <a:t>Generally must come from </a:t>
-            </a:r>
-            <a:r>
-              <a:rPr sz="1300" b="1">
-                <a:solidFill>
-                  <a:srgbClr val="404041"/>
-                </a:solidFill>
-                <a:latin typeface="Open Sans"/>
-              </a:rPr>
-              <a:t>family</a:t>
+              <a:t> Cash deposits without a trail can’t be used</a:t>
             </a:r>
           </a:p>
           <a:p>
@@ -18109,7 +18699,7 @@
                 </a:solidFill>
                 <a:latin typeface="Open Sans"/>
               </a:rPr>
-              <a:t>The donor’s funds must be sourced, and the transfer documented</a:t>
+              <a:t>Large non-payroll deposits must be sourced and explained</a:t>
             </a:r>
           </a:p>
           <a:p>
@@ -18131,7 +18721,7 @@
                 </a:solidFill>
                 <a:latin typeface="Open Sans"/>
               </a:rPr>
-              <a:t>Tell your lender </a:t>
+              <a:t>Move money </a:t>
             </a:r>
             <a:r>
               <a:rPr sz="1300" b="1">
@@ -18149,7 +18739,7 @@
                 </a:solidFill>
                 <a:latin typeface="Open Sans"/>
               </a:rPr>
-              <a:t> the money moves.</a:t>
+              <a:t> you apply, not during.</a:t>
             </a:r>
           </a:p>
         </p:txBody>
@@ -18564,8 +19154,8 @@
         </p:nvSpPr>
         <p:spPr>
           <a:xfrm>
-            <a:off x="609584" y="4762553"/>
-            <a:ext cx="9524761" cy="571485"/>
+            <a:off x="609584" y="4191067"/>
+            <a:ext cx="9524761" cy="533386"/>
           </a:xfrm>
           <a:prstGeom prst="rect">
             <a:avLst/>
@@ -18611,7 +19201,62 @@
       </p:sp>
       <p:sp>
         <p:nvSpPr>
-          <p:cNvPr id="8" name="Rectangle 7"/>
+          <p:cNvPr id="8" name="Rectangle 7">
+            <a:hlinkClick action="ppaction://hlinksldjump" r:id="rId3"/>
+          </p:cNvPr>
+          <p:cNvSpPr/>
+          <p:nvPr/>
+        </p:nvSpPr>
+        <p:spPr>
+          <a:xfrm>
+            <a:off x="609584" y="4953048"/>
+            <a:ext cx="5206869" cy="533386"/>
+          </a:xfrm>
+          <a:prstGeom prst="rect">
+            <a:avLst/>
+          </a:prstGeom>
+          <a:solidFill>
+            <a:srgbClr val="8CC63E"/>
+          </a:solidFill>
+          <a:ln>
+            <a:noFill/>
+          </a:ln>
+          <a:effectLst/>
+        </p:spPr>
+        <p:style>
+          <a:lnRef idx="1">
+            <a:schemeClr val="accent1"/>
+          </a:lnRef>
+          <a:fillRef idx="3">
+            <a:schemeClr val="accent1"/>
+          </a:fillRef>
+          <a:effectRef idx="2">
+            <a:schemeClr val="accent1"/>
+          </a:effectRef>
+          <a:fontRef idx="minor">
+            <a:schemeClr val="lt1"/>
+          </a:fontRef>
+        </p:style>
+        <p:txBody>
+          <a:bodyPr rtlCol="0" anchor="ctr"/>
+          <a:lstStyle/>
+          <a:p>
+            <a:pPr algn="ctr"/>
+            <a:r>
+              <a:rPr sz="1200" b="1">
+                <a:solidFill>
+                  <a:srgbClr val="0C3335"/>
+                </a:solidFill>
+                <a:latin typeface="Montserrat"/>
+              </a:rPr>
+              <a:t>Compare loans:  Conventional · FHA · VA  ›</a:t>
+            </a:r>
+          </a:p>
+        </p:txBody>
+      </p:sp>
+      <p:sp>
+        <p:nvSpPr>
+          <p:cNvPr id="9" name="Rectangle 8"/>
           <p:cNvSpPr/>
           <p:nvPr/>
         </p:nvSpPr>
@@ -18655,7 +19300,7 @@
       </p:sp>
       <p:sp>
         <p:nvSpPr>
-          <p:cNvPr id="9" name="Rectangle 8"/>
+          <p:cNvPr id="10" name="Rectangle 9"/>
           <p:cNvSpPr/>
           <p:nvPr/>
         </p:nvSpPr>
@@ -18699,7 +19344,7 @@
       </p:sp>
       <p:pic>
         <p:nvPicPr>
-          <p:cNvPr id="10" name="Picture 9" descr="logo-horizontal.png"/>
+          <p:cNvPr id="11" name="Picture 10" descr="logo-horizontal.png"/>
           <p:cNvPicPr>
             <a:picLocks noChangeAspect="1"/>
           </p:cNvPicPr>
@@ -18723,7 +19368,7 @@
       </p:pic>
       <p:sp>
         <p:nvSpPr>
-          <p:cNvPr id="11" name="TextBox 10"/>
+          <p:cNvPr id="12" name="TextBox 11"/>
           <p:cNvSpPr txBox="1"/>
           <p:nvPr/>
         </p:nvSpPr>
@@ -18894,7 +19539,7 @@
                 </a:solidFill>
                 <a:latin typeface="Montserrat"/>
               </a:rPr>
-              <a:t>Seller Credits</a:t>
+              <a:t>Gift Funds</a:t>
             </a:r>
           </a:p>
         </p:txBody>
@@ -18995,13 +19640,22 @@
               <a:t>■  </a:t>
             </a:r>
             <a:r>
+              <a:rPr sz="1300" b="1">
+                <a:solidFill>
+                  <a:srgbClr val="404041"/>
+                </a:solidFill>
+                <a:latin typeface="Open Sans"/>
+              </a:rPr>
+              <a:t>Gift letter required</a:t>
+            </a:r>
+            <a:r>
               <a:rPr sz="1300" b="0">
                 <a:solidFill>
                   <a:srgbClr val="404041"/>
                 </a:solidFill>
                 <a:latin typeface="Open Sans"/>
               </a:rPr>
-              <a:t>The seller contributes toward your closing costs</a:t>
+              <a:t> — stating it is not a loan</a:t>
             </a:r>
           </a:p>
           <a:p>
@@ -19023,22 +19677,22 @@
               <a:t>■  </a:t>
             </a:r>
             <a:r>
+              <a:rPr sz="1300" b="0">
+                <a:solidFill>
+                  <a:srgbClr val="404041"/>
+                </a:solidFill>
+                <a:latin typeface="Open Sans"/>
+              </a:rPr>
+              <a:t>Generally must come from </a:t>
+            </a:r>
+            <a:r>
               <a:rPr sz="1300" b="1">
                 <a:solidFill>
                   <a:srgbClr val="404041"/>
                 </a:solidFill>
                 <a:latin typeface="Open Sans"/>
               </a:rPr>
-              <a:t>Concession caps apply</a:t>
-            </a:r>
-            <a:r>
-              <a:rPr sz="1300" b="0">
-                <a:solidFill>
-                  <a:srgbClr val="404041"/>
-                </a:solidFill>
-                <a:latin typeface="Open Sans"/>
-              </a:rPr>
-              <a:t> by program and down payment</a:t>
+              <a:t>family</a:t>
             </a:r>
           </a:p>
           <a:p>
@@ -19066,7 +19720,7 @@
                 </a:solidFill>
                 <a:latin typeface="Open Sans"/>
               </a:rPr>
-              <a:t>Cannot pay your down payment or exceed your actual costs</a:t>
+              <a:t>The donor’s funds must be sourced, and the transfer documented</a:t>
             </a:r>
           </a:p>
           <a:p>
@@ -19088,7 +19742,7 @@
                 </a:solidFill>
                 <a:latin typeface="Open Sans"/>
               </a:rPr>
-              <a:t>You have to </a:t>
+              <a:t>Tell your lender </a:t>
             </a:r>
             <a:r>
               <a:rPr sz="1300" b="1">
@@ -19097,7 +19751,7 @@
                 </a:solidFill>
                 <a:latin typeface="Open Sans"/>
               </a:rPr>
-              <a:t>negotiate</a:t>
+              <a:t>before</a:t>
             </a:r>
             <a:r>
               <a:rPr sz="1300" b="0">
@@ -19106,7 +19760,7 @@
                 </a:solidFill>
                 <a:latin typeface="Open Sans"/>
               </a:rPr>
-              <a:t> for it — ask your agent to ask.</a:t>
+              <a:t> the money moves.</a:t>
             </a:r>
           </a:p>
         </p:txBody>
@@ -19285,7 +19939,7 @@
                 </a:solidFill>
                 <a:latin typeface="Montserrat"/>
               </a:rPr>
-              <a:t>2-1 Buydowns</a:t>
+              <a:t>Seller Credits</a:t>
             </a:r>
           </a:p>
         </p:txBody>
@@ -19364,7 +20018,7 @@
                 </a:solidFill>
                 <a:latin typeface="Montserrat"/>
               </a:rPr>
-              <a:t>How it works</a:t>
+              <a:t>The rules</a:t>
             </a:r>
           </a:p>
           <a:p>
@@ -19392,25 +20046,7 @@
                 </a:solidFill>
                 <a:latin typeface="Open Sans"/>
               </a:rPr>
-              <a:t>A </a:t>
-            </a:r>
-            <a:r>
-              <a:rPr sz="1300" b="1">
-                <a:solidFill>
-                  <a:srgbClr val="404041"/>
-                </a:solidFill>
-                <a:latin typeface="Open Sans"/>
-              </a:rPr>
-              <a:t>temporary</a:t>
-            </a:r>
-            <a:r>
-              <a:rPr sz="1300" b="0">
-                <a:solidFill>
-                  <a:srgbClr val="404041"/>
-                </a:solidFill>
-                <a:latin typeface="Open Sans"/>
-              </a:rPr>
-              <a:t> payment reduction for the first two years</a:t>
+              <a:t>The seller contributes toward your closing costs</a:t>
             </a:r>
           </a:p>
           <a:p>
@@ -19432,50 +20068,22 @@
               <a:t>■  </a:t>
             </a:r>
             <a:r>
+              <a:rPr sz="1300" b="1">
+                <a:solidFill>
+                  <a:srgbClr val="404041"/>
+                </a:solidFill>
+                <a:latin typeface="Open Sans"/>
+              </a:rPr>
+              <a:t>Concession caps apply</a:t>
+            </a:r>
+            <a:r>
               <a:rPr sz="1300" b="0">
                 <a:solidFill>
                   <a:srgbClr val="404041"/>
                 </a:solidFill>
                 <a:latin typeface="Open Sans"/>
               </a:rPr>
-              <a:t>Usually paid by the </a:t>
-            </a:r>
-            <a:r>
-              <a:rPr sz="1300" b="1">
-                <a:solidFill>
-                  <a:srgbClr val="404041"/>
-                </a:solidFill>
-                <a:latin typeface="Open Sans"/>
-              </a:rPr>
-              <a:t>seller or builder</a:t>
-            </a:r>
-            <a:r>
-              <a:rPr sz="1300" b="0">
-                <a:solidFill>
-                  <a:srgbClr val="404041"/>
-                </a:solidFill>
-                <a:latin typeface="Open Sans"/>
-              </a:rPr>
-              <a:t>, not you</a:t>
-            </a:r>
-          </a:p>
-          <a:p>
-            <a:pPr algn="l">
-              <a:spcBef>
-                <a:spcPts val="1800"/>
-              </a:spcBef>
-              <a:spcAft>
-                <a:spcPts val="1000"/>
-              </a:spcAft>
-            </a:pPr>
-            <a:r>
-              <a:rPr sz="1100" b="1">
-                <a:solidFill>
-                  <a:srgbClr val="404041"/>
-                </a:solidFill>
-                <a:latin typeface="Montserrat"/>
-              </a:rPr>
-              <a:t>–  The catch</a:t>
+              <a:t> by program and down payment</a:t>
             </a:r>
           </a:p>
           <a:p>
@@ -19490,108 +20098,67 @@
             <a:r>
               <a:rPr sz="1300">
                 <a:solidFill>
+                  <a:srgbClr val="8CC63E"/>
+                </a:solidFill>
+                <a:latin typeface="Open Sans"/>
+              </a:rPr>
+              <a:t>■  </a:t>
+            </a:r>
+            <a:r>
+              <a:rPr sz="1300" b="0">
+                <a:solidFill>
                   <a:srgbClr val="404041"/>
                 </a:solidFill>
                 <a:latin typeface="Open Sans"/>
               </a:rPr>
-              <a:t>■  </a:t>
-            </a:r>
-            <a:r>
-              <a:rPr sz="1300" b="0">
-                <a:solidFill>
-                  <a:srgbClr val="404041"/>
-                </a:solidFill>
-                <a:latin typeface="Open Sans"/>
-              </a:rPr>
-              <a:t>You qualify at the </a:t>
-            </a:r>
-            <a:r>
-              <a:rPr sz="1300" b="1">
-                <a:solidFill>
-                  <a:srgbClr val="404041"/>
-                </a:solidFill>
-                <a:latin typeface="Open Sans"/>
-              </a:rPr>
-              <a:t>real rate</a:t>
-            </a:r>
-            <a:r>
-              <a:rPr sz="1300" b="0">
-                <a:solidFill>
-                  <a:srgbClr val="404041"/>
-                </a:solidFill>
-                <a:latin typeface="Open Sans"/>
-              </a:rPr>
-              <a:t> — full payment in year three</a:t>
+              <a:t>Cannot pay your down payment or exceed your actual costs</a:t>
             </a:r>
           </a:p>
           <a:p>
             <a:pPr algn="l">
               <a:spcBef>
-                <a:spcPts val="0"/>
+                <a:spcPts val="1400"/>
               </a:spcBef>
               <a:spcAft>
                 <a:spcPts val="800"/>
               </a:spcAft>
             </a:pPr>
             <a:r>
-              <a:rPr sz="1300">
-                <a:solidFill>
-                  <a:srgbClr val="404041"/>
-                </a:solidFill>
-                <a:latin typeface="Open Sans"/>
-              </a:rPr>
-              <a:t>■  </a:t>
+              <a:t>  </a:t>
             </a:r>
             <a:r>
               <a:rPr sz="1300" b="0">
                 <a:solidFill>
-                  <a:srgbClr val="404041"/>
-                </a:solidFill>
-                <a:latin typeface="Open Sans"/>
-              </a:rPr>
-              <a:t>A plan to refinance first depends on rates nobody controls</a:t>
-            </a:r>
-          </a:p>
-        </p:txBody>
-      </p:sp>
-      <p:sp>
-        <p:nvSpPr>
-          <p:cNvPr id="6" name="TextBox 5"/>
-          <p:cNvSpPr txBox="1"/>
-          <p:nvPr/>
-        </p:nvSpPr>
-        <p:spPr>
-          <a:xfrm>
-            <a:off x="609584" y="5524534"/>
-            <a:ext cx="10972527" cy="507987"/>
-          </a:xfrm>
-          <a:prstGeom prst="rect">
-            <a:avLst/>
-          </a:prstGeom>
-          <a:noFill/>
-        </p:spPr>
-        <p:txBody>
-          <a:bodyPr wrap="square" anchor="t" lIns="0" rIns="0" tIns="0" bIns="0">
-            <a:spAutoFit/>
-          </a:bodyPr>
-          <a:lstStyle/>
-          <a:p>
-            <a:pPr algn="l"/>
-            <a:r>
-              <a:rPr sz="1050" b="0" i="1">
-                <a:solidFill>
-                  <a:srgbClr val="6A7370"/>
-                </a:solidFill>
-                <a:latin typeface="Open Sans"/>
-              </a:rPr>
-              <a:t>General guidelines only. Actual eligibility depends on full underwriting, credit, property, and lender overlays.</a:t>
-            </a:r>
-          </a:p>
-        </p:txBody>
-      </p:sp>
-      <p:sp>
-        <p:nvSpPr>
-          <p:cNvPr id="7" name="Rectangle 6">
+                  <a:srgbClr val="0C3335"/>
+                </a:solidFill>
+                <a:latin typeface="Open Sans"/>
+              </a:rPr>
+              <a:t>You have to </a:t>
+            </a:r>
+            <a:r>
+              <a:rPr sz="1300" b="1">
+                <a:solidFill>
+                  <a:srgbClr val="0C3335"/>
+                </a:solidFill>
+                <a:latin typeface="Open Sans"/>
+              </a:rPr>
+              <a:t>negotiate</a:t>
+            </a:r>
+            <a:r>
+              <a:rPr sz="1300" b="0">
+                <a:solidFill>
+                  <a:srgbClr val="0C3335"/>
+                </a:solidFill>
+                <a:latin typeface="Open Sans"/>
+              </a:rPr>
+              <a:t> for it — ask your agent to ask.</a:t>
+            </a:r>
+          </a:p>
+        </p:txBody>
+      </p:sp>
+      <p:sp>
+        <p:nvSpPr>
+          <p:cNvPr id="6" name="Rectangle 5">
             <a:hlinkClick action="ppaction://hlinksldjump" r:id="rId2"/>
           </p:cNvPr>
           <p:cNvSpPr/>
@@ -19763,7 +20330,7 @@
                 </a:solidFill>
                 <a:latin typeface="Montserrat"/>
               </a:rPr>
-              <a:t>Agent Credits</a:t>
+              <a:t>2-1 Buydowns</a:t>
             </a:r>
           </a:p>
         </p:txBody>
@@ -19842,7 +20409,7 @@
                 </a:solidFill>
                 <a:latin typeface="Montserrat"/>
               </a:rPr>
-              <a:t>The rules</a:t>
+              <a:t>How it works</a:t>
             </a:r>
           </a:p>
           <a:p>
@@ -19870,7 +20437,25 @@
                 </a:solidFill>
                 <a:latin typeface="Open Sans"/>
               </a:rPr>
-              <a:t>An agent may contribute part of their commission</a:t>
+              <a:t>A </a:t>
+            </a:r>
+            <a:r>
+              <a:rPr sz="1300" b="1">
+                <a:solidFill>
+                  <a:srgbClr val="404041"/>
+                </a:solidFill>
+                <a:latin typeface="Open Sans"/>
+              </a:rPr>
+              <a:t>temporary</a:t>
+            </a:r>
+            <a:r>
+              <a:rPr sz="1300" b="0">
+                <a:solidFill>
+                  <a:srgbClr val="404041"/>
+                </a:solidFill>
+                <a:latin typeface="Open Sans"/>
+              </a:rPr>
+              <a:t> payment reduction for the first two years</a:t>
             </a:r>
           </a:p>
           <a:p>
@@ -19898,7 +20483,7 @@
                 </a:solidFill>
                 <a:latin typeface="Open Sans"/>
               </a:rPr>
-              <a:t>Must be </a:t>
+              <a:t>Usually paid by the </a:t>
             </a:r>
             <a:r>
               <a:rPr sz="1300" b="1">
@@ -19907,7 +20492,7 @@
                 </a:solidFill>
                 <a:latin typeface="Open Sans"/>
               </a:rPr>
-              <a:t>disclosed</a:t>
+              <a:t>seller or builder</a:t>
             </a:r>
             <a:r>
               <a:rPr sz="1300" b="0">
@@ -19916,7 +20501,26 @@
                 </a:solidFill>
                 <a:latin typeface="Open Sans"/>
               </a:rPr>
-              <a:t> and appear on closing documents</a:t>
+              <a:t>, not you</a:t>
+            </a:r>
+          </a:p>
+          <a:p>
+            <a:pPr algn="l">
+              <a:spcBef>
+                <a:spcPts val="1800"/>
+              </a:spcBef>
+              <a:spcAft>
+                <a:spcPts val="1000"/>
+              </a:spcAft>
+            </a:pPr>
+            <a:r>
+              <a:rPr sz="1100" b="1">
+                <a:solidFill>
+                  <a:srgbClr val="404041"/>
+                </a:solidFill>
+                <a:latin typeface="Montserrat"/>
+              </a:rPr>
+              <a:t>–  The catch</a:t>
             </a:r>
           </a:p>
           <a:p>
@@ -19931,7 +20535,7 @@
             <a:r>
               <a:rPr sz="1300">
                 <a:solidFill>
-                  <a:srgbClr val="8CC63E"/>
+                  <a:srgbClr val="404041"/>
                 </a:solidFill>
                 <a:latin typeface="Open Sans"/>
               </a:rPr>
@@ -19944,36 +20548,95 @@
                 </a:solidFill>
                 <a:latin typeface="Open Sans"/>
               </a:rPr>
-              <a:t>Counts toward overall contribution limits</a:t>
+              <a:t>You qualify at the </a:t>
+            </a:r>
+            <a:r>
+              <a:rPr sz="1300" b="1">
+                <a:solidFill>
+                  <a:srgbClr val="404041"/>
+                </a:solidFill>
+                <a:latin typeface="Open Sans"/>
+              </a:rPr>
+              <a:t>real rate</a:t>
+            </a:r>
+            <a:r>
+              <a:rPr sz="1300" b="0">
+                <a:solidFill>
+                  <a:srgbClr val="404041"/>
+                </a:solidFill>
+                <a:latin typeface="Open Sans"/>
+              </a:rPr>
+              <a:t> — full payment in year three</a:t>
             </a:r>
           </a:p>
           <a:p>
             <a:pPr algn="l">
               <a:spcBef>
-                <a:spcPts val="1400"/>
+                <a:spcPts val="0"/>
               </a:spcBef>
               <a:spcAft>
                 <a:spcPts val="800"/>
               </a:spcAft>
             </a:pPr>
             <a:r>
-              <a:t>  </a:t>
+              <a:rPr sz="1300">
+                <a:solidFill>
+                  <a:srgbClr val="404041"/>
+                </a:solidFill>
+                <a:latin typeface="Open Sans"/>
+              </a:rPr>
+              <a:t>■  </a:t>
             </a:r>
             <a:r>
               <a:rPr sz="1300" b="0">
                 <a:solidFill>
-                  <a:srgbClr val="0C3335"/>
-                </a:solidFill>
-                <a:latin typeface="Open Sans"/>
-              </a:rPr>
-              <a:t>Ask early — it can’t be added at the closing table.</a:t>
-            </a:r>
-          </a:p>
-        </p:txBody>
-      </p:sp>
-      <p:sp>
-        <p:nvSpPr>
-          <p:cNvPr id="6" name="Rectangle 5">
+                  <a:srgbClr val="404041"/>
+                </a:solidFill>
+                <a:latin typeface="Open Sans"/>
+              </a:rPr>
+              <a:t>A plan to refinance first depends on rates nobody controls</a:t>
+            </a:r>
+          </a:p>
+        </p:txBody>
+      </p:sp>
+      <p:sp>
+        <p:nvSpPr>
+          <p:cNvPr id="6" name="TextBox 5"/>
+          <p:cNvSpPr txBox="1"/>
+          <p:nvPr/>
+        </p:nvSpPr>
+        <p:spPr>
+          <a:xfrm>
+            <a:off x="609584" y="5524534"/>
+            <a:ext cx="10972527" cy="507987"/>
+          </a:xfrm>
+          <a:prstGeom prst="rect">
+            <a:avLst/>
+          </a:prstGeom>
+          <a:noFill/>
+        </p:spPr>
+        <p:txBody>
+          <a:bodyPr wrap="square" anchor="t" lIns="0" rIns="0" tIns="0" bIns="0">
+            <a:spAutoFit/>
+          </a:bodyPr>
+          <a:lstStyle/>
+          <a:p>
+            <a:pPr algn="l"/>
+            <a:r>
+              <a:rPr sz="1050" b="0" i="1">
+                <a:solidFill>
+                  <a:srgbClr val="6A7370"/>
+                </a:solidFill>
+                <a:latin typeface="Open Sans"/>
+              </a:rPr>
+              <a:t>General guidelines only. Actual eligibility depends on full underwriting, credit, property, and lender overlays.</a:t>
+            </a:r>
+          </a:p>
+        </p:txBody>
+      </p:sp>
+      <p:sp>
+        <p:nvSpPr>
+          <p:cNvPr id="7" name="Rectangle 6">
             <a:hlinkClick action="ppaction://hlinksldjump" r:id="rId2"/>
           </p:cNvPr>
           <p:cNvSpPr/>
@@ -20145,7 +20808,7 @@
                 </a:solidFill>
                 <a:latin typeface="Montserrat"/>
               </a:rPr>
-              <a:t>Down Payment Assistance</a:t>
+              <a:t>Agent Credits</a:t>
             </a:r>
           </a:p>
         </p:txBody>
@@ -20224,7 +20887,7 @@
                 </a:solidFill>
                 <a:latin typeface="Montserrat"/>
               </a:rPr>
-              <a:t>What it is</a:t>
+              <a:t>The rules</a:t>
             </a:r>
           </a:p>
           <a:p>
@@ -20252,26 +20915,7 @@
                 </a:solidFill>
                 <a:latin typeface="Open Sans"/>
               </a:rPr>
-              <a:t>Grants or second mortgages that reduce cash to close</a:t>
-            </a:r>
-          </a:p>
-          <a:p>
-            <a:pPr algn="l">
-              <a:spcBef>
-                <a:spcPts val="1800"/>
-              </a:spcBef>
-              <a:spcAft>
-                <a:spcPts val="1000"/>
-              </a:spcAft>
-            </a:pPr>
-            <a:r>
-              <a:rPr sz="1100" b="1">
-                <a:solidFill>
-                  <a:srgbClr val="404041"/>
-                </a:solidFill>
-                <a:latin typeface="Montserrat"/>
-              </a:rPr>
-              <a:t>–  The trade-offs</a:t>
+              <a:t>An agent may contribute part of their commission</a:t>
             </a:r>
           </a:p>
           <a:p>
@@ -20286,11 +20930,20 @@
             <a:r>
               <a:rPr sz="1300">
                 <a:solidFill>
+                  <a:srgbClr val="8CC63E"/>
+                </a:solidFill>
+                <a:latin typeface="Open Sans"/>
+              </a:rPr>
+              <a:t>■  </a:t>
+            </a:r>
+            <a:r>
+              <a:rPr sz="1300" b="0">
+                <a:solidFill>
                   <a:srgbClr val="404041"/>
                 </a:solidFill>
                 <a:latin typeface="Open Sans"/>
               </a:rPr>
-              <a:t>■  </a:t>
+              <a:t>Must be </a:t>
             </a:r>
             <a:r>
               <a:rPr sz="1300" b="1">
@@ -20299,7 +20952,7 @@
                 </a:solidFill>
                 <a:latin typeface="Open Sans"/>
               </a:rPr>
-              <a:t>Complicates the process</a:t>
+              <a:t>disclosed</a:t>
             </a:r>
             <a:r>
               <a:rPr sz="1300" b="0">
@@ -20308,7 +20961,7 @@
                 </a:solidFill>
                 <a:latin typeface="Open Sans"/>
               </a:rPr>
-              <a:t> — extra underwriting and timelines</a:t>
+              <a:t> and appear on closing documents</a:t>
             </a:r>
           </a:p>
           <a:p>
@@ -20323,84 +20976,20 @@
             <a:r>
               <a:rPr sz="1300">
                 <a:solidFill>
+                  <a:srgbClr val="8CC63E"/>
+                </a:solidFill>
+                <a:latin typeface="Open Sans"/>
+              </a:rPr>
+              <a:t>■  </a:t>
+            </a:r>
+            <a:r>
+              <a:rPr sz="1300" b="0">
+                <a:solidFill>
                   <a:srgbClr val="404041"/>
                 </a:solidFill>
                 <a:latin typeface="Open Sans"/>
               </a:rPr>
-              <a:t>■  </a:t>
-            </a:r>
-            <a:r>
-              <a:rPr sz="1300" b="0">
-                <a:solidFill>
-                  <a:srgbClr val="404041"/>
-                </a:solidFill>
-                <a:latin typeface="Open Sans"/>
-              </a:rPr>
-              <a:t>Often makes your offer </a:t>
-            </a:r>
-            <a:r>
-              <a:rPr sz="1300" b="1">
-                <a:solidFill>
-                  <a:srgbClr val="404041"/>
-                </a:solidFill>
-                <a:latin typeface="Open Sans"/>
-              </a:rPr>
-              <a:t>less attractive</a:t>
-            </a:r>
-            <a:r>
-              <a:rPr sz="1300" b="0">
-                <a:solidFill>
-                  <a:srgbClr val="404041"/>
-                </a:solidFill>
-                <a:latin typeface="Open Sans"/>
-              </a:rPr>
-              <a:t> to sellers</a:t>
-            </a:r>
-          </a:p>
-          <a:p>
-            <a:pPr algn="l">
-              <a:spcBef>
-                <a:spcPts val="0"/>
-              </a:spcBef>
-              <a:spcAft>
-                <a:spcPts val="800"/>
-              </a:spcAft>
-            </a:pPr>
-            <a:r>
-              <a:rPr sz="1300">
-                <a:solidFill>
-                  <a:srgbClr val="404041"/>
-                </a:solidFill>
-                <a:latin typeface="Open Sans"/>
-              </a:rPr>
-              <a:t>■  </a:t>
-            </a:r>
-            <a:r>
-              <a:rPr sz="1300" b="0">
-                <a:solidFill>
-                  <a:srgbClr val="404041"/>
-                </a:solidFill>
-                <a:latin typeface="Open Sans"/>
-              </a:rPr>
-              <a:t>Usually a </a:t>
-            </a:r>
-            <a:r>
-              <a:rPr sz="1300" b="1">
-                <a:solidFill>
-                  <a:srgbClr val="404041"/>
-                </a:solidFill>
-                <a:latin typeface="Open Sans"/>
-              </a:rPr>
-              <a:t>higher rate</a:t>
-            </a:r>
-            <a:r>
-              <a:rPr sz="1300" b="0">
-                <a:solidFill>
-                  <a:srgbClr val="404041"/>
-                </a:solidFill>
-                <a:latin typeface="Open Sans"/>
-              </a:rPr>
-              <a:t>, caps, and fine print</a:t>
+              <a:t>Counts toward overall contribution limits</a:t>
             </a:r>
           </a:p>
           <a:p>
@@ -20422,7 +21011,7 @@
                 </a:solidFill>
                 <a:latin typeface="Open Sans"/>
               </a:rPr>
-              <a:t>Sometimes it clearly wins. Run it against the higher rate before deciding.</a:t>
+              <a:t>Ask early — it can’t be added at the closing table.</a:t>
             </a:r>
           </a:p>
         </p:txBody>
@@ -20582,7 +21171,7 @@
                 </a:solidFill>
                 <a:latin typeface="Montserrat"/>
               </a:rPr>
-              <a:t>YOUR TEAM</a:t>
+              <a:t>WHERE IT COMES FROM</a:t>
             </a:r>
           </a:p>
           <a:p>
@@ -20601,7 +21190,7 @@
                 </a:solidFill>
                 <a:latin typeface="Montserrat"/>
               </a:rPr>
-              <a:t>Lender / Loan Officer</a:t>
+              <a:t>Down Payment Assistance</a:t>
             </a:r>
           </a:p>
         </p:txBody>
@@ -20680,7 +21269,7 @@
                 </a:solidFill>
                 <a:latin typeface="Montserrat"/>
               </a:rPr>
-              <a:t>What they do</a:t>
+              <a:t>What it is</a:t>
             </a:r>
           </a:p>
           <a:p>
@@ -20708,7 +21297,26 @@
                 </a:solidFill>
                 <a:latin typeface="Open Sans"/>
               </a:rPr>
-              <a:t>Structures your financing and guides you from pre-approval to closing</a:t>
+              <a:t>Grants or second mortgages that reduce cash to close</a:t>
+            </a:r>
+          </a:p>
+          <a:p>
+            <a:pPr algn="l">
+              <a:spcBef>
+                <a:spcPts val="1800"/>
+              </a:spcBef>
+              <a:spcAft>
+                <a:spcPts val="1000"/>
+              </a:spcAft>
+            </a:pPr>
+            <a:r>
+              <a:rPr sz="1100" b="1">
+                <a:solidFill>
+                  <a:srgbClr val="404041"/>
+                </a:solidFill>
+                <a:latin typeface="Montserrat"/>
+              </a:rPr>
+              <a:t>–  The trade-offs</a:t>
             </a:r>
           </a:p>
           <a:p>
@@ -20723,20 +21331,121 @@
             <a:r>
               <a:rPr sz="1300">
                 <a:solidFill>
-                  <a:srgbClr val="8CC63E"/>
+                  <a:srgbClr val="404041"/>
                 </a:solidFill>
                 <a:latin typeface="Open Sans"/>
               </a:rPr>
               <a:t>■  </a:t>
             </a:r>
             <a:r>
+              <a:rPr sz="1300" b="1">
+                <a:solidFill>
+                  <a:srgbClr val="404041"/>
+                </a:solidFill>
+                <a:latin typeface="Open Sans"/>
+              </a:rPr>
+              <a:t>Complicates the process</a:t>
+            </a:r>
+            <a:r>
               <a:rPr sz="1300" b="0">
                 <a:solidFill>
                   <a:srgbClr val="404041"/>
                 </a:solidFill>
                 <a:latin typeface="Open Sans"/>
               </a:rPr>
-              <a:t>Packages the file and advocates for it</a:t>
+              <a:t> — extra underwriting and timelines</a:t>
+            </a:r>
+          </a:p>
+          <a:p>
+            <a:pPr algn="l">
+              <a:spcBef>
+                <a:spcPts val="0"/>
+              </a:spcBef>
+              <a:spcAft>
+                <a:spcPts val="800"/>
+              </a:spcAft>
+            </a:pPr>
+            <a:r>
+              <a:rPr sz="1300">
+                <a:solidFill>
+                  <a:srgbClr val="404041"/>
+                </a:solidFill>
+                <a:latin typeface="Open Sans"/>
+              </a:rPr>
+              <a:t>■  </a:t>
+            </a:r>
+            <a:r>
+              <a:rPr sz="1300" b="0">
+                <a:solidFill>
+                  <a:srgbClr val="404041"/>
+                </a:solidFill>
+                <a:latin typeface="Open Sans"/>
+              </a:rPr>
+              <a:t>Often makes your offer </a:t>
+            </a:r>
+            <a:r>
+              <a:rPr sz="1300" b="1">
+                <a:solidFill>
+                  <a:srgbClr val="404041"/>
+                </a:solidFill>
+                <a:latin typeface="Open Sans"/>
+              </a:rPr>
+              <a:t>less attractive</a:t>
+            </a:r>
+            <a:r>
+              <a:rPr sz="1300" b="0">
+                <a:solidFill>
+                  <a:srgbClr val="404041"/>
+                </a:solidFill>
+                <a:latin typeface="Open Sans"/>
+              </a:rPr>
+              <a:t> to sellers</a:t>
+            </a:r>
+          </a:p>
+          <a:p>
+            <a:pPr algn="l">
+              <a:spcBef>
+                <a:spcPts val="0"/>
+              </a:spcBef>
+              <a:spcAft>
+                <a:spcPts val="800"/>
+              </a:spcAft>
+            </a:pPr>
+            <a:r>
+              <a:rPr sz="1300">
+                <a:solidFill>
+                  <a:srgbClr val="404041"/>
+                </a:solidFill>
+                <a:latin typeface="Open Sans"/>
+              </a:rPr>
+              <a:t>■  </a:t>
+            </a:r>
+            <a:r>
+              <a:rPr sz="1300" b="0">
+                <a:solidFill>
+                  <a:srgbClr val="404041"/>
+                </a:solidFill>
+                <a:latin typeface="Open Sans"/>
+              </a:rPr>
+              <a:t>Usually a </a:t>
+            </a:r>
+            <a:r>
+              <a:rPr sz="1300" b="1">
+                <a:solidFill>
+                  <a:srgbClr val="404041"/>
+                </a:solidFill>
+                <a:latin typeface="Open Sans"/>
+              </a:rPr>
+              <a:t>higher rate</a:t>
+            </a:r>
+            <a:r>
+              <a:rPr sz="1300" b="0">
+                <a:solidFill>
+                  <a:srgbClr val="404041"/>
+                </a:solidFill>
+                <a:latin typeface="Open Sans"/>
+              </a:rPr>
+              <a:t>, caps, and fine print</a:t>
             </a:r>
           </a:p>
           <a:p>
@@ -20758,16 +21467,7 @@
                 </a:solidFill>
                 <a:latin typeface="Open Sans"/>
               </a:rPr>
-              <a:t>We don’t approve the loan — </a:t>
-            </a:r>
-            <a:r>
-              <a:rPr sz="1300" b="1">
-                <a:solidFill>
-                  <a:srgbClr val="0C3335"/>
-                </a:solidFill>
-                <a:latin typeface="Open Sans"/>
-              </a:rPr>
-              <a:t>the underwriter does.</a:t>
+              <a:t>Sometimes it clearly wins. Run it against the higher rate before deciding.</a:t>
             </a:r>
           </a:p>
         </p:txBody>
@@ -20946,7 +21646,7 @@
                 </a:solidFill>
                 <a:latin typeface="Montserrat"/>
               </a:rPr>
-              <a:t>Realtor</a:t>
+              <a:t>Lender / Loan Officer</a:t>
             </a:r>
           </a:p>
         </p:txBody>
@@ -21053,7 +21753,35 @@
                 </a:solidFill>
                 <a:latin typeface="Open Sans"/>
               </a:rPr>
-              <a:t>Finds homes, writes and negotiates your offer, manages deadlines</a:t>
+              <a:t>Structures your financing and guides you from pre-approval to closing</a:t>
+            </a:r>
+          </a:p>
+          <a:p>
+            <a:pPr algn="l">
+              <a:spcBef>
+                <a:spcPts val="0"/>
+              </a:spcBef>
+              <a:spcAft>
+                <a:spcPts val="800"/>
+              </a:spcAft>
+            </a:pPr>
+            <a:r>
+              <a:rPr sz="1300">
+                <a:solidFill>
+                  <a:srgbClr val="8CC63E"/>
+                </a:solidFill>
+                <a:latin typeface="Open Sans"/>
+              </a:rPr>
+              <a:t>■  </a:t>
+            </a:r>
+            <a:r>
+              <a:rPr sz="1300" b="0">
+                <a:solidFill>
+                  <a:srgbClr val="404041"/>
+                </a:solidFill>
+                <a:latin typeface="Open Sans"/>
+              </a:rPr>
+              <a:t>Packages the file and advocates for it</a:t>
             </a:r>
           </a:p>
           <a:p>
@@ -21075,7 +21803,7 @@
                 </a:solidFill>
                 <a:latin typeface="Open Sans"/>
               </a:rPr>
-              <a:t>The listing agent works for the </a:t>
+              <a:t>We don’t approve the loan — </a:t>
             </a:r>
             <a:r>
               <a:rPr sz="1300" b="1">
@@ -21084,16 +21812,7 @@
                 </a:solidFill>
                 <a:latin typeface="Open Sans"/>
               </a:rPr>
-              <a:t>seller</a:t>
-            </a:r>
-            <a:r>
-              <a:rPr sz="1300" b="0">
-                <a:solidFill>
-                  <a:srgbClr val="0C3335"/>
-                </a:solidFill>
-                <a:latin typeface="Open Sans"/>
-              </a:rPr>
-              <a:t>. Yours works for you — ask how they’re paid.</a:t>
+              <a:t>the underwriter does.</a:t>
             </a:r>
           </a:p>
         </p:txBody>
@@ -21272,7 +21991,7 @@
                 </a:solidFill>
                 <a:latin typeface="Montserrat"/>
               </a:rPr>
-              <a:t>Seller</a:t>
+              <a:t>Realtor</a:t>
             </a:r>
           </a:p>
         </p:txBody>
@@ -21379,35 +22098,7 @@
                 </a:solidFill>
                 <a:latin typeface="Open Sans"/>
               </a:rPr>
-              <a:t>Owns the home; their motivation shapes what’s negotiable</a:t>
-            </a:r>
-          </a:p>
-          <a:p>
-            <a:pPr algn="l">
-              <a:spcBef>
-                <a:spcPts val="0"/>
-              </a:spcBef>
-              <a:spcAft>
-                <a:spcPts val="800"/>
-              </a:spcAft>
-            </a:pPr>
-            <a:r>
-              <a:rPr sz="1300">
-                <a:solidFill>
-                  <a:srgbClr val="8CC63E"/>
-                </a:solidFill>
-                <a:latin typeface="Open Sans"/>
-              </a:rPr>
-              <a:t>■  </a:t>
-            </a:r>
-            <a:r>
-              <a:rPr sz="1300" b="0">
-                <a:solidFill>
-                  <a:srgbClr val="404041"/>
-                </a:solidFill>
-                <a:latin typeface="Open Sans"/>
-              </a:rPr>
-              <a:t>You almost never deal with them directly — it runs through agents</a:t>
+              <a:t>Finds homes, writes and negotiates your offer, manages deadlines</a:t>
             </a:r>
           </a:p>
           <a:p>
@@ -21429,7 +22120,7 @@
                 </a:solidFill>
                 <a:latin typeface="Open Sans"/>
               </a:rPr>
-              <a:t>Sometimes </a:t>
+              <a:t>The listing agent works for the </a:t>
             </a:r>
             <a:r>
               <a:rPr sz="1300" b="1">
@@ -21438,7 +22129,7 @@
                 </a:solidFill>
                 <a:latin typeface="Open Sans"/>
               </a:rPr>
-              <a:t>timing or certainty</a:t>
+              <a:t>seller</a:t>
             </a:r>
             <a:r>
               <a:rPr sz="1300" b="0">
@@ -21447,7 +22138,7 @@
                 </a:solidFill>
                 <a:latin typeface="Open Sans"/>
               </a:rPr>
-              <a:t> matters to them more than top price.</a:t>
+              <a:t>. Yours works for you — ask how they’re paid.</a:t>
             </a:r>
           </a:p>
         </p:txBody>
@@ -21626,7 +22317,7 @@
                 </a:solidFill>
                 <a:latin typeface="Montserrat"/>
               </a:rPr>
-              <a:t>Underwriter</a:t>
+              <a:t>Seller</a:t>
             </a:r>
           </a:p>
         </p:txBody>
@@ -21733,7 +22424,7 @@
                 </a:solidFill>
                 <a:latin typeface="Open Sans"/>
               </a:rPr>
-              <a:t>Makes the actual decision against program guidelines</a:t>
+              <a:t>Owns the home; their motivation shapes what’s negotiable</a:t>
             </a:r>
           </a:p>
           <a:p>
@@ -21761,16 +22452,7 @@
                 </a:solidFill>
                 <a:latin typeface="Open Sans"/>
               </a:rPr>
-              <a:t>You’ll </a:t>
-            </a:r>
-            <a:r>
-              <a:rPr sz="1300" b="1">
-                <a:solidFill>
-                  <a:srgbClr val="404041"/>
-                </a:solidFill>
-                <a:latin typeface="Open Sans"/>
-              </a:rPr>
-              <a:t>never deal with them directly</a:t>
+              <a:t>You almost never deal with them directly — it runs through agents</a:t>
             </a:r>
           </a:p>
           <a:p>
@@ -21792,7 +22474,25 @@
                 </a:solidFill>
                 <a:latin typeface="Open Sans"/>
               </a:rPr>
-              <a:t>Not looking for a reason to say no — documenting a reason to say yes.</a:t>
+              <a:t>Sometimes </a:t>
+            </a:r>
+            <a:r>
+              <a:rPr sz="1300" b="1">
+                <a:solidFill>
+                  <a:srgbClr val="0C3335"/>
+                </a:solidFill>
+                <a:latin typeface="Open Sans"/>
+              </a:rPr>
+              <a:t>timing or certainty</a:t>
+            </a:r>
+            <a:r>
+              <a:rPr sz="1300" b="0">
+                <a:solidFill>
+                  <a:srgbClr val="0C3335"/>
+                </a:solidFill>
+                <a:latin typeface="Open Sans"/>
+              </a:rPr>
+              <a:t> matters to them more than top price.</a:t>
             </a:r>
           </a:p>
         </p:txBody>
@@ -21971,7 +22671,7 @@
                 </a:solidFill>
                 <a:latin typeface="Montserrat"/>
               </a:rPr>
-              <a:t>Title Company</a:t>
+              <a:t>Underwriter</a:t>
             </a:r>
           </a:p>
         </p:txBody>
@@ -22078,7 +22778,7 @@
                 </a:solidFill>
                 <a:latin typeface="Open Sans"/>
               </a:rPr>
-              <a:t>Researches ownership, clears liens, issues title insurance, holds funds</a:t>
+              <a:t>Makes the actual decision against program guidelines</a:t>
             </a:r>
           </a:p>
           <a:p>
@@ -22106,7 +22806,16 @@
                 </a:solidFill>
                 <a:latin typeface="Open Sans"/>
               </a:rPr>
-              <a:t>Neutral to both sides</a:t>
+              <a:t>You’ll </a:t>
+            </a:r>
+            <a:r>
+              <a:rPr sz="1300" b="1">
+                <a:solidFill>
+                  <a:srgbClr val="404041"/>
+                </a:solidFill>
+                <a:latin typeface="Open Sans"/>
+              </a:rPr>
+              <a:t>never deal with them directly</a:t>
             </a:r>
           </a:p>
           <a:p>
@@ -22128,25 +22837,7 @@
                 </a:solidFill>
                 <a:latin typeface="Open Sans"/>
               </a:rPr>
-              <a:t>You can often </a:t>
-            </a:r>
-            <a:r>
-              <a:rPr sz="1300" b="1">
-                <a:solidFill>
-                  <a:srgbClr val="0C3335"/>
-                </a:solidFill>
-                <a:latin typeface="Open Sans"/>
-              </a:rPr>
-              <a:t>shop</a:t>
-            </a:r>
-            <a:r>
-              <a:rPr sz="1300" b="0">
-                <a:solidFill>
-                  <a:srgbClr val="0C3335"/>
-                </a:solidFill>
-                <a:latin typeface="Open Sans"/>
-              </a:rPr>
-              <a:t> for them — most people never do.</a:t>
+              <a:t>Not looking for a reason to say no — documenting a reason to say yes.</a:t>
             </a:r>
           </a:p>
         </p:txBody>
@@ -22325,7 +23016,7 @@
                 </a:solidFill>
                 <a:latin typeface="Montserrat"/>
               </a:rPr>
-              <a:t>Closer</a:t>
+              <a:t>Title Company</a:t>
             </a:r>
           </a:p>
         </p:txBody>
@@ -22432,7 +23123,35 @@
                 </a:solidFill>
                 <a:latin typeface="Open Sans"/>
               </a:rPr>
-              <a:t>Runs the signing, walks you through documents, moves the funds</a:t>
+              <a:t>Researches ownership, clears liens, issues title insurance, holds funds</a:t>
+            </a:r>
+          </a:p>
+          <a:p>
+            <a:pPr algn="l">
+              <a:spcBef>
+                <a:spcPts val="0"/>
+              </a:spcBef>
+              <a:spcAft>
+                <a:spcPts val="800"/>
+              </a:spcAft>
+            </a:pPr>
+            <a:r>
+              <a:rPr sz="1300">
+                <a:solidFill>
+                  <a:srgbClr val="8CC63E"/>
+                </a:solidFill>
+                <a:latin typeface="Open Sans"/>
+              </a:rPr>
+              <a:t>■  </a:t>
+            </a:r>
+            <a:r>
+              <a:rPr sz="1300" b="0">
+                <a:solidFill>
+                  <a:srgbClr val="404041"/>
+                </a:solidFill>
+                <a:latin typeface="Open Sans"/>
+              </a:rPr>
+              <a:t>Neutral to both sides</a:t>
             </a:r>
           </a:p>
           <a:p>
@@ -22454,7 +23173,25 @@
                 </a:solidFill>
                 <a:latin typeface="Open Sans"/>
               </a:rPr>
-              <a:t>Budget an hour. Read what you sign and ask about anything unclear.</a:t>
+              <a:t>You can often </a:t>
+            </a:r>
+            <a:r>
+              <a:rPr sz="1300" b="1">
+                <a:solidFill>
+                  <a:srgbClr val="0C3335"/>
+                </a:solidFill>
+                <a:latin typeface="Open Sans"/>
+              </a:rPr>
+              <a:t>shop</a:t>
+            </a:r>
+            <a:r>
+              <a:rPr sz="1300" b="0">
+                <a:solidFill>
+                  <a:srgbClr val="0C3335"/>
+                </a:solidFill>
+                <a:latin typeface="Open Sans"/>
+              </a:rPr>
+              <a:t> for them — most people never do.</a:t>
             </a:r>
           </a:p>
         </p:txBody>
@@ -23111,7 +23848,7 @@
                 </a:solidFill>
                 <a:latin typeface="Montserrat"/>
               </a:rPr>
-              <a:t>Insurance Agent</a:t>
+              <a:t>Closer</a:t>
             </a:r>
           </a:p>
         </p:txBody>
@@ -23218,7 +23955,7 @@
                 </a:solidFill>
                 <a:latin typeface="Open Sans"/>
               </a:rPr>
-              <a:t>Places your homeowners policy, required before closing</a:t>
+              <a:t>Runs the signing, walks you through documents, moves the funds</a:t>
             </a:r>
           </a:p>
           <a:p>
@@ -23234,22 +23971,13 @@
               <a:t>  </a:t>
             </a:r>
             <a:r>
-              <a:rPr sz="1300" b="1">
+              <a:rPr sz="1300" b="0">
                 <a:solidFill>
                   <a:srgbClr val="0C3335"/>
                 </a:solidFill>
                 <a:latin typeface="Open Sans"/>
               </a:rPr>
-              <a:t>Start early.</a:t>
-            </a:r>
-            <a:r>
-              <a:rPr sz="1300" b="0">
-                <a:solidFill>
-                  <a:srgbClr val="0C3335"/>
-                </a:solidFill>
-                <a:latin typeface="Open Sans"/>
-              </a:rPr>
-              <a:t> Premiums vary widely and a high one can affect qualifying.</a:t>
+              <a:t>Budget an hour. Read what you sign and ask about anything unclear.</a:t>
             </a:r>
           </a:p>
         </p:txBody>
@@ -23428,7 +24156,7 @@
                 </a:solidFill>
                 <a:latin typeface="Montserrat"/>
               </a:rPr>
-              <a:t>Processor</a:t>
+              <a:t>Insurance Agent</a:t>
             </a:r>
           </a:p>
         </p:txBody>
@@ -23535,7 +24263,7 @@
                 </a:solidFill>
                 <a:latin typeface="Open Sans"/>
               </a:rPr>
-              <a:t>Collects your documents, orders appraisal and title, preps the file</a:t>
+              <a:t>Places your homeowners policy, required before closing</a:t>
             </a:r>
           </a:p>
           <a:p>
@@ -23551,22 +24279,22 @@
               <a:t>  </a:t>
             </a:r>
             <a:r>
+              <a:rPr sz="1300" b="1">
+                <a:solidFill>
+                  <a:srgbClr val="0C3335"/>
+                </a:solidFill>
+                <a:latin typeface="Open Sans"/>
+              </a:rPr>
+              <a:t>Start early.</a:t>
+            </a:r>
+            <a:r>
               <a:rPr sz="1300" b="0">
                 <a:solidFill>
                   <a:srgbClr val="0C3335"/>
                 </a:solidFill>
                 <a:latin typeface="Open Sans"/>
               </a:rPr>
-              <a:t>Being asked twice isn’t a lost document — </a:t>
-            </a:r>
-            <a:r>
-              <a:rPr sz="1300" b="1">
-                <a:solidFill>
-                  <a:srgbClr val="0C3335"/>
-                </a:solidFill>
-                <a:latin typeface="Open Sans"/>
-              </a:rPr>
-              <a:t>send it again same-day.</a:t>
+              <a:t> Premiums vary widely and a high one can affect qualifying.</a:t>
             </a:r>
           </a:p>
         </p:txBody>
@@ -23726,7 +24454,7 @@
                 </a:solidFill>
                 <a:latin typeface="Montserrat"/>
               </a:rPr>
-              <a:t>SMALL ASSUMPTION</a:t>
+              <a:t>YOUR TEAM</a:t>
             </a:r>
           </a:p>
           <a:p>
@@ -23739,13 +24467,13 @@
               </a:spcAft>
             </a:pPr>
             <a:r>
-              <a:rPr sz="2000" b="1">
+              <a:rPr sz="2500" b="1">
                 <a:solidFill>
                   <a:srgbClr val="FFFFFF"/>
                 </a:solidFill>
                 <a:latin typeface="Montserrat"/>
               </a:rPr>
-              <a:t>"I’ll get pre-approved once I find a house"</a:t>
+              <a:t>Processor</a:t>
             </a:r>
           </a:p>
         </p:txBody>
@@ -23824,7 +24552,7 @@
                 </a:solidFill>
                 <a:latin typeface="Montserrat"/>
               </a:rPr>
-              <a:t>What actually happens</a:t>
+              <a:t>What they do</a:t>
             </a:r>
           </a:p>
           <a:p>
@@ -23852,72 +24580,38 @@
                 </a:solidFill>
                 <a:latin typeface="Open Sans"/>
               </a:rPr>
-              <a:t>The house goes under contract while you’re getting a letter</a:t>
+              <a:t>Collects your documents, orders appraisal and title, preps the file</a:t>
             </a:r>
           </a:p>
           <a:p>
             <a:pPr algn="l">
               <a:spcBef>
-                <a:spcPts val="1800"/>
-              </a:spcBef>
-              <a:spcAft>
-                <a:spcPts val="1000"/>
-              </a:spcAft>
-            </a:pPr>
-            <a:r>
-              <a:rPr sz="1100" b="1">
-                <a:solidFill>
-                  <a:srgbClr val="4B7B4D"/>
-                </a:solidFill>
-                <a:latin typeface="Montserrat"/>
-              </a:rPr>
-              <a:t>+  Do instead</a:t>
-            </a:r>
-          </a:p>
-          <a:p>
-            <a:pPr algn="l">
-              <a:spcBef>
-                <a:spcPts val="0"/>
+                <a:spcPts val="1400"/>
               </a:spcBef>
               <a:spcAft>
                 <a:spcPts val="800"/>
               </a:spcAft>
             </a:pPr>
             <a:r>
-              <a:rPr sz="1300">
-                <a:solidFill>
-                  <a:srgbClr val="4B7B4D"/>
-                </a:solidFill>
-                <a:latin typeface="Open Sans"/>
-              </a:rPr>
-              <a:t>■  </a:t>
+              <a:t>  </a:t>
             </a:r>
             <a:r>
               <a:rPr sz="1300" b="0">
                 <a:solidFill>
-                  <a:srgbClr val="404041"/>
-                </a:solidFill>
-                <a:latin typeface="Open Sans"/>
-              </a:rPr>
-              <a:t>Pre-approval </a:t>
+                  <a:srgbClr val="0C3335"/>
+                </a:solidFill>
+                <a:latin typeface="Open Sans"/>
+              </a:rPr>
+              <a:t>Being asked twice isn’t a lost document — </a:t>
             </a:r>
             <a:r>
               <a:rPr sz="1300" b="1">
                 <a:solidFill>
-                  <a:srgbClr val="404041"/>
-                </a:solidFill>
-                <a:latin typeface="Open Sans"/>
-              </a:rPr>
-              <a:t>first</a:t>
-            </a:r>
-            <a:r>
-              <a:rPr sz="1300" b="0">
-                <a:solidFill>
-                  <a:srgbClr val="404041"/>
-                </a:solidFill>
-                <a:latin typeface="Open Sans"/>
-              </a:rPr>
-              <a:t> — it’s free and nothing is committed</a:t>
+                  <a:srgbClr val="0C3335"/>
+                </a:solidFill>
+                <a:latin typeface="Open Sans"/>
+              </a:rPr>
+              <a:t>send it again same-day.</a:t>
             </a:r>
           </a:p>
         </p:txBody>
@@ -24096,7 +24790,7 @@
                 </a:solidFill>
                 <a:latin typeface="Montserrat"/>
               </a:rPr>
-              <a:t>"They’re all the same, I’ll use one lender"</a:t>
+              <a:t>"I’ll get pre-approved once I find a house"</a:t>
             </a:r>
           </a:p>
         </p:txBody>
@@ -24203,7 +24897,7 @@
                 </a:solidFill>
                 <a:latin typeface="Open Sans"/>
               </a:rPr>
-              <a:t>Lender fees vary by thousands at the identical rate</a:t>
+              <a:t>The house goes under contract while you’re getting a letter</a:t>
             </a:r>
           </a:p>
           <a:p>
@@ -24250,7 +24944,7 @@
                 </a:solidFill>
                 <a:latin typeface="Open Sans"/>
               </a:rPr>
-              <a:t>Get more than one Loan Estimate the </a:t>
+              <a:t>Pre-approval </a:t>
             </a:r>
             <a:r>
               <a:rPr sz="1300" b="1">
@@ -24259,7 +24953,7 @@
                 </a:solidFill>
                 <a:latin typeface="Open Sans"/>
               </a:rPr>
-              <a:t>same day</a:t>
+              <a:t>first</a:t>
             </a:r>
             <a:r>
               <a:rPr sz="1300" b="0">
@@ -24268,35 +24962,7 @@
                 </a:solidFill>
                 <a:latin typeface="Open Sans"/>
               </a:rPr>
-              <a:t> and compare fees</a:t>
-            </a:r>
-          </a:p>
-          <a:p>
-            <a:pPr algn="l">
-              <a:spcBef>
-                <a:spcPts val="0"/>
-              </a:spcBef>
-              <a:spcAft>
-                <a:spcPts val="800"/>
-              </a:spcAft>
-            </a:pPr>
-            <a:r>
-              <a:rPr sz="1300">
-                <a:solidFill>
-                  <a:srgbClr val="4B7B4D"/>
-                </a:solidFill>
-                <a:latin typeface="Open Sans"/>
-              </a:rPr>
-              <a:t>■  </a:t>
-            </a:r>
-            <a:r>
-              <a:rPr sz="1300" b="0">
-                <a:solidFill>
-                  <a:srgbClr val="404041"/>
-                </a:solidFill>
-                <a:latin typeface="Open Sans"/>
-              </a:rPr>
-              <a:t>Shopping inside the window counts as one credit pull</a:t>
+              <a:t> — it’s free and nothing is committed</a:t>
             </a:r>
           </a:p>
         </p:txBody>
@@ -24475,7 +25141,7 @@
                 </a:solidFill>
                 <a:latin typeface="Montserrat"/>
               </a:rPr>
-              <a:t>"Closing costs are what I need at closing"</a:t>
+              <a:t>"They’re all the same, I’ll use one lender"</a:t>
             </a:r>
           </a:p>
         </p:txBody>
@@ -24582,7 +25248,7 @@
                 </a:solidFill>
                 <a:latin typeface="Open Sans"/>
               </a:rPr>
-              <a:t>You arrive short — cash to close also has down payment, prepaids, escrows, reserves</a:t>
+              <a:t>Lender fees vary by thousands at the identical rate</a:t>
             </a:r>
           </a:p>
           <a:p>
@@ -24629,7 +25295,7 @@
                 </a:solidFill>
                 <a:latin typeface="Open Sans"/>
               </a:rPr>
-              <a:t>Plan around </a:t>
+              <a:t>Get more than one Loan Estimate the </a:t>
             </a:r>
             <a:r>
               <a:rPr sz="1300" b="1">
@@ -24638,7 +25304,7 @@
                 </a:solidFill>
                 <a:latin typeface="Open Sans"/>
               </a:rPr>
-              <a:t>Cash to Close</a:t>
+              <a:t>same day</a:t>
             </a:r>
             <a:r>
               <a:rPr sz="1300" b="0">
@@ -24647,7 +25313,35 @@
                 </a:solidFill>
                 <a:latin typeface="Open Sans"/>
               </a:rPr>
-              <a:t> on page one, not closing costs</a:t>
+              <a:t> and compare fees</a:t>
+            </a:r>
+          </a:p>
+          <a:p>
+            <a:pPr algn="l">
+              <a:spcBef>
+                <a:spcPts val="0"/>
+              </a:spcBef>
+              <a:spcAft>
+                <a:spcPts val="800"/>
+              </a:spcAft>
+            </a:pPr>
+            <a:r>
+              <a:rPr sz="1300">
+                <a:solidFill>
+                  <a:srgbClr val="4B7B4D"/>
+                </a:solidFill>
+                <a:latin typeface="Open Sans"/>
+              </a:rPr>
+              <a:t>■  </a:t>
+            </a:r>
+            <a:r>
+              <a:rPr sz="1300" b="0">
+                <a:solidFill>
+                  <a:srgbClr val="404041"/>
+                </a:solidFill>
+                <a:latin typeface="Open Sans"/>
+              </a:rPr>
+              <a:t>Shopping inside the window counts as one credit pull</a:t>
             </a:r>
           </a:p>
         </p:txBody>
@@ -24820,13 +25514,13 @@
               </a:spcAft>
             </a:pPr>
             <a:r>
-              <a:rPr sz="2500" b="1">
+              <a:rPr sz="2000" b="1">
                 <a:solidFill>
                   <a:srgbClr val="FFFFFF"/>
                 </a:solidFill>
                 <a:latin typeface="Montserrat"/>
               </a:rPr>
-              <a:t>"I’m approved, so I’m done"</a:t>
+              <a:t>"Closing costs are what I need at closing"</a:t>
             </a:r>
           </a:p>
         </p:txBody>
@@ -24933,25 +25627,7 @@
                 </a:solidFill>
                 <a:latin typeface="Open Sans"/>
               </a:rPr>
-              <a:t>Lenders </a:t>
-            </a:r>
-            <a:r>
-              <a:rPr sz="1300" b="1">
-                <a:solidFill>
-                  <a:srgbClr val="404041"/>
-                </a:solidFill>
-                <a:latin typeface="Open Sans"/>
-              </a:rPr>
-              <a:t>re-pull credit before closing</a:t>
-            </a:r>
-            <a:r>
-              <a:rPr sz="1300" b="0">
-                <a:solidFill>
-                  <a:srgbClr val="404041"/>
-                </a:solidFill>
-                <a:latin typeface="Open Sans"/>
-              </a:rPr>
-              <a:t> — new debt can break the file</a:t>
+              <a:t>You arrive short — cash to close also has down payment, prepaids, escrows, reserves</a:t>
             </a:r>
           </a:p>
           <a:p>
@@ -24998,7 +25674,25 @@
                 </a:solidFill>
                 <a:latin typeface="Open Sans"/>
               </a:rPr>
-              <a:t>Change nothing until you have keys. If something must change, call first</a:t>
+              <a:t>Plan around </a:t>
+            </a:r>
+            <a:r>
+              <a:rPr sz="1300" b="1">
+                <a:solidFill>
+                  <a:srgbClr val="404041"/>
+                </a:solidFill>
+                <a:latin typeface="Open Sans"/>
+              </a:rPr>
+              <a:t>Cash to Close</a:t>
+            </a:r>
+            <a:r>
+              <a:rPr sz="1300" b="0">
+                <a:solidFill>
+                  <a:srgbClr val="404041"/>
+                </a:solidFill>
+                <a:latin typeface="Open Sans"/>
+              </a:rPr>
+              <a:t> on page one, not closing costs</a:t>
             </a:r>
           </a:p>
         </p:txBody>
@@ -25177,7 +25871,7 @@
                 </a:solidFill>
                 <a:latin typeface="Montserrat"/>
               </a:rPr>
-              <a:t>"I’ll wait until I have twenty percent"</a:t>
+              <a:t>"I’m approved, so I’m done"</a:t>
             </a:r>
           </a:p>
         </p:txBody>
@@ -25284,7 +25978,25 @@
                 </a:solidFill>
                 <a:latin typeface="Open Sans"/>
               </a:rPr>
-              <a:t>The target rises while you save — and you pay rent the whole time</a:t>
+              <a:t>Lenders </a:t>
+            </a:r>
+            <a:r>
+              <a:rPr sz="1300" b="1">
+                <a:solidFill>
+                  <a:srgbClr val="404041"/>
+                </a:solidFill>
+                <a:latin typeface="Open Sans"/>
+              </a:rPr>
+              <a:t>re-pull credit before closing</a:t>
+            </a:r>
+            <a:r>
+              <a:rPr sz="1300" b="0">
+                <a:solidFill>
+                  <a:srgbClr val="404041"/>
+                </a:solidFill>
+                <a:latin typeface="Open Sans"/>
+              </a:rPr>
+              <a:t> — new debt can break the file</a:t>
             </a:r>
           </a:p>
           <a:p>
@@ -25331,25 +26043,7 @@
                 </a:solidFill>
                 <a:latin typeface="Open Sans"/>
               </a:rPr>
-              <a:t>Run the comparison. Waiting should be a </a:t>
-            </a:r>
-            <a:r>
-              <a:rPr sz="1300" b="1">
-                <a:solidFill>
-                  <a:srgbClr val="404041"/>
-                </a:solidFill>
-                <a:latin typeface="Open Sans"/>
-              </a:rPr>
-              <a:t>decision</a:t>
-            </a:r>
-            <a:r>
-              <a:rPr sz="1300" b="0">
-                <a:solidFill>
-                  <a:srgbClr val="404041"/>
-                </a:solidFill>
-                <a:latin typeface="Open Sans"/>
-              </a:rPr>
-              <a:t>, not a default</a:t>
+              <a:t>Change nothing until you have keys. If something must change, call first</a:t>
             </a:r>
           </a:p>
         </p:txBody>
@@ -25528,6 +26222,357 @@
                 </a:solidFill>
                 <a:latin typeface="Montserrat"/>
               </a:rPr>
+              <a:t>"I’ll wait until I have twenty percent"</a:t>
+            </a:r>
+          </a:p>
+        </p:txBody>
+      </p:sp>
+      <p:sp>
+        <p:nvSpPr>
+          <p:cNvPr id="4" name="Rectangle 3"/>
+          <p:cNvSpPr/>
+          <p:nvPr/>
+        </p:nvSpPr>
+        <p:spPr>
+          <a:xfrm>
+            <a:off x="609584" y="1587460"/>
+            <a:ext cx="609584" cy="50798"/>
+          </a:xfrm>
+          <a:prstGeom prst="rect">
+            <a:avLst/>
+          </a:prstGeom>
+          <a:solidFill>
+            <a:srgbClr val="8CC63E"/>
+          </a:solidFill>
+          <a:ln>
+            <a:noFill/>
+          </a:ln>
+          <a:effectLst/>
+        </p:spPr>
+        <p:style>
+          <a:lnRef idx="1">
+            <a:schemeClr val="accent1"/>
+          </a:lnRef>
+          <a:fillRef idx="3">
+            <a:schemeClr val="accent1"/>
+          </a:fillRef>
+          <a:effectRef idx="2">
+            <a:schemeClr val="accent1"/>
+          </a:effectRef>
+          <a:fontRef idx="minor">
+            <a:schemeClr val="lt1"/>
+          </a:fontRef>
+        </p:style>
+        <p:txBody>
+          <a:bodyPr rtlCol="0" anchor="ctr"/>
+          <a:lstStyle/>
+          <a:p>
+            <a:pPr algn="ctr"/>
+          </a:p>
+        </p:txBody>
+      </p:sp>
+      <p:sp>
+        <p:nvSpPr>
+          <p:cNvPr id="5" name="TextBox 4"/>
+          <p:cNvSpPr txBox="1"/>
+          <p:nvPr/>
+        </p:nvSpPr>
+        <p:spPr>
+          <a:xfrm>
+            <a:off x="609584" y="2285942"/>
+            <a:ext cx="10972527" cy="4444888"/>
+          </a:xfrm>
+          <a:prstGeom prst="rect">
+            <a:avLst/>
+          </a:prstGeom>
+          <a:noFill/>
+        </p:spPr>
+        <p:txBody>
+          <a:bodyPr wrap="square" anchor="t" lIns="0" rIns="0" tIns="0" bIns="0">
+            <a:spAutoFit/>
+          </a:bodyPr>
+          <a:lstStyle/>
+          <a:p>
+            <a:pPr algn="l"/>
+            <a:r>
+              <a:rPr sz="1100" b="1">
+                <a:solidFill>
+                  <a:srgbClr val="0C3335"/>
+                </a:solidFill>
+                <a:latin typeface="Montserrat"/>
+              </a:rPr>
+              <a:t>What actually happens</a:t>
+            </a:r>
+          </a:p>
+          <a:p>
+            <a:pPr algn="l">
+              <a:spcBef>
+                <a:spcPts val="0"/>
+              </a:spcBef>
+              <a:spcAft>
+                <a:spcPts val="800"/>
+              </a:spcAft>
+            </a:pPr>
+            <a:r>
+              <a:rPr sz="1300">
+                <a:solidFill>
+                  <a:srgbClr val="8CC63E"/>
+                </a:solidFill>
+                <a:latin typeface="Open Sans"/>
+              </a:rPr>
+              <a:t>■  </a:t>
+            </a:r>
+            <a:r>
+              <a:rPr sz="1300" b="0">
+                <a:solidFill>
+                  <a:srgbClr val="404041"/>
+                </a:solidFill>
+                <a:latin typeface="Open Sans"/>
+              </a:rPr>
+              <a:t>The target rises while you save — and you pay rent the whole time</a:t>
+            </a:r>
+          </a:p>
+          <a:p>
+            <a:pPr algn="l">
+              <a:spcBef>
+                <a:spcPts val="1800"/>
+              </a:spcBef>
+              <a:spcAft>
+                <a:spcPts val="1000"/>
+              </a:spcAft>
+            </a:pPr>
+            <a:r>
+              <a:rPr sz="1100" b="1">
+                <a:solidFill>
+                  <a:srgbClr val="4B7B4D"/>
+                </a:solidFill>
+                <a:latin typeface="Montserrat"/>
+              </a:rPr>
+              <a:t>+  Do instead</a:t>
+            </a:r>
+          </a:p>
+          <a:p>
+            <a:pPr algn="l">
+              <a:spcBef>
+                <a:spcPts val="0"/>
+              </a:spcBef>
+              <a:spcAft>
+                <a:spcPts val="800"/>
+              </a:spcAft>
+            </a:pPr>
+            <a:r>
+              <a:rPr sz="1300">
+                <a:solidFill>
+                  <a:srgbClr val="4B7B4D"/>
+                </a:solidFill>
+                <a:latin typeface="Open Sans"/>
+              </a:rPr>
+              <a:t>■  </a:t>
+            </a:r>
+            <a:r>
+              <a:rPr sz="1300" b="0">
+                <a:solidFill>
+                  <a:srgbClr val="404041"/>
+                </a:solidFill>
+                <a:latin typeface="Open Sans"/>
+              </a:rPr>
+              <a:t>Run the comparison. Waiting should be a </a:t>
+            </a:r>
+            <a:r>
+              <a:rPr sz="1300" b="1">
+                <a:solidFill>
+                  <a:srgbClr val="404041"/>
+                </a:solidFill>
+                <a:latin typeface="Open Sans"/>
+              </a:rPr>
+              <a:t>decision</a:t>
+            </a:r>
+            <a:r>
+              <a:rPr sz="1300" b="0">
+                <a:solidFill>
+                  <a:srgbClr val="404041"/>
+                </a:solidFill>
+                <a:latin typeface="Open Sans"/>
+              </a:rPr>
+              <a:t>, not a default</a:t>
+            </a:r>
+          </a:p>
+        </p:txBody>
+      </p:sp>
+      <p:sp>
+        <p:nvSpPr>
+          <p:cNvPr id="6" name="Rectangle 5">
+            <a:hlinkClick action="ppaction://hlinksldjump" r:id="rId2"/>
+          </p:cNvPr>
+          <p:cNvSpPr/>
+          <p:nvPr/>
+        </p:nvSpPr>
+        <p:spPr>
+          <a:xfrm>
+            <a:off x="609584" y="6096020"/>
+            <a:ext cx="1523961" cy="457188"/>
+          </a:xfrm>
+          <a:prstGeom prst="rect">
+            <a:avLst/>
+          </a:prstGeom>
+          <a:solidFill>
+            <a:srgbClr val="0C3335"/>
+          </a:solidFill>
+          <a:ln>
+            <a:noFill/>
+          </a:ln>
+          <a:effectLst/>
+        </p:spPr>
+        <p:style>
+          <a:lnRef idx="1">
+            <a:schemeClr val="accent1"/>
+          </a:lnRef>
+          <a:fillRef idx="3">
+            <a:schemeClr val="accent1"/>
+          </a:fillRef>
+          <a:effectRef idx="2">
+            <a:schemeClr val="accent1"/>
+          </a:effectRef>
+          <a:fontRef idx="minor">
+            <a:schemeClr val="lt1"/>
+          </a:fontRef>
+        </p:style>
+        <p:txBody>
+          <a:bodyPr rtlCol="0" anchor="ctr"/>
+          <a:lstStyle/>
+          <a:p>
+            <a:pPr algn="ctr"/>
+            <a:r>
+              <a:rPr sz="1200" b="1">
+                <a:solidFill>
+                  <a:srgbClr val="FFFFFF"/>
+                </a:solidFill>
+                <a:latin typeface="Montserrat"/>
+              </a:rPr>
+              <a:t>‹  Back</a:t>
+            </a:r>
+          </a:p>
+        </p:txBody>
+      </p:sp>
+    </p:spTree>
+  </p:cSld>
+  <p:clrMapOvr>
+    <a:masterClrMapping/>
+  </p:clrMapOvr>
+</p:sld>
+</file>
+
+<file path=ppt/slides/slide48.xml><?xml version="1.0" encoding="utf-8"?>
+<p:sld xmlns:a="http://schemas.openxmlformats.org/drawingml/2006/main" xmlns:p="http://schemas.openxmlformats.org/presentationml/2006/main" xmlns:r="http://schemas.openxmlformats.org/officeDocument/2006/relationships">
+  <p:cSld>
+    <p:bg>
+      <p:bgPr>
+        <a:solidFill>
+          <a:srgbClr val="FFFFFF"/>
+        </a:solidFill>
+        <a:effectLst/>
+      </p:bgPr>
+    </p:bg>
+    <p:spTree>
+      <p:nvGrpSpPr>
+        <p:cNvPr id="1" name=""/>
+        <p:cNvGrpSpPr/>
+        <p:nvPr/>
+      </p:nvGrpSpPr>
+      <p:grpSpPr/>
+      <p:sp>
+        <p:nvSpPr>
+          <p:cNvPr id="2" name="Rectangle 1"/>
+          <p:cNvSpPr/>
+          <p:nvPr/>
+        </p:nvSpPr>
+        <p:spPr>
+          <a:xfrm>
+            <a:off x="0" y="0"/>
+            <a:ext cx="12191695" cy="1904952"/>
+          </a:xfrm>
+          <a:prstGeom prst="rect">
+            <a:avLst/>
+          </a:prstGeom>
+          <a:solidFill>
+            <a:srgbClr val="0C3335"/>
+          </a:solidFill>
+          <a:ln>
+            <a:noFill/>
+          </a:ln>
+          <a:effectLst/>
+        </p:spPr>
+        <p:style>
+          <a:lnRef idx="1">
+            <a:schemeClr val="accent1"/>
+          </a:lnRef>
+          <a:fillRef idx="3">
+            <a:schemeClr val="accent1"/>
+          </a:fillRef>
+          <a:effectRef idx="2">
+            <a:schemeClr val="accent1"/>
+          </a:effectRef>
+          <a:fontRef idx="minor">
+            <a:schemeClr val="lt1"/>
+          </a:fontRef>
+        </p:style>
+        <p:txBody>
+          <a:bodyPr rtlCol="0" anchor="ctr"/>
+          <a:lstStyle/>
+          <a:p>
+            <a:pPr algn="ctr"/>
+          </a:p>
+        </p:txBody>
+      </p:sp>
+      <p:sp>
+        <p:nvSpPr>
+          <p:cNvPr id="3" name="TextBox 2"/>
+          <p:cNvSpPr txBox="1"/>
+          <p:nvPr/>
+        </p:nvSpPr>
+        <p:spPr>
+          <a:xfrm>
+            <a:off x="609584" y="355591"/>
+            <a:ext cx="9702559" cy="1396965"/>
+          </a:xfrm>
+          <a:prstGeom prst="rect">
+            <a:avLst/>
+          </a:prstGeom>
+          <a:noFill/>
+        </p:spPr>
+        <p:txBody>
+          <a:bodyPr wrap="square" anchor="t" lIns="0" rIns="0" tIns="0" bIns="0">
+            <a:spAutoFit/>
+          </a:bodyPr>
+          <a:lstStyle/>
+          <a:p>
+            <a:pPr algn="l"/>
+            <a:r>
+              <a:rPr sz="1150" b="1">
+                <a:solidFill>
+                  <a:srgbClr val="8CC63E"/>
+                </a:solidFill>
+                <a:latin typeface="Montserrat"/>
+              </a:rPr>
+              <a:t>SMALL ASSUMPTION</a:t>
+            </a:r>
+          </a:p>
+          <a:p>
+            <a:pPr algn="l">
+              <a:spcBef>
+                <a:spcPts val="1000"/>
+              </a:spcBef>
+              <a:spcAft>
+                <a:spcPts val="0"/>
+              </a:spcAft>
+            </a:pPr>
+            <a:r>
+              <a:rPr sz="2500" b="1">
+                <a:solidFill>
+                  <a:srgbClr val="FFFFFF"/>
+                </a:solidFill>
+                <a:latin typeface="Montserrat"/>
+              </a:rPr>
               <a:t>"The builder’s incentive is free money"</a:t>
             </a:r>
           </a:p>
@@ -25811,7 +26856,7 @@
         </p:nvSpPr>
         <p:spPr>
           <a:xfrm>
-            <a:off x="609584" y="939775"/>
+            <a:off x="609584" y="863577"/>
             <a:ext cx="10972527" cy="1269968"/>
           </a:xfrm>
           <a:prstGeom prst="rect">
@@ -25827,7 +26872,7 @@
           <a:p>
             <a:pPr algn="l"/>
             <a:r>
-              <a:rPr sz="3600" b="1">
+              <a:rPr sz="2800" b="1">
                 <a:solidFill>
                   <a:srgbClr val="0C3335"/>
                 </a:solidFill>
@@ -25846,7 +26891,7 @@
         </p:nvSpPr>
         <p:spPr>
           <a:xfrm>
-            <a:off x="609584" y="1638257"/>
+            <a:off x="609584" y="1523961"/>
             <a:ext cx="609584" cy="50798"/>
           </a:xfrm>
           <a:prstGeom prst="rect">
@@ -25890,7 +26935,7 @@
         </p:nvSpPr>
         <p:spPr>
           <a:xfrm>
-            <a:off x="609584" y="1854151"/>
+            <a:off x="609584" y="1714456"/>
             <a:ext cx="8254793" cy="761980"/>
           </a:xfrm>
           <a:prstGeom prst="rect">
@@ -25925,8 +26970,8 @@
         </p:nvSpPr>
         <p:spPr>
           <a:xfrm>
-            <a:off x="609584" y="2616131"/>
-            <a:ext cx="2000199" cy="571485"/>
+            <a:off x="609584" y="2158945"/>
+            <a:ext cx="2106877" cy="457188"/>
           </a:xfrm>
           <a:prstGeom prst="rect">
             <a:avLst/>
@@ -25969,8 +27014,8 @@
         </p:nvSpPr>
         <p:spPr>
           <a:xfrm>
-            <a:off x="609584" y="3238414"/>
-            <a:ext cx="2000199" cy="317492"/>
+            <a:off x="609584" y="2654232"/>
+            <a:ext cx="2106877" cy="253993"/>
           </a:xfrm>
           <a:prstGeom prst="rect">
             <a:avLst/>
@@ -25985,7 +27030,7 @@
           <a:p>
             <a:pPr algn="ctr"/>
             <a:r>
-              <a:rPr sz="1000" b="1">
+              <a:rPr sz="950" b="1">
                 <a:solidFill>
                   <a:srgbClr val="404041"/>
                 </a:solidFill>
@@ -26004,8 +27049,8 @@
         </p:nvSpPr>
         <p:spPr>
           <a:xfrm>
-            <a:off x="2609783" y="2616131"/>
-            <a:ext cx="2857428" cy="571485"/>
+            <a:off x="2716461" y="2158945"/>
+            <a:ext cx="3009824" cy="457188"/>
           </a:xfrm>
           <a:prstGeom prst="rect">
             <a:avLst/>
@@ -26048,8 +27093,8 @@
         </p:nvSpPr>
         <p:spPr>
           <a:xfrm>
-            <a:off x="2609783" y="3238414"/>
-            <a:ext cx="2857428" cy="317492"/>
+            <a:off x="2716461" y="2654232"/>
+            <a:ext cx="3009824" cy="253993"/>
           </a:xfrm>
           <a:prstGeom prst="rect">
             <a:avLst/>
@@ -26064,7 +27109,7 @@
           <a:p>
             <a:pPr algn="ctr"/>
             <a:r>
-              <a:rPr sz="1000" b="1">
+              <a:rPr sz="950" b="1">
                 <a:solidFill>
                   <a:srgbClr val="404041"/>
                 </a:solidFill>
@@ -26083,8 +27128,8 @@
         </p:nvSpPr>
         <p:spPr>
           <a:xfrm>
-            <a:off x="5467212" y="2616131"/>
-            <a:ext cx="1619209" cy="571485"/>
+            <a:off x="5726285" y="2158945"/>
+            <a:ext cx="1705567" cy="457188"/>
           </a:xfrm>
           <a:prstGeom prst="rect">
             <a:avLst/>
@@ -26127,8 +27172,8 @@
         </p:nvSpPr>
         <p:spPr>
           <a:xfrm>
-            <a:off x="5467212" y="3238414"/>
-            <a:ext cx="1619209" cy="317492"/>
+            <a:off x="5726285" y="2654232"/>
+            <a:ext cx="1705567" cy="253993"/>
           </a:xfrm>
           <a:prstGeom prst="rect">
             <a:avLst/>
@@ -26143,7 +27188,7 @@
           <a:p>
             <a:pPr algn="ctr"/>
             <a:r>
-              <a:rPr sz="1000" b="1">
+              <a:rPr sz="950" b="1">
                 <a:solidFill>
                   <a:srgbClr val="404041"/>
                 </a:solidFill>
@@ -26162,8 +27207,8 @@
         </p:nvSpPr>
         <p:spPr>
           <a:xfrm>
-            <a:off x="7086421" y="2616131"/>
-            <a:ext cx="1142971" cy="571485"/>
+            <a:off x="7431853" y="2158945"/>
+            <a:ext cx="1203929" cy="457188"/>
           </a:xfrm>
           <a:prstGeom prst="rect">
             <a:avLst/>
@@ -26206,8 +27251,8 @@
         </p:nvSpPr>
         <p:spPr>
           <a:xfrm>
-            <a:off x="7086421" y="3238414"/>
-            <a:ext cx="1142971" cy="317492"/>
+            <a:off x="7431853" y="2654232"/>
+            <a:ext cx="1203929" cy="253993"/>
           </a:xfrm>
           <a:prstGeom prst="rect">
             <a:avLst/>
@@ -26222,7 +27267,7 @@
           <a:p>
             <a:pPr algn="ctr"/>
             <a:r>
-              <a:rPr sz="1000" b="1">
+              <a:rPr sz="950" b="1">
                 <a:solidFill>
                   <a:srgbClr val="404041"/>
                 </a:solidFill>
@@ -26241,8 +27286,8 @@
         </p:nvSpPr>
         <p:spPr>
           <a:xfrm>
-            <a:off x="8229392" y="2616131"/>
-            <a:ext cx="1047723" cy="571485"/>
+            <a:off x="8635783" y="2158945"/>
+            <a:ext cx="1103602" cy="457188"/>
           </a:xfrm>
           <a:prstGeom prst="rect">
             <a:avLst/>
@@ -26285,8 +27330,8 @@
         </p:nvSpPr>
         <p:spPr>
           <a:xfrm>
-            <a:off x="8229392" y="3238414"/>
-            <a:ext cx="1047723" cy="317492"/>
+            <a:off x="8635783" y="2654232"/>
+            <a:ext cx="1103602" cy="253993"/>
           </a:xfrm>
           <a:prstGeom prst="rect">
             <a:avLst/>
@@ -26301,7 +27346,7 @@
           <a:p>
             <a:pPr algn="ctr"/>
             <a:r>
-              <a:rPr sz="1000" b="1">
+              <a:rPr sz="950" b="1">
                 <a:solidFill>
                   <a:srgbClr val="404041"/>
                 </a:solidFill>
@@ -26320,8 +27365,8 @@
         </p:nvSpPr>
         <p:spPr>
           <a:xfrm>
-            <a:off x="9277116" y="2616131"/>
-            <a:ext cx="857228" cy="571485"/>
+            <a:off x="9739385" y="2158945"/>
+            <a:ext cx="902947" cy="457188"/>
           </a:xfrm>
           <a:prstGeom prst="rect">
             <a:avLst/>
@@ -26364,8 +27409,8 @@
         </p:nvSpPr>
         <p:spPr>
           <a:xfrm>
-            <a:off x="9277116" y="3238414"/>
-            <a:ext cx="857228" cy="317492"/>
+            <a:off x="9739385" y="2654232"/>
+            <a:ext cx="902947" cy="253993"/>
           </a:xfrm>
           <a:prstGeom prst="rect">
             <a:avLst/>
@@ -26380,7 +27425,7 @@
           <a:p>
             <a:pPr algn="ctr"/>
             <a:r>
-              <a:rPr sz="1000" b="1">
+              <a:rPr sz="950" b="1">
                 <a:solidFill>
                   <a:srgbClr val="404041"/>
                 </a:solidFill>
@@ -26399,8 +27444,8 @@
         </p:nvSpPr>
         <p:spPr>
           <a:xfrm>
-            <a:off x="609584" y="3759101"/>
-            <a:ext cx="4571885" cy="317492"/>
+            <a:off x="609584" y="3035222"/>
+            <a:ext cx="4698882" cy="292092"/>
           </a:xfrm>
           <a:prstGeom prst="rect">
             <a:avLst/>
@@ -26415,7 +27460,7 @@
           <a:p>
             <a:pPr algn="l"/>
             <a:r>
-              <a:rPr sz="1300" b="1">
+              <a:rPr sz="1200" b="1">
                 <a:solidFill>
                   <a:srgbClr val="0C3335"/>
                 </a:solidFill>
@@ -26434,8 +27479,8 @@
         </p:nvSpPr>
         <p:spPr>
           <a:xfrm>
-            <a:off x="609584" y="4076593"/>
-            <a:ext cx="4571885" cy="28575"/>
+            <a:off x="609584" y="3314615"/>
+            <a:ext cx="4698882" cy="28575"/>
           </a:xfrm>
           <a:prstGeom prst="rect">
             <a:avLst/>
@@ -26478,8 +27523,8 @@
         </p:nvSpPr>
         <p:spPr>
           <a:xfrm>
-            <a:off x="609584" y="4216289"/>
-            <a:ext cx="4571885" cy="1587460"/>
+            <a:off x="609584" y="3416212"/>
+            <a:ext cx="4698882" cy="1269968"/>
           </a:xfrm>
           <a:prstGeom prst="rect">
             <a:avLst/>
@@ -26493,7 +27538,7 @@
           <a:lstStyle/>
           <a:p>
             <a:r>
-              <a:rPr sz="1200">
+              <a:rPr sz="1100">
                 <a:solidFill>
                   <a:srgbClr val="8CC63E"/>
                 </a:solidFill>
@@ -26502,7 +27547,7 @@
               <a:t>■  </a:t>
             </a:r>
             <a:r>
-              <a:rPr sz="1200" b="0">
+              <a:rPr sz="1100" b="0">
                 <a:solidFill>
                   <a:srgbClr val="404041"/>
                 </a:solidFill>
@@ -26517,11 +27562,11 @@
                 <a:spcPts val="0"/>
               </a:spcBef>
               <a:spcAft>
-                <a:spcPts val="800"/>
+                <a:spcPts val="500"/>
               </a:spcAft>
             </a:pPr>
             <a:r>
-              <a:rPr sz="1200">
+              <a:rPr sz="1100">
                 <a:solidFill>
                   <a:srgbClr val="8CC63E"/>
                 </a:solidFill>
@@ -26530,7 +27575,7 @@
               <a:t>■  </a:t>
             </a:r>
             <a:r>
-              <a:rPr sz="1200" b="0">
+              <a:rPr sz="1100" b="0">
                 <a:solidFill>
                   <a:srgbClr val="404041"/>
                 </a:solidFill>
@@ -26545,11 +27590,11 @@
                 <a:spcPts val="0"/>
               </a:spcBef>
               <a:spcAft>
-                <a:spcPts val="800"/>
+                <a:spcPts val="500"/>
               </a:spcAft>
             </a:pPr>
             <a:r>
-              <a:rPr sz="1200">
+              <a:rPr sz="1100">
                 <a:solidFill>
                   <a:srgbClr val="8CC63E"/>
                 </a:solidFill>
@@ -26558,7 +27603,7 @@
               <a:t>■  </a:t>
             </a:r>
             <a:r>
-              <a:rPr sz="1200" b="0">
+              <a:rPr sz="1100" b="0">
                 <a:solidFill>
                   <a:srgbClr val="404041"/>
                 </a:solidFill>
@@ -26577,8 +27622,8 @@
         </p:nvSpPr>
         <p:spPr>
           <a:xfrm>
-            <a:off x="5562459" y="3759101"/>
-            <a:ext cx="4571885" cy="317492"/>
+            <a:off x="5689456" y="3035222"/>
+            <a:ext cx="4698882" cy="292092"/>
           </a:xfrm>
           <a:prstGeom prst="rect">
             <a:avLst/>
@@ -26593,7 +27638,7 @@
           <a:p>
             <a:pPr algn="l"/>
             <a:r>
-              <a:rPr sz="1300" b="1">
+              <a:rPr sz="1200" b="1">
                 <a:solidFill>
                   <a:srgbClr val="0C3335"/>
                 </a:solidFill>
@@ -26612,8 +27657,8 @@
         </p:nvSpPr>
         <p:spPr>
           <a:xfrm>
-            <a:off x="5562459" y="4076593"/>
-            <a:ext cx="4571885" cy="28575"/>
+            <a:off x="5689456" y="3314615"/>
+            <a:ext cx="4698882" cy="28575"/>
           </a:xfrm>
           <a:prstGeom prst="rect">
             <a:avLst/>
@@ -26656,8 +27701,8 @@
         </p:nvSpPr>
         <p:spPr>
           <a:xfrm>
-            <a:off x="5562459" y="4216289"/>
-            <a:ext cx="4571885" cy="1587460"/>
+            <a:off x="5689456" y="3416212"/>
+            <a:ext cx="4698882" cy="1269968"/>
           </a:xfrm>
           <a:prstGeom prst="rect">
             <a:avLst/>
@@ -26671,7 +27716,7 @@
           <a:lstStyle/>
           <a:p>
             <a:r>
-              <a:rPr sz="1200">
+              <a:rPr sz="1100">
                 <a:solidFill>
                   <a:srgbClr val="8CC63E"/>
                 </a:solidFill>
@@ -26680,7 +27725,7 @@
               <a:t>■  </a:t>
             </a:r>
             <a:r>
-              <a:rPr sz="1200" b="0">
+              <a:rPr sz="1100" b="0">
                 <a:solidFill>
                   <a:srgbClr val="404041"/>
                 </a:solidFill>
@@ -26695,11 +27740,11 @@
                 <a:spcPts val="0"/>
               </a:spcBef>
               <a:spcAft>
-                <a:spcPts val="800"/>
+                <a:spcPts val="500"/>
               </a:spcAft>
             </a:pPr>
             <a:r>
-              <a:rPr sz="1200">
+              <a:rPr sz="1100">
                 <a:solidFill>
                   <a:srgbClr val="8CC63E"/>
                 </a:solidFill>
@@ -26708,7 +27753,7 @@
               <a:t>■  </a:t>
             </a:r>
             <a:r>
-              <a:rPr sz="1200" b="0">
+              <a:rPr sz="1100" b="0">
                 <a:solidFill>
                   <a:srgbClr val="404041"/>
                 </a:solidFill>
@@ -26723,11 +27768,11 @@
                 <a:spcPts val="0"/>
               </a:spcBef>
               <a:spcAft>
-                <a:spcPts val="800"/>
+                <a:spcPts val="500"/>
               </a:spcAft>
             </a:pPr>
             <a:r>
-              <a:rPr sz="1200">
+              <a:rPr sz="1100">
                 <a:solidFill>
                   <a:srgbClr val="8CC63E"/>
                 </a:solidFill>
@@ -26736,7 +27781,7 @@
               <a:t>■  </a:t>
             </a:r>
             <a:r>
-              <a:rPr sz="1200" b="0">
+              <a:rPr sz="1100" b="0">
                 <a:solidFill>
                   <a:srgbClr val="404041"/>
                 </a:solidFill>
@@ -26751,11 +27796,11 @@
                 <a:spcPts val="0"/>
               </a:spcBef>
               <a:spcAft>
-                <a:spcPts val="800"/>
+                <a:spcPts val="500"/>
               </a:spcAft>
             </a:pPr>
             <a:r>
-              <a:rPr sz="1200">
+              <a:rPr sz="1100">
                 <a:solidFill>
                   <a:srgbClr val="8CC63E"/>
                 </a:solidFill>
@@ -26764,7 +27809,7 @@
               <a:t>■  </a:t>
             </a:r>
             <a:r>
-              <a:rPr sz="1200" b="0">
+              <a:rPr sz="1100" b="0">
                 <a:solidFill>
                   <a:srgbClr val="404041"/>
                 </a:solidFill>
@@ -26779,11 +27824,11 @@
                 <a:spcPts val="0"/>
               </a:spcBef>
               <a:spcAft>
-                <a:spcPts val="800"/>
+                <a:spcPts val="500"/>
               </a:spcAft>
             </a:pPr>
             <a:r>
-              <a:rPr sz="1200">
+              <a:rPr sz="1100">
                 <a:solidFill>
                   <a:srgbClr val="8CC63E"/>
                 </a:solidFill>
@@ -26792,7 +27837,7 @@
               <a:t>■  </a:t>
             </a:r>
             <a:r>
-              <a:rPr sz="1200" b="0">
+              <a:rPr sz="1100" b="0">
                 <a:solidFill>
                   <a:srgbClr val="404041"/>
                 </a:solidFill>
@@ -26811,8 +27856,8 @@
         </p:nvSpPr>
         <p:spPr>
           <a:xfrm>
-            <a:off x="609584" y="4826051"/>
-            <a:ext cx="3513579" cy="952476"/>
+            <a:off x="609584" y="4559183"/>
+            <a:ext cx="3513579" cy="825479"/>
           </a:xfrm>
           <a:prstGeom prst="rect">
             <a:avLst/>
@@ -26826,7 +27871,7 @@
           <a:lstStyle/>
           <a:p>
             <a:r>
-              <a:rPr sz="1150">
+              <a:rPr sz="1050">
                 <a:solidFill>
                   <a:srgbClr val="8CC63E"/>
                 </a:solidFill>
@@ -26835,7 +27880,7 @@
               <a:t>■  </a:t>
             </a:r>
             <a:r>
-              <a:rPr sz="1150" b="1">
+              <a:rPr sz="1050" b="1">
                 <a:solidFill>
                   <a:srgbClr val="404041"/>
                 </a:solidFill>
@@ -26844,7 +27889,7 @@
               <a:t>Escrow</a:t>
             </a:r>
             <a:r>
-              <a:rPr sz="1150" b="0">
+              <a:rPr sz="1050" b="0">
                 <a:solidFill>
                   <a:srgbClr val="404041"/>
                 </a:solidFill>
@@ -26863,8 +27908,8 @@
         </p:nvSpPr>
         <p:spPr>
           <a:xfrm>
-            <a:off x="4339057" y="4826051"/>
-            <a:ext cx="3513579" cy="952476"/>
+            <a:off x="4339057" y="4559183"/>
+            <a:ext cx="3513579" cy="825479"/>
           </a:xfrm>
           <a:prstGeom prst="rect">
             <a:avLst/>
@@ -26878,7 +27923,7 @@
           <a:lstStyle/>
           <a:p>
             <a:r>
-              <a:rPr sz="1150">
+              <a:rPr sz="1050">
                 <a:solidFill>
                   <a:srgbClr val="8CC63E"/>
                 </a:solidFill>
@@ -26887,7 +27932,7 @@
               <a:t>■  </a:t>
             </a:r>
             <a:r>
-              <a:rPr sz="1150" b="1">
+              <a:rPr sz="1050" b="1">
                 <a:solidFill>
                   <a:srgbClr val="404041"/>
                 </a:solidFill>
@@ -26896,7 +27941,7 @@
               <a:t>Amortization:</a:t>
             </a:r>
             <a:r>
-              <a:rPr sz="1150" b="0">
+              <a:rPr sz="1050" b="0">
                 <a:solidFill>
                   <a:srgbClr val="404041"/>
                 </a:solidFill>
@@ -26915,8 +27960,8 @@
         </p:nvSpPr>
         <p:spPr>
           <a:xfrm>
-            <a:off x="8068530" y="4826051"/>
-            <a:ext cx="3513579" cy="952476"/>
+            <a:off x="8068530" y="4559183"/>
+            <a:ext cx="3513579" cy="825479"/>
           </a:xfrm>
           <a:prstGeom prst="rect">
             <a:avLst/>
@@ -26930,7 +27975,7 @@
           <a:lstStyle/>
           <a:p>
             <a:r>
-              <a:rPr sz="1150">
+              <a:rPr sz="1050">
                 <a:solidFill>
                   <a:srgbClr val="8CC63E"/>
                 </a:solidFill>
@@ -26939,7 +27984,7 @@
               <a:t>■  </a:t>
             </a:r>
             <a:r>
-              <a:rPr sz="1150" b="1">
+              <a:rPr sz="1050" b="1">
                 <a:solidFill>
                   <a:srgbClr val="404041"/>
                 </a:solidFill>
@@ -26948,7 +27993,7 @@
               <a:t>Refinancing resets the clock</a:t>
             </a:r>
             <a:r>
-              <a:rPr sz="1150" b="0">
+              <a:rPr sz="1050" b="0">
                 <a:solidFill>
                   <a:srgbClr val="404041"/>
                 </a:solidFill>
@@ -29854,7 +30899,7 @@
         </p:nvSpPr>
         <p:spPr>
           <a:xfrm>
-            <a:off x="609584" y="939775"/>
+            <a:off x="609584" y="863577"/>
             <a:ext cx="10972527" cy="1269968"/>
           </a:xfrm>
           <a:prstGeom prst="rect">
@@ -29870,7 +30915,7 @@
           <a:p>
             <a:pPr algn="l"/>
             <a:r>
-              <a:rPr sz="3000" b="1">
+              <a:rPr sz="2800" b="1">
                 <a:solidFill>
                   <a:srgbClr val="0C3335"/>
                 </a:solidFill>
@@ -29889,7 +30934,7 @@
         </p:nvSpPr>
         <p:spPr>
           <a:xfrm>
-            <a:off x="609584" y="1892251"/>
+            <a:off x="609584" y="1523961"/>
             <a:ext cx="609584" cy="50798"/>
           </a:xfrm>
           <a:prstGeom prst="rect">
@@ -29933,7 +30978,7 @@
         </p:nvSpPr>
         <p:spPr>
           <a:xfrm>
-            <a:off x="609584" y="2108145"/>
+            <a:off x="609584" y="1714456"/>
             <a:ext cx="8254793" cy="761980"/>
           </a:xfrm>
           <a:prstGeom prst="rect">
@@ -29968,8 +31013,8 @@
         </p:nvSpPr>
         <p:spPr>
           <a:xfrm>
-            <a:off x="609584" y="2806627"/>
-            <a:ext cx="4825879" cy="317492"/>
+            <a:off x="609584" y="2158945"/>
+            <a:ext cx="4825879" cy="292092"/>
           </a:xfrm>
           <a:prstGeom prst="rect">
             <a:avLst/>
@@ -29984,7 +31029,7 @@
           <a:p>
             <a:pPr algn="l"/>
             <a:r>
-              <a:rPr sz="1400" b="1">
+              <a:rPr sz="1300" b="1">
                 <a:solidFill>
                   <a:srgbClr val="0C3335"/>
                 </a:solidFill>
@@ -30003,7 +31048,7 @@
         </p:nvSpPr>
         <p:spPr>
           <a:xfrm>
-            <a:off x="609584" y="3136818"/>
+            <a:off x="609584" y="2451037"/>
             <a:ext cx="4825879" cy="28575"/>
           </a:xfrm>
           <a:prstGeom prst="rect">
@@ -30047,8 +31092,8 @@
         </p:nvSpPr>
         <p:spPr>
           <a:xfrm>
-            <a:off x="609584" y="3276515"/>
-            <a:ext cx="4825879" cy="1904952"/>
+            <a:off x="609584" y="2565334"/>
+            <a:ext cx="4825879" cy="1396965"/>
           </a:xfrm>
           <a:prstGeom prst="rect">
             <a:avLst/>
@@ -30062,7 +31107,7 @@
           <a:lstStyle/>
           <a:p>
             <a:r>
-              <a:rPr sz="1300">
+              <a:rPr sz="1200">
                 <a:solidFill>
                   <a:srgbClr val="8CC63E"/>
                 </a:solidFill>
@@ -30071,13 +31116,336 @@
               <a:t>■  </a:t>
             </a:r>
             <a:r>
-              <a:rPr sz="1300" b="0">
+              <a:rPr sz="1200" b="0">
                 <a:solidFill>
                   <a:srgbClr val="404041"/>
                 </a:solidFill>
                 <a:latin typeface="Open Sans"/>
               </a:rPr>
               <a:t>Allowable closing costs</a:t>
+            </a:r>
+          </a:p>
+          <a:p>
+            <a:pPr algn="l">
+              <a:spcBef>
+                <a:spcPts val="0"/>
+              </a:spcBef>
+              <a:spcAft>
+                <a:spcPts val="600"/>
+              </a:spcAft>
+            </a:pPr>
+            <a:r>
+              <a:rPr sz="1200">
+                <a:solidFill>
+                  <a:srgbClr val="8CC63E"/>
+                </a:solidFill>
+                <a:latin typeface="Open Sans"/>
+              </a:rPr>
+              <a:t>■  </a:t>
+            </a:r>
+            <a:r>
+              <a:rPr sz="1200" b="0">
+                <a:solidFill>
+                  <a:srgbClr val="404041"/>
+                </a:solidFill>
+                <a:latin typeface="Open Sans"/>
+              </a:rPr>
+              <a:t>Prepaid items</a:t>
+            </a:r>
+          </a:p>
+          <a:p>
+            <a:pPr algn="l">
+              <a:spcBef>
+                <a:spcPts val="0"/>
+              </a:spcBef>
+              <a:spcAft>
+                <a:spcPts val="600"/>
+              </a:spcAft>
+            </a:pPr>
+            <a:r>
+              <a:rPr sz="1200">
+                <a:solidFill>
+                  <a:srgbClr val="8CC63E"/>
+                </a:solidFill>
+                <a:latin typeface="Open Sans"/>
+              </a:rPr>
+              <a:t>■  </a:t>
+            </a:r>
+            <a:r>
+              <a:rPr sz="1200" b="0">
+                <a:solidFill>
+                  <a:srgbClr val="404041"/>
+                </a:solidFill>
+                <a:latin typeface="Open Sans"/>
+              </a:rPr>
+              <a:t>Escrow deposits</a:t>
+            </a:r>
+          </a:p>
+          <a:p>
+            <a:pPr algn="l">
+              <a:spcBef>
+                <a:spcPts val="0"/>
+              </a:spcBef>
+              <a:spcAft>
+                <a:spcPts val="600"/>
+              </a:spcAft>
+            </a:pPr>
+            <a:r>
+              <a:rPr sz="1200">
+                <a:solidFill>
+                  <a:srgbClr val="8CC63E"/>
+                </a:solidFill>
+                <a:latin typeface="Open Sans"/>
+              </a:rPr>
+              <a:t>■  </a:t>
+            </a:r>
+            <a:r>
+              <a:rPr sz="1200" b="0">
+                <a:solidFill>
+                  <a:srgbClr val="404041"/>
+                </a:solidFill>
+                <a:latin typeface="Open Sans"/>
+              </a:rPr>
+              <a:t>Points to lower the rate</a:t>
+            </a:r>
+          </a:p>
+        </p:txBody>
+      </p:sp>
+      <p:sp>
+        <p:nvSpPr>
+          <p:cNvPr id="9" name="TextBox 8"/>
+          <p:cNvSpPr txBox="1"/>
+          <p:nvPr/>
+        </p:nvSpPr>
+        <p:spPr>
+          <a:xfrm>
+            <a:off x="5816453" y="2158945"/>
+            <a:ext cx="4825879" cy="292092"/>
+          </a:xfrm>
+          <a:prstGeom prst="rect">
+            <a:avLst/>
+          </a:prstGeom>
+          <a:noFill/>
+        </p:spPr>
+        <p:txBody>
+          <a:bodyPr wrap="square" anchor="t" lIns="0" rIns="0" tIns="0" bIns="0">
+            <a:spAutoFit/>
+          </a:bodyPr>
+          <a:lstStyle/>
+          <a:p>
+            <a:pPr algn="l"/>
+            <a:r>
+              <a:rPr sz="1300" b="1">
+                <a:solidFill>
+                  <a:srgbClr val="0C3335"/>
+                </a:solidFill>
+                <a:latin typeface="Montserrat"/>
+              </a:rPr>
+              <a:t>Credits CANNOT pay</a:t>
+            </a:r>
+          </a:p>
+        </p:txBody>
+      </p:sp>
+      <p:sp>
+        <p:nvSpPr>
+          <p:cNvPr id="10" name="Rectangle 9"/>
+          <p:cNvSpPr/>
+          <p:nvPr/>
+        </p:nvSpPr>
+        <p:spPr>
+          <a:xfrm>
+            <a:off x="5816453" y="2451037"/>
+            <a:ext cx="4825879" cy="28575"/>
+          </a:xfrm>
+          <a:prstGeom prst="rect">
+            <a:avLst/>
+          </a:prstGeom>
+          <a:solidFill>
+            <a:srgbClr val="8CC63E"/>
+          </a:solidFill>
+          <a:ln>
+            <a:noFill/>
+          </a:ln>
+          <a:effectLst/>
+        </p:spPr>
+        <p:style>
+          <a:lnRef idx="1">
+            <a:schemeClr val="accent1"/>
+          </a:lnRef>
+          <a:fillRef idx="3">
+            <a:schemeClr val="accent1"/>
+          </a:fillRef>
+          <a:effectRef idx="2">
+            <a:schemeClr val="accent1"/>
+          </a:effectRef>
+          <a:fontRef idx="minor">
+            <a:schemeClr val="lt1"/>
+          </a:fontRef>
+        </p:style>
+        <p:txBody>
+          <a:bodyPr rtlCol="0" anchor="ctr"/>
+          <a:lstStyle/>
+          <a:p>
+            <a:pPr algn="ctr"/>
+          </a:p>
+        </p:txBody>
+      </p:sp>
+      <p:sp>
+        <p:nvSpPr>
+          <p:cNvPr id="11" name="TextBox 10"/>
+          <p:cNvSpPr txBox="1"/>
+          <p:nvPr/>
+        </p:nvSpPr>
+        <p:spPr>
+          <a:xfrm>
+            <a:off x="5816453" y="2565334"/>
+            <a:ext cx="4825879" cy="1396965"/>
+          </a:xfrm>
+          <a:prstGeom prst="rect">
+            <a:avLst/>
+          </a:prstGeom>
+          <a:noFill/>
+        </p:spPr>
+        <p:txBody>
+          <a:bodyPr wrap="square" anchor="t" lIns="0" rIns="0" tIns="0" bIns="0">
+            <a:spAutoFit/>
+          </a:bodyPr>
+          <a:lstStyle/>
+          <a:p>
+            <a:r>
+              <a:rPr sz="1200">
+                <a:solidFill>
+                  <a:srgbClr val="8CC63E"/>
+                </a:solidFill>
+                <a:latin typeface="Open Sans"/>
+              </a:rPr>
+              <a:t>■  </a:t>
+            </a:r>
+            <a:r>
+              <a:rPr sz="1200" b="0">
+                <a:solidFill>
+                  <a:srgbClr val="404041"/>
+                </a:solidFill>
+                <a:latin typeface="Open Sans"/>
+              </a:rPr>
+              <a:t>Your down payment</a:t>
+            </a:r>
+          </a:p>
+          <a:p>
+            <a:pPr algn="l">
+              <a:spcBef>
+                <a:spcPts val="0"/>
+              </a:spcBef>
+              <a:spcAft>
+                <a:spcPts val="600"/>
+              </a:spcAft>
+            </a:pPr>
+            <a:r>
+              <a:rPr sz="1200">
+                <a:solidFill>
+                  <a:srgbClr val="8CC63E"/>
+                </a:solidFill>
+                <a:latin typeface="Open Sans"/>
+              </a:rPr>
+              <a:t>■  </a:t>
+            </a:r>
+            <a:r>
+              <a:rPr sz="1200" b="0">
+                <a:solidFill>
+                  <a:srgbClr val="404041"/>
+                </a:solidFill>
+                <a:latin typeface="Open Sans"/>
+              </a:rPr>
+              <a:t>More than your actual costs</a:t>
+            </a:r>
+          </a:p>
+          <a:p>
+            <a:pPr algn="l">
+              <a:spcBef>
+                <a:spcPts val="0"/>
+              </a:spcBef>
+              <a:spcAft>
+                <a:spcPts val="600"/>
+              </a:spcAft>
+            </a:pPr>
+            <a:r>
+              <a:rPr sz="1200">
+                <a:solidFill>
+                  <a:srgbClr val="8CC63E"/>
+                </a:solidFill>
+                <a:latin typeface="Open Sans"/>
+              </a:rPr>
+              <a:t>■  </a:t>
+            </a:r>
+            <a:r>
+              <a:rPr sz="1200" b="0">
+                <a:solidFill>
+                  <a:srgbClr val="404041"/>
+                </a:solidFill>
+                <a:latin typeface="Open Sans"/>
+              </a:rPr>
+              <a:t>Cash back to you</a:t>
+            </a:r>
+          </a:p>
+        </p:txBody>
+      </p:sp>
+      <p:sp>
+        <p:nvSpPr>
+          <p:cNvPr id="12" name="TextBox 11"/>
+          <p:cNvSpPr txBox="1"/>
+          <p:nvPr/>
+        </p:nvSpPr>
+        <p:spPr>
+          <a:xfrm>
+            <a:off x="609584" y="3746405"/>
+            <a:ext cx="9905752" cy="1523961"/>
+          </a:xfrm>
+          <a:prstGeom prst="rect">
+            <a:avLst/>
+          </a:prstGeom>
+          <a:noFill/>
+        </p:spPr>
+        <p:txBody>
+          <a:bodyPr wrap="square" anchor="t" lIns="0" rIns="0" tIns="0" bIns="0">
+            <a:spAutoFit/>
+          </a:bodyPr>
+          <a:lstStyle/>
+          <a:p>
+            <a:r>
+              <a:rPr sz="1200">
+                <a:solidFill>
+                  <a:srgbClr val="8CC63E"/>
+                </a:solidFill>
+                <a:latin typeface="Open Sans"/>
+              </a:rPr>
+              <a:t>■  </a:t>
+            </a:r>
+            <a:r>
+              <a:rPr sz="1200" b="0">
+                <a:solidFill>
+                  <a:srgbClr val="404041"/>
+                </a:solidFill>
+                <a:latin typeface="Open Sans"/>
+              </a:rPr>
+              <a:t>You can use </a:t>
+            </a:r>
+            <a:r>
+              <a:rPr sz="1200" b="1">
+                <a:solidFill>
+                  <a:srgbClr val="404041"/>
+                </a:solidFill>
+                <a:latin typeface="Open Sans"/>
+              </a:rPr>
+              <a:t>points</a:t>
+            </a:r>
+            <a:r>
+              <a:rPr sz="1200" b="0">
+                <a:solidFill>
+                  <a:srgbClr val="404041"/>
+                </a:solidFill>
+                <a:latin typeface="Open Sans"/>
+              </a:rPr>
+              <a:t> to buy down the rate — or credits to cover closing costs</a:t>
             </a:r>
           </a:p>
           <a:p>
@@ -30090,7 +31458,7 @@
               </a:spcAft>
             </a:pPr>
             <a:r>
-              <a:rPr sz="1300">
+              <a:rPr sz="1200">
                 <a:solidFill>
                   <a:srgbClr val="8CC63E"/>
                 </a:solidFill>
@@ -30099,13 +31467,22 @@
               <a:t>■  </a:t>
             </a:r>
             <a:r>
-              <a:rPr sz="1300" b="0">
+              <a:rPr sz="1200" b="1">
                 <a:solidFill>
                   <a:srgbClr val="404041"/>
                 </a:solidFill>
                 <a:latin typeface="Open Sans"/>
               </a:rPr>
-              <a:t>Prepaid items</a:t>
+              <a:t>Prepaids</a:t>
+            </a:r>
+            <a:r>
+              <a:rPr sz="1200" b="0">
+                <a:solidFill>
+                  <a:srgbClr val="404041"/>
+                </a:solidFill>
+                <a:latin typeface="Open Sans"/>
+              </a:rPr>
+              <a:t> (first insurance, some taxes) are your own money paid early, not a fee</a:t>
             </a:r>
           </a:p>
           <a:p>
@@ -30118,7 +31495,7 @@
               </a:spcAft>
             </a:pPr>
             <a:r>
-              <a:rPr sz="1300">
+              <a:rPr sz="1200">
                 <a:solidFill>
                   <a:srgbClr val="8CC63E"/>
                 </a:solidFill>
@@ -30127,348 +31504,16 @@
               <a:t>■  </a:t>
             </a:r>
             <a:r>
-              <a:rPr sz="1300" b="0">
+              <a:rPr sz="1200" b="1">
                 <a:solidFill>
                   <a:srgbClr val="404041"/>
                 </a:solidFill>
                 <a:latin typeface="Open Sans"/>
               </a:rPr>
-              <a:t>Escrow deposits</a:t>
-            </a:r>
-          </a:p>
-          <a:p>
-            <a:pPr algn="l">
-              <a:spcBef>
-                <a:spcPts val="0"/>
-              </a:spcBef>
-              <a:spcAft>
-                <a:spcPts val="1000"/>
-              </a:spcAft>
-            </a:pPr>
-            <a:r>
-              <a:rPr sz="1300">
-                <a:solidFill>
-                  <a:srgbClr val="8CC63E"/>
-                </a:solidFill>
-                <a:latin typeface="Open Sans"/>
-              </a:rPr>
-              <a:t>■  </a:t>
-            </a:r>
-            <a:r>
-              <a:rPr sz="1300" b="0">
-                <a:solidFill>
-                  <a:srgbClr val="404041"/>
-                </a:solidFill>
-                <a:latin typeface="Open Sans"/>
-              </a:rPr>
-              <a:t>Points to lower the rate</a:t>
-            </a:r>
-          </a:p>
-        </p:txBody>
-      </p:sp>
-      <p:sp>
-        <p:nvSpPr>
-          <p:cNvPr id="9" name="TextBox 8"/>
-          <p:cNvSpPr txBox="1"/>
-          <p:nvPr/>
-        </p:nvSpPr>
-        <p:spPr>
-          <a:xfrm>
-            <a:off x="5816453" y="2806627"/>
-            <a:ext cx="4825879" cy="317492"/>
-          </a:xfrm>
-          <a:prstGeom prst="rect">
-            <a:avLst/>
-          </a:prstGeom>
-          <a:noFill/>
-        </p:spPr>
-        <p:txBody>
-          <a:bodyPr wrap="square" anchor="t" lIns="0" rIns="0" tIns="0" bIns="0">
-            <a:spAutoFit/>
-          </a:bodyPr>
-          <a:lstStyle/>
-          <a:p>
-            <a:pPr algn="l"/>
-            <a:r>
-              <a:rPr sz="1400" b="1">
-                <a:solidFill>
-                  <a:srgbClr val="0C3335"/>
-                </a:solidFill>
-                <a:latin typeface="Montserrat"/>
-              </a:rPr>
-              <a:t>Credits CANNOT pay</a:t>
-            </a:r>
-          </a:p>
-        </p:txBody>
-      </p:sp>
-      <p:sp>
-        <p:nvSpPr>
-          <p:cNvPr id="10" name="Rectangle 9"/>
-          <p:cNvSpPr/>
-          <p:nvPr/>
-        </p:nvSpPr>
-        <p:spPr>
-          <a:xfrm>
-            <a:off x="5816453" y="3136818"/>
-            <a:ext cx="4825879" cy="28575"/>
-          </a:xfrm>
-          <a:prstGeom prst="rect">
-            <a:avLst/>
-          </a:prstGeom>
-          <a:solidFill>
-            <a:srgbClr val="8CC63E"/>
-          </a:solidFill>
-          <a:ln>
-            <a:noFill/>
-          </a:ln>
-          <a:effectLst/>
-        </p:spPr>
-        <p:style>
-          <a:lnRef idx="1">
-            <a:schemeClr val="accent1"/>
-          </a:lnRef>
-          <a:fillRef idx="3">
-            <a:schemeClr val="accent1"/>
-          </a:fillRef>
-          <a:effectRef idx="2">
-            <a:schemeClr val="accent1"/>
-          </a:effectRef>
-          <a:fontRef idx="minor">
-            <a:schemeClr val="lt1"/>
-          </a:fontRef>
-        </p:style>
-        <p:txBody>
-          <a:bodyPr rtlCol="0" anchor="ctr"/>
-          <a:lstStyle/>
-          <a:p>
-            <a:pPr algn="ctr"/>
-          </a:p>
-        </p:txBody>
-      </p:sp>
-      <p:sp>
-        <p:nvSpPr>
-          <p:cNvPr id="11" name="TextBox 10"/>
-          <p:cNvSpPr txBox="1"/>
-          <p:nvPr/>
-        </p:nvSpPr>
-        <p:spPr>
-          <a:xfrm>
-            <a:off x="5816453" y="3276515"/>
-            <a:ext cx="4825879" cy="1904952"/>
-          </a:xfrm>
-          <a:prstGeom prst="rect">
-            <a:avLst/>
-          </a:prstGeom>
-          <a:noFill/>
-        </p:spPr>
-        <p:txBody>
-          <a:bodyPr wrap="square" anchor="t" lIns="0" rIns="0" tIns="0" bIns="0">
-            <a:spAutoFit/>
-          </a:bodyPr>
-          <a:lstStyle/>
-          <a:p>
-            <a:r>
-              <a:rPr sz="1300">
-                <a:solidFill>
-                  <a:srgbClr val="8CC63E"/>
-                </a:solidFill>
-                <a:latin typeface="Open Sans"/>
-              </a:rPr>
-              <a:t>■  </a:t>
-            </a:r>
-            <a:r>
-              <a:rPr sz="1300" b="0">
-                <a:solidFill>
-                  <a:srgbClr val="404041"/>
-                </a:solidFill>
-                <a:latin typeface="Open Sans"/>
-              </a:rPr>
-              <a:t>Your down payment</a:t>
-            </a:r>
-          </a:p>
-          <a:p>
-            <a:pPr algn="l">
-              <a:spcBef>
-                <a:spcPts val="0"/>
-              </a:spcBef>
-              <a:spcAft>
-                <a:spcPts val="1000"/>
-              </a:spcAft>
-            </a:pPr>
-            <a:r>
-              <a:rPr sz="1300">
-                <a:solidFill>
-                  <a:srgbClr val="8CC63E"/>
-                </a:solidFill>
-                <a:latin typeface="Open Sans"/>
-              </a:rPr>
-              <a:t>■  </a:t>
-            </a:r>
-            <a:r>
-              <a:rPr sz="1300" b="0">
-                <a:solidFill>
-                  <a:srgbClr val="404041"/>
-                </a:solidFill>
-                <a:latin typeface="Open Sans"/>
-              </a:rPr>
-              <a:t>More than your actual costs</a:t>
-            </a:r>
-          </a:p>
-          <a:p>
-            <a:pPr algn="l">
-              <a:spcBef>
-                <a:spcPts val="0"/>
-              </a:spcBef>
-              <a:spcAft>
-                <a:spcPts val="1000"/>
-              </a:spcAft>
-            </a:pPr>
-            <a:r>
-              <a:rPr sz="1300">
-                <a:solidFill>
-                  <a:srgbClr val="8CC63E"/>
-                </a:solidFill>
-                <a:latin typeface="Open Sans"/>
-              </a:rPr>
-              <a:t>■  </a:t>
-            </a:r>
-            <a:r>
-              <a:rPr sz="1300" b="0">
-                <a:solidFill>
-                  <a:srgbClr val="404041"/>
-                </a:solidFill>
-                <a:latin typeface="Open Sans"/>
-              </a:rPr>
-              <a:t>Cash back to you</a:t>
-            </a:r>
-          </a:p>
-        </p:txBody>
-      </p:sp>
-      <p:sp>
-        <p:nvSpPr>
-          <p:cNvPr id="12" name="TextBox 11"/>
-          <p:cNvSpPr txBox="1"/>
-          <p:nvPr/>
-        </p:nvSpPr>
-        <p:spPr>
-          <a:xfrm>
-            <a:off x="609584" y="4127569"/>
-            <a:ext cx="9524761" cy="1904952"/>
-          </a:xfrm>
-          <a:prstGeom prst="rect">
-            <a:avLst/>
-          </a:prstGeom>
-          <a:noFill/>
-        </p:spPr>
-        <p:txBody>
-          <a:bodyPr wrap="square" anchor="t" lIns="0" rIns="0" tIns="0" bIns="0">
-            <a:spAutoFit/>
-          </a:bodyPr>
-          <a:lstStyle/>
-          <a:p>
-            <a:r>
-              <a:rPr sz="1300">
-                <a:solidFill>
-                  <a:srgbClr val="8CC63E"/>
-                </a:solidFill>
-                <a:latin typeface="Open Sans"/>
-              </a:rPr>
-              <a:t>■  </a:t>
-            </a:r>
-            <a:r>
-              <a:rPr sz="1300" b="0">
-                <a:solidFill>
-                  <a:srgbClr val="404041"/>
-                </a:solidFill>
-                <a:latin typeface="Open Sans"/>
-              </a:rPr>
-              <a:t>You can use </a:t>
-            </a:r>
-            <a:r>
-              <a:rPr sz="1300" b="1">
-                <a:solidFill>
-                  <a:srgbClr val="404041"/>
-                </a:solidFill>
-                <a:latin typeface="Open Sans"/>
-              </a:rPr>
-              <a:t>points</a:t>
-            </a:r>
-            <a:r>
-              <a:rPr sz="1300" b="0">
-                <a:solidFill>
-                  <a:srgbClr val="404041"/>
-                </a:solidFill>
-                <a:latin typeface="Open Sans"/>
-              </a:rPr>
-              <a:t> to buy down the rate — or credits to cover closing costs</a:t>
-            </a:r>
-          </a:p>
-          <a:p>
-            <a:pPr algn="l">
-              <a:spcBef>
-                <a:spcPts val="0"/>
-              </a:spcBef>
-              <a:spcAft>
-                <a:spcPts val="1200"/>
-              </a:spcAft>
-            </a:pPr>
-            <a:r>
-              <a:rPr sz="1300">
-                <a:solidFill>
-                  <a:srgbClr val="8CC63E"/>
-                </a:solidFill>
-                <a:latin typeface="Open Sans"/>
-              </a:rPr>
-              <a:t>■  </a:t>
-            </a:r>
-            <a:r>
-              <a:rPr sz="1300" b="1">
-                <a:solidFill>
-                  <a:srgbClr val="404041"/>
-                </a:solidFill>
-                <a:latin typeface="Open Sans"/>
-              </a:rPr>
-              <a:t>Prepaids</a:t>
-            </a:r>
-            <a:r>
-              <a:rPr sz="1300" b="0">
-                <a:solidFill>
-                  <a:srgbClr val="404041"/>
-                </a:solidFill>
-                <a:latin typeface="Open Sans"/>
-              </a:rPr>
-              <a:t> (first insurance, some taxes) are your own money paid early, not a fee</a:t>
-            </a:r>
-          </a:p>
-          <a:p>
-            <a:pPr algn="l">
-              <a:spcBef>
-                <a:spcPts val="0"/>
-              </a:spcBef>
-              <a:spcAft>
-                <a:spcPts val="1200"/>
-              </a:spcAft>
-            </a:pPr>
-            <a:r>
-              <a:rPr sz="1300">
-                <a:solidFill>
-                  <a:srgbClr val="8CC63E"/>
-                </a:solidFill>
-                <a:latin typeface="Open Sans"/>
-              </a:rPr>
-              <a:t>■  </a:t>
-            </a:r>
-            <a:r>
-              <a:rPr sz="1300" b="1">
-                <a:solidFill>
-                  <a:srgbClr val="404041"/>
-                </a:solidFill>
-                <a:latin typeface="Open Sans"/>
-              </a:rPr>
               <a:t>Reserves</a:t>
             </a:r>
             <a:r>
-              <a:rPr sz="1300" b="0">
+              <a:rPr sz="1200" b="0">
                 <a:solidFill>
                   <a:srgbClr val="404041"/>
                 </a:solidFill>
